--- a/dapan/cau 3.pptx
+++ b/dapan/cau 3.pptx
@@ -420,6 +420,7 @@
             <c:showLeaderLines val="0"/>
             <c:extLst>
               <c:ext xmlns:c15="http://schemas.microsoft.com/office/drawing/2012/chart" uri="{CE6537A1-D6FC-4f65-9D91-7224C49458BB}">
+                <c15:layout/>
                 <c15:showLeaderLines val="1"/>
                 <c15:leaderLines>
                   <c:spPr>
@@ -603,6 +604,7 @@
     </c:plotArea>
     <c:legend>
       <c:legendPos val="b"/>
+      <c:layout/>
       <c:overlay val="0"/>
       <c:spPr>
         <a:noFill/>
@@ -1316,7 +1318,7 @@
           <a:p>
             <a:fld id="{0499211D-10D7-4F49-ADEF-55BEAD014249}" type="datetimeFigureOut">
               <a:rPr lang="en-US" smtClean="0"/>
-              <a:t>9/13/2025</a:t>
+              <a:t>14/09/2025</a:t>
             </a:fld>
             <a:endParaRPr lang="en-US"/>
           </a:p>
@@ -1514,7 +1516,7 @@
           <a:p>
             <a:fld id="{0499211D-10D7-4F49-ADEF-55BEAD014249}" type="datetimeFigureOut">
               <a:rPr lang="en-US" smtClean="0"/>
-              <a:t>9/13/2025</a:t>
+              <a:t>14/09/2025</a:t>
             </a:fld>
             <a:endParaRPr lang="en-US"/>
           </a:p>
@@ -1722,7 +1724,7 @@
           <a:p>
             <a:fld id="{0499211D-10D7-4F49-ADEF-55BEAD014249}" type="datetimeFigureOut">
               <a:rPr lang="en-US" smtClean="0"/>
-              <a:t>9/13/2025</a:t>
+              <a:t>14/09/2025</a:t>
             </a:fld>
             <a:endParaRPr lang="en-US"/>
           </a:p>
@@ -1920,7 +1922,7 @@
           <a:p>
             <a:fld id="{0499211D-10D7-4F49-ADEF-55BEAD014249}" type="datetimeFigureOut">
               <a:rPr lang="en-US" smtClean="0"/>
-              <a:t>9/13/2025</a:t>
+              <a:t>14/09/2025</a:t>
             </a:fld>
             <a:endParaRPr lang="en-US"/>
           </a:p>
@@ -2195,7 +2197,7 @@
           <a:p>
             <a:fld id="{0499211D-10D7-4F49-ADEF-55BEAD014249}" type="datetimeFigureOut">
               <a:rPr lang="en-US" smtClean="0"/>
-              <a:t>9/13/2025</a:t>
+              <a:t>14/09/2025</a:t>
             </a:fld>
             <a:endParaRPr lang="en-US"/>
           </a:p>
@@ -2460,7 +2462,7 @@
           <a:p>
             <a:fld id="{0499211D-10D7-4F49-ADEF-55BEAD014249}" type="datetimeFigureOut">
               <a:rPr lang="en-US" smtClean="0"/>
-              <a:t>9/13/2025</a:t>
+              <a:t>14/09/2025</a:t>
             </a:fld>
             <a:endParaRPr lang="en-US"/>
           </a:p>
@@ -2872,7 +2874,7 @@
           <a:p>
             <a:fld id="{0499211D-10D7-4F49-ADEF-55BEAD014249}" type="datetimeFigureOut">
               <a:rPr lang="en-US" smtClean="0"/>
-              <a:t>9/13/2025</a:t>
+              <a:t>14/09/2025</a:t>
             </a:fld>
             <a:endParaRPr lang="en-US"/>
           </a:p>
@@ -3013,7 +3015,7 @@
           <a:p>
             <a:fld id="{0499211D-10D7-4F49-ADEF-55BEAD014249}" type="datetimeFigureOut">
               <a:rPr lang="en-US" smtClean="0"/>
-              <a:t>9/13/2025</a:t>
+              <a:t>14/09/2025</a:t>
             </a:fld>
             <a:endParaRPr lang="en-US"/>
           </a:p>
@@ -3126,7 +3128,7 @@
           <a:p>
             <a:fld id="{0499211D-10D7-4F49-ADEF-55BEAD014249}" type="datetimeFigureOut">
               <a:rPr lang="en-US" smtClean="0"/>
-              <a:t>9/13/2025</a:t>
+              <a:t>14/09/2025</a:t>
             </a:fld>
             <a:endParaRPr lang="en-US"/>
           </a:p>
@@ -3437,7 +3439,7 @@
           <a:p>
             <a:fld id="{0499211D-10D7-4F49-ADEF-55BEAD014249}" type="datetimeFigureOut">
               <a:rPr lang="en-US" smtClean="0"/>
-              <a:t>9/13/2025</a:t>
+              <a:t>14/09/2025</a:t>
             </a:fld>
             <a:endParaRPr lang="en-US"/>
           </a:p>
@@ -3725,7 +3727,7 @@
           <a:p>
             <a:fld id="{0499211D-10D7-4F49-ADEF-55BEAD014249}" type="datetimeFigureOut">
               <a:rPr lang="en-US" smtClean="0"/>
-              <a:t>9/13/2025</a:t>
+              <a:t>14/09/2025</a:t>
             </a:fld>
             <a:endParaRPr lang="en-US"/>
           </a:p>
@@ -3966,7 +3968,7 @@
           <a:p>
             <a:fld id="{0499211D-10D7-4F49-ADEF-55BEAD014249}" type="datetimeFigureOut">
               <a:rPr lang="en-US" smtClean="0"/>
-              <a:t>9/13/2025</a:t>
+              <a:t>14/09/2025</a:t>
             </a:fld>
             <a:endParaRPr lang="en-US"/>
           </a:p>
@@ -4488,33 +4490,9 @@
             <a:off x="1714500" y="1419251"/>
             <a:ext cx="5715000" cy="3629025"/>
           </a:xfrm>
-          <a:prstGeom prst="roundRect">
-            <a:avLst>
-              <a:gd name="adj" fmla="val 16667"/>
-            </a:avLst>
+          <a:prstGeom prst="rect">
+            <a:avLst/>
           </a:prstGeom>
-          <a:ln>
-            <a:noFill/>
-          </a:ln>
-          <a:effectLst>
-            <a:outerShdw blurRad="152400" dist="12000" dir="900000" sy="98000" kx="110000" ky="200000" algn="tl" rotWithShape="0">
-              <a:srgbClr val="000000">
-                <a:alpha val="30000"/>
-              </a:srgbClr>
-            </a:outerShdw>
-          </a:effectLst>
-          <a:scene3d>
-            <a:camera prst="perspectiveRelaxed">
-              <a:rot lat="19800000" lon="1200000" rev="20820000"/>
-            </a:camera>
-            <a:lightRig rig="threePt" dir="t"/>
-          </a:scene3d>
-          <a:sp3d contourW="6350" prstMaterial="matte">
-            <a:bevelT w="101600" h="101600"/>
-            <a:contourClr>
-              <a:srgbClr val="969696"/>
-            </a:contourClr>
-          </a:sp3d>
         </p:spPr>
       </p:pic>
       <p:sp>
@@ -9052,9 +9030,6 @@
         </p:spPr>
         <p:txBody>
           <a:bodyPr wrap="none" lIns="91440" tIns="45720" rIns="91440" bIns="45720" numCol="1">
-            <a:prstTxWarp prst="textWave2">
-              <a:avLst/>
-            </a:prstTxWarp>
             <a:spAutoFit/>
           </a:bodyPr>
           <a:lstStyle/>
@@ -9077,22 +9052,13 @@
               <a:defRPr/>
             </a:pPr>
             <a:r>
-              <a:rPr kumimoji="0" lang="en-US" sz="1600" b="1" i="0" u="none" strike="noStrike" kern="1200" cap="none" spc="0" normalizeH="0" baseline="0" noProof="0">
-                <a:ln w="9525">
-                  <a:solidFill>
-                    <a:prstClr val="white"/>
-                  </a:solidFill>
-                  <a:prstDash val="solid"/>
-                </a:ln>
-                <a:solidFill>
-                  <a:srgbClr val="5B9BD5"/>
-                </a:solidFill>
+              <a:rPr kumimoji="0" lang="en-US" sz="1600" i="0" u="none" strike="noStrike" kern="1200" normalizeH="0" baseline="0" noProof="0" dirty="0">
+                <a:ln w="0"/>
                 <a:effectLst>
-                  <a:outerShdw blurRad="12700" dist="38100" dir="2700000" algn="tl" rotWithShape="0">
-                    <a:srgbClr val="5B9BD5">
-                      <a:lumMod val="60000"/>
-                      <a:lumOff val="40000"/>
-                    </a:srgbClr>
+                  <a:outerShdw blurRad="38100" dist="19050" dir="2700000" algn="tl" rotWithShape="0">
+                    <a:schemeClr val="dk1">
+                      <a:alpha val="40000"/>
+                    </a:schemeClr>
                   </a:outerShdw>
                 </a:effectLst>
                 <a:uLnTx/>

--- a/dapan/cau 3.pptx
+++ b/dapan/cau 3.pptx
@@ -2,14 +2,15 @@
 <file path=ppt/presentation.xml><?xml version="1.0" encoding="utf-8"?>
 <p:presentation xmlns:a="http://schemas.openxmlformats.org/drawingml/2006/main" xmlns:r="http://schemas.openxmlformats.org/officeDocument/2006/relationships" xmlns:p="http://schemas.openxmlformats.org/presentationml/2006/main" saveSubsetFonts="1">
   <p:sldMasterIdLst>
-    <p:sldMasterId id="2147483708" r:id="rId1"/>
+    <p:sldMasterId id="2147483696" r:id="rId1"/>
+    <p:sldMasterId id="2147483732" r:id="rId2"/>
   </p:sldMasterIdLst>
   <p:sldIdLst>
-    <p:sldId id="256" r:id="rId2"/>
-    <p:sldId id="258" r:id="rId3"/>
-    <p:sldId id="259" r:id="rId4"/>
-    <p:sldId id="260" r:id="rId5"/>
-    <p:sldId id="261" r:id="rId6"/>
+    <p:sldId id="261" r:id="rId3"/>
+    <p:sldId id="262" r:id="rId4"/>
+    <p:sldId id="263" r:id="rId5"/>
+    <p:sldId id="264" r:id="rId6"/>
+    <p:sldId id="265" r:id="rId7"/>
   </p:sldIdLst>
   <p:sldSz cx="9144000" cy="6858000" type="screen4x3"/>
   <p:notesSz cx="6858000" cy="9144000"/>
@@ -147,17 +148,14 @@
               </a:defRPr>
             </a:pPr>
             <a:r>
-              <a:rPr lang="en-US" dirty="0"/>
-              <a:t>TIỀN NỘP </a:t>
-            </a:r>
-            <a:r>
               <a:rPr lang="en-US" dirty="0" smtClean="0"/>
-              <a:t>NGÂN </a:t>
-            </a:r>
-            <a:r>
-              <a:rPr lang="en-US" dirty="0"/>
-              <a:t>SÁCH CÁC NĂM (TỶ VNĐ)</a:t>
-            </a:r>
+              <a:t>ĐVT:</a:t>
+            </a:r>
+            <a:r>
+              <a:rPr lang="en-US" baseline="0" dirty="0" smtClean="0"/>
+              <a:t> USD</a:t>
+            </a:r>
+            <a:endParaRPr lang="en-US" dirty="0"/>
           </a:p>
         </c:rich>
       </c:tx>
@@ -165,8 +163,8 @@
         <c:manualLayout>
           <c:xMode val="edge"/>
           <c:yMode val="edge"/>
-          <c:x val="0.2929061679790026"/>
-          <c:y val="1.2500000000000001E-2"/>
+          <c:x val="0.4064019000544094"/>
+          <c:y val="1.250007040611373E-2"/>
         </c:manualLayout>
       </c:layout>
       <c:overlay val="0"/>
@@ -420,7 +418,6 @@
             <c:showLeaderLines val="0"/>
             <c:extLst>
               <c:ext xmlns:c15="http://schemas.microsoft.com/office/drawing/2012/chart" uri="{CE6537A1-D6FC-4f65-9D91-7224C49458BB}">
-                <c15:layout/>
                 <c15:showLeaderLines val="1"/>
                 <c15:leaderLines>
                   <c:spPr>
@@ -439,22 +436,24 @@
             </c:extLst>
           </c:dLbls>
           <c:cat>
-            <c:numRef>
+            <c:strRef>
               <c:f>Sheet1!$A$2:$A$5</c:f>
-              <c:numCache>
-                <c:formatCode>General</c:formatCode>
+              <c:strCache>
                 <c:ptCount val="4"/>
                 <c:pt idx="0">
-                  <c:v>2021</c:v>
+                  <c:v>Quý 1</c:v>
                 </c:pt>
                 <c:pt idx="1">
-                  <c:v>2022</c:v>
+                  <c:v>Quý 2</c:v>
                 </c:pt>
                 <c:pt idx="2">
-                  <c:v>2023</c:v>
+                  <c:v>Quý 3</c:v>
                 </c:pt>
-              </c:numCache>
-            </c:numRef>
+                <c:pt idx="3">
+                  <c:v>Quý 4</c:v>
+                </c:pt>
+              </c:strCache>
+            </c:strRef>
           </c:cat>
           <c:val>
             <c:numRef>
@@ -470,6 +469,9 @@
                 </c:pt>
                 <c:pt idx="2">
                   <c:v>571</c:v>
+                </c:pt>
+                <c:pt idx="3">
+                  <c:v>867</c:v>
                 </c:pt>
               </c:numCache>
             </c:numRef>
@@ -604,7 +606,6 @@
     </c:plotArea>
     <c:legend>
       <c:legendPos val="b"/>
-      <c:layout/>
       <c:overlay val="0"/>
       <c:spPr>
         <a:noFill/>
@@ -1190,13 +1191,7 @@
       </p:grpSpPr>
       <p:sp>
         <p:nvSpPr>
-          <p:cNvPr id="2" name="Title 1">
-            <a:extLst>
-              <a:ext uri="{FF2B5EF4-FFF2-40B4-BE49-F238E27FC236}">
-                <a16:creationId xmlns:a16="http://schemas.microsoft.com/office/drawing/2014/main" id="{F82C31F7-F938-4E9C-A096-F4279C482216}"/>
-              </a:ext>
-            </a:extLst>
-          </p:cNvPr>
+          <p:cNvPr id="2" name="Title 1"/>
           <p:cNvSpPr>
             <a:spLocks noGrp="1"/>
           </p:cNvSpPr>
@@ -1206,34 +1201,29 @@
         </p:nvSpPr>
         <p:spPr>
           <a:xfrm>
-            <a:off x="1143000" y="1122363"/>
-            <a:ext cx="6858000" cy="2387600"/>
+            <a:off x="685800" y="1122364"/>
+            <a:ext cx="7772400" cy="2387600"/>
           </a:xfrm>
         </p:spPr>
         <p:txBody>
           <a:bodyPr anchor="b"/>
           <a:lstStyle>
             <a:lvl1pPr algn="ctr">
-              <a:defRPr sz="4500"/>
+              <a:defRPr sz="3375"/>
             </a:lvl1pPr>
           </a:lstStyle>
           <a:p>
             <a:r>
-              <a:rPr lang="en-US"/>
+              <a:rPr lang="en-US" smtClean="0"/>
               <a:t>Click to edit Master title style</a:t>
             </a:r>
-          </a:p>
-        </p:txBody>
-      </p:sp>
-      <p:sp>
-        <p:nvSpPr>
-          <p:cNvPr id="3" name="Subtitle 2">
-            <a:extLst>
-              <a:ext uri="{FF2B5EF4-FFF2-40B4-BE49-F238E27FC236}">
-                <a16:creationId xmlns:a16="http://schemas.microsoft.com/office/drawing/2014/main" id="{DBD8100E-4847-4E14-AD63-8FC7DBAA50C7}"/>
-              </a:ext>
-            </a:extLst>
-          </p:cNvPr>
+            <a:endParaRPr lang="en-US" dirty="0"/>
+          </a:p>
+        </p:txBody>
+      </p:sp>
+      <p:sp>
+        <p:nvSpPr>
+          <p:cNvPr id="3" name="Subtitle 2"/>
           <p:cNvSpPr>
             <a:spLocks noGrp="1"/>
           </p:cNvSpPr>
@@ -1252,58 +1242,53 @@
           <a:lstStyle>
             <a:lvl1pPr marL="0" indent="0" algn="ctr">
               <a:buNone/>
-              <a:defRPr sz="1800"/>
+              <a:defRPr sz="1350"/>
             </a:lvl1pPr>
-            <a:lvl2pPr marL="342900" indent="0" algn="ctr">
-              <a:buNone/>
-              <a:defRPr sz="1500"/>
+            <a:lvl2pPr marL="257175" indent="0" algn="ctr">
+              <a:buNone/>
+              <a:defRPr sz="1125"/>
             </a:lvl2pPr>
-            <a:lvl3pPr marL="685800" indent="0" algn="ctr">
-              <a:buNone/>
-              <a:defRPr sz="1350"/>
+            <a:lvl3pPr marL="514350" indent="0" algn="ctr">
+              <a:buNone/>
+              <a:defRPr sz="1013"/>
             </a:lvl3pPr>
-            <a:lvl4pPr marL="1028700" indent="0" algn="ctr">
-              <a:buNone/>
-              <a:defRPr sz="1200"/>
+            <a:lvl4pPr marL="771525" indent="0" algn="ctr">
+              <a:buNone/>
+              <a:defRPr sz="900"/>
             </a:lvl4pPr>
-            <a:lvl5pPr marL="1371600" indent="0" algn="ctr">
-              <a:buNone/>
-              <a:defRPr sz="1200"/>
+            <a:lvl5pPr marL="1028700" indent="0" algn="ctr">
+              <a:buNone/>
+              <a:defRPr sz="900"/>
             </a:lvl5pPr>
-            <a:lvl6pPr marL="1714500" indent="0" algn="ctr">
-              <a:buNone/>
-              <a:defRPr sz="1200"/>
+            <a:lvl6pPr marL="1285875" indent="0" algn="ctr">
+              <a:buNone/>
+              <a:defRPr sz="900"/>
             </a:lvl6pPr>
-            <a:lvl7pPr marL="2057400" indent="0" algn="ctr">
-              <a:buNone/>
-              <a:defRPr sz="1200"/>
+            <a:lvl7pPr marL="1543050" indent="0" algn="ctr">
+              <a:buNone/>
+              <a:defRPr sz="900"/>
             </a:lvl7pPr>
-            <a:lvl8pPr marL="2400300" indent="0" algn="ctr">
-              <a:buNone/>
-              <a:defRPr sz="1200"/>
+            <a:lvl8pPr marL="1800225" indent="0" algn="ctr">
+              <a:buNone/>
+              <a:defRPr sz="900"/>
             </a:lvl8pPr>
-            <a:lvl9pPr marL="2743200" indent="0" algn="ctr">
-              <a:buNone/>
-              <a:defRPr sz="1200"/>
+            <a:lvl9pPr marL="2057400" indent="0" algn="ctr">
+              <a:buNone/>
+              <a:defRPr sz="900"/>
             </a:lvl9pPr>
           </a:lstStyle>
           <a:p>
             <a:r>
-              <a:rPr lang="en-US"/>
+              <a:rPr lang="en-US" smtClean="0"/>
               <a:t>Click to edit Master subtitle style</a:t>
             </a:r>
-          </a:p>
-        </p:txBody>
-      </p:sp>
-      <p:sp>
-        <p:nvSpPr>
-          <p:cNvPr id="4" name="Date Placeholder 3">
-            <a:extLst>
-              <a:ext uri="{FF2B5EF4-FFF2-40B4-BE49-F238E27FC236}">
-                <a16:creationId xmlns:a16="http://schemas.microsoft.com/office/drawing/2014/main" id="{135ABF85-FD9C-4996-AF82-7BC0438CADC2}"/>
-              </a:ext>
-            </a:extLst>
-          </p:cNvPr>
+            <a:endParaRPr lang="en-US" dirty="0"/>
+          </a:p>
+        </p:txBody>
+      </p:sp>
+      <p:sp>
+        <p:nvSpPr>
+          <p:cNvPr id="4" name="Date Placeholder 3"/>
           <p:cNvSpPr>
             <a:spLocks noGrp="1"/>
           </p:cNvSpPr>
@@ -1316,23 +1301,35 @@
           <a:bodyPr/>
           <a:lstStyle/>
           <a:p>
-            <a:fld id="{0499211D-10D7-4F49-ADEF-55BEAD014249}" type="datetimeFigureOut">
-              <a:rPr lang="en-US" smtClean="0"/>
-              <a:t>14/09/2025</a:t>
+            <a:pPr>
+              <a:defRPr/>
+            </a:pPr>
+            <a:fld id="{9285AD09-59D5-478E-BFB4-5748C04604E9}" type="datetimeFigureOut">
+              <a:rPr lang="en-US" smtClean="0">
+                <a:solidFill>
+                  <a:prstClr val="black">
+                    <a:tint val="75000"/>
+                  </a:prstClr>
+                </a:solidFill>
+              </a:rPr>
+              <a:pPr>
+                <a:defRPr/>
+              </a:pPr>
+              <a:t>05/10/2025</a:t>
             </a:fld>
-            <a:endParaRPr lang="en-US"/>
-          </a:p>
-        </p:txBody>
-      </p:sp>
-      <p:sp>
-        <p:nvSpPr>
-          <p:cNvPr id="5" name="Footer Placeholder 4">
-            <a:extLst>
-              <a:ext uri="{FF2B5EF4-FFF2-40B4-BE49-F238E27FC236}">
-                <a16:creationId xmlns:a16="http://schemas.microsoft.com/office/drawing/2014/main" id="{98829C89-07F4-4094-8039-68D138BA2195}"/>
-              </a:ext>
-            </a:extLst>
-          </p:cNvPr>
+            <a:endParaRPr lang="en-US">
+              <a:solidFill>
+                <a:prstClr val="black">
+                  <a:tint val="75000"/>
+                </a:prstClr>
+              </a:solidFill>
+            </a:endParaRPr>
+          </a:p>
+        </p:txBody>
+      </p:sp>
+      <p:sp>
+        <p:nvSpPr>
+          <p:cNvPr id="5" name="Footer Placeholder 4"/>
           <p:cNvSpPr>
             <a:spLocks noGrp="1"/>
           </p:cNvSpPr>
@@ -1345,19 +1342,22 @@
           <a:bodyPr/>
           <a:lstStyle/>
           <a:p>
-            <a:endParaRPr lang="en-US"/>
-          </a:p>
-        </p:txBody>
-      </p:sp>
-      <p:sp>
-        <p:nvSpPr>
-          <p:cNvPr id="6" name="Slide Number Placeholder 5">
-            <a:extLst>
-              <a:ext uri="{FF2B5EF4-FFF2-40B4-BE49-F238E27FC236}">
-                <a16:creationId xmlns:a16="http://schemas.microsoft.com/office/drawing/2014/main" id="{274002B5-FED8-447B-9A71-795416630DBB}"/>
-              </a:ext>
-            </a:extLst>
-          </p:cNvPr>
+            <a:pPr>
+              <a:defRPr/>
+            </a:pPr>
+            <a:endParaRPr lang="en-US">
+              <a:solidFill>
+                <a:prstClr val="black">
+                  <a:tint val="75000"/>
+                </a:prstClr>
+              </a:solidFill>
+            </a:endParaRPr>
+          </a:p>
+        </p:txBody>
+      </p:sp>
+      <p:sp>
+        <p:nvSpPr>
+          <p:cNvPr id="6" name="Slide Number Placeholder 5"/>
           <p:cNvSpPr>
             <a:spLocks noGrp="1"/>
           </p:cNvSpPr>
@@ -1370,18 +1370,36 @@
           <a:bodyPr/>
           <a:lstStyle/>
           <a:p>
-            <a:fld id="{0198E33A-3E23-44AC-B0F1-7EE9715F20F1}" type="slidenum">
-              <a:rPr lang="en-US" smtClean="0"/>
+            <a:pPr>
+              <a:defRPr/>
+            </a:pPr>
+            <a:fld id="{52669F0D-795E-449C-AD68-9797EE4A94EB}" type="slidenum">
+              <a:rPr lang="en-US" smtClean="0">
+                <a:solidFill>
+                  <a:prstClr val="black">
+                    <a:tint val="75000"/>
+                  </a:prstClr>
+                </a:solidFill>
+              </a:rPr>
+              <a:pPr>
+                <a:defRPr/>
+              </a:pPr>
               <a:t>‹#›</a:t>
             </a:fld>
-            <a:endParaRPr lang="en-US"/>
+            <a:endParaRPr lang="en-US">
+              <a:solidFill>
+                <a:prstClr val="black">
+                  <a:tint val="75000"/>
+                </a:prstClr>
+              </a:solidFill>
+            </a:endParaRPr>
           </a:p>
         </p:txBody>
       </p:sp>
     </p:spTree>
     <p:extLst>
       <p:ext uri="{BB962C8B-B14F-4D97-AF65-F5344CB8AC3E}">
-        <p14:creationId xmlns:p14="http://schemas.microsoft.com/office/powerpoint/2010/main" val="654288598"/>
+        <p14:creationId xmlns:p14="http://schemas.microsoft.com/office/powerpoint/2010/main" val="2425783070"/>
       </p:ext>
     </p:extLst>
   </p:cSld>
@@ -1410,13 +1428,7 @@
       </p:grpSpPr>
       <p:sp>
         <p:nvSpPr>
-          <p:cNvPr id="2" name="Title 1">
-            <a:extLst>
-              <a:ext uri="{FF2B5EF4-FFF2-40B4-BE49-F238E27FC236}">
-                <a16:creationId xmlns:a16="http://schemas.microsoft.com/office/drawing/2014/main" id="{E4A4CBD1-317B-4184-8540-DC2AF8E42EBA}"/>
-              </a:ext>
-            </a:extLst>
-          </p:cNvPr>
+          <p:cNvPr id="2" name="Title 1"/>
           <p:cNvSpPr>
             <a:spLocks noGrp="1"/>
           </p:cNvSpPr>
@@ -1430,21 +1442,16 @@
           <a:lstStyle/>
           <a:p>
             <a:r>
-              <a:rPr lang="en-US"/>
+              <a:rPr lang="en-US" smtClean="0"/>
               <a:t>Click to edit Master title style</a:t>
             </a:r>
-          </a:p>
-        </p:txBody>
-      </p:sp>
-      <p:sp>
-        <p:nvSpPr>
-          <p:cNvPr id="3" name="Vertical Text Placeholder 2">
-            <a:extLst>
-              <a:ext uri="{FF2B5EF4-FFF2-40B4-BE49-F238E27FC236}">
-                <a16:creationId xmlns:a16="http://schemas.microsoft.com/office/drawing/2014/main" id="{94B6263B-425C-4936-BC3E-83D2D3A8626F}"/>
-              </a:ext>
-            </a:extLst>
-          </p:cNvPr>
+            <a:endParaRPr lang="en-US" dirty="0"/>
+          </a:p>
+        </p:txBody>
+      </p:sp>
+      <p:sp>
+        <p:nvSpPr>
+          <p:cNvPr id="3" name="Vertical Text Placeholder 2"/>
           <p:cNvSpPr>
             <a:spLocks noGrp="1"/>
           </p:cNvSpPr>
@@ -1459,49 +1466,44 @@
           <a:p>
             <a:pPr lvl="0"/>
             <a:r>
-              <a:rPr lang="en-US"/>
+              <a:rPr lang="en-US" smtClean="0"/>
               <a:t>Edit Master text styles</a:t>
             </a:r>
           </a:p>
           <a:p>
             <a:pPr lvl="1"/>
             <a:r>
-              <a:rPr lang="en-US"/>
+              <a:rPr lang="en-US" smtClean="0"/>
               <a:t>Second level</a:t>
             </a:r>
           </a:p>
           <a:p>
             <a:pPr lvl="2"/>
             <a:r>
-              <a:rPr lang="en-US"/>
+              <a:rPr lang="en-US" smtClean="0"/>
               <a:t>Third level</a:t>
             </a:r>
           </a:p>
           <a:p>
             <a:pPr lvl="3"/>
             <a:r>
-              <a:rPr lang="en-US"/>
+              <a:rPr lang="en-US" smtClean="0"/>
               <a:t>Fourth level</a:t>
             </a:r>
           </a:p>
           <a:p>
             <a:pPr lvl="4"/>
             <a:r>
-              <a:rPr lang="en-US"/>
+              <a:rPr lang="en-US" smtClean="0"/>
               <a:t>Fifth level</a:t>
             </a:r>
-          </a:p>
-        </p:txBody>
-      </p:sp>
-      <p:sp>
-        <p:nvSpPr>
-          <p:cNvPr id="4" name="Date Placeholder 3">
-            <a:extLst>
-              <a:ext uri="{FF2B5EF4-FFF2-40B4-BE49-F238E27FC236}">
-                <a16:creationId xmlns:a16="http://schemas.microsoft.com/office/drawing/2014/main" id="{B8EA9AAF-8452-4300-9ED2-F2D7B2FFD92C}"/>
-              </a:ext>
-            </a:extLst>
-          </p:cNvPr>
+            <a:endParaRPr lang="en-US" dirty="0"/>
+          </a:p>
+        </p:txBody>
+      </p:sp>
+      <p:sp>
+        <p:nvSpPr>
+          <p:cNvPr id="4" name="Date Placeholder 3"/>
           <p:cNvSpPr>
             <a:spLocks noGrp="1"/>
           </p:cNvSpPr>
@@ -1514,23 +1516,35 @@
           <a:bodyPr/>
           <a:lstStyle/>
           <a:p>
-            <a:fld id="{0499211D-10D7-4F49-ADEF-55BEAD014249}" type="datetimeFigureOut">
-              <a:rPr lang="en-US" smtClean="0"/>
-              <a:t>14/09/2025</a:t>
+            <a:pPr>
+              <a:defRPr/>
+            </a:pPr>
+            <a:fld id="{9285AD09-59D5-478E-BFB4-5748C04604E9}" type="datetimeFigureOut">
+              <a:rPr lang="en-US" smtClean="0">
+                <a:solidFill>
+                  <a:prstClr val="black">
+                    <a:tint val="75000"/>
+                  </a:prstClr>
+                </a:solidFill>
+              </a:rPr>
+              <a:pPr>
+                <a:defRPr/>
+              </a:pPr>
+              <a:t>05/10/2025</a:t>
             </a:fld>
-            <a:endParaRPr lang="en-US"/>
-          </a:p>
-        </p:txBody>
-      </p:sp>
-      <p:sp>
-        <p:nvSpPr>
-          <p:cNvPr id="5" name="Footer Placeholder 4">
-            <a:extLst>
-              <a:ext uri="{FF2B5EF4-FFF2-40B4-BE49-F238E27FC236}">
-                <a16:creationId xmlns:a16="http://schemas.microsoft.com/office/drawing/2014/main" id="{5D941FC1-FF81-419C-8CF3-A3F0967EDDE3}"/>
-              </a:ext>
-            </a:extLst>
-          </p:cNvPr>
+            <a:endParaRPr lang="en-US">
+              <a:solidFill>
+                <a:prstClr val="black">
+                  <a:tint val="75000"/>
+                </a:prstClr>
+              </a:solidFill>
+            </a:endParaRPr>
+          </a:p>
+        </p:txBody>
+      </p:sp>
+      <p:sp>
+        <p:nvSpPr>
+          <p:cNvPr id="5" name="Footer Placeholder 4"/>
           <p:cNvSpPr>
             <a:spLocks noGrp="1"/>
           </p:cNvSpPr>
@@ -1543,19 +1557,22 @@
           <a:bodyPr/>
           <a:lstStyle/>
           <a:p>
-            <a:endParaRPr lang="en-US"/>
-          </a:p>
-        </p:txBody>
-      </p:sp>
-      <p:sp>
-        <p:nvSpPr>
-          <p:cNvPr id="6" name="Slide Number Placeholder 5">
-            <a:extLst>
-              <a:ext uri="{FF2B5EF4-FFF2-40B4-BE49-F238E27FC236}">
-                <a16:creationId xmlns:a16="http://schemas.microsoft.com/office/drawing/2014/main" id="{7780F23B-0785-461F-9E9E-78F8ED3E6AD3}"/>
-              </a:ext>
-            </a:extLst>
-          </p:cNvPr>
+            <a:pPr>
+              <a:defRPr/>
+            </a:pPr>
+            <a:endParaRPr lang="en-US">
+              <a:solidFill>
+                <a:prstClr val="black">
+                  <a:tint val="75000"/>
+                </a:prstClr>
+              </a:solidFill>
+            </a:endParaRPr>
+          </a:p>
+        </p:txBody>
+      </p:sp>
+      <p:sp>
+        <p:nvSpPr>
+          <p:cNvPr id="6" name="Slide Number Placeholder 5"/>
           <p:cNvSpPr>
             <a:spLocks noGrp="1"/>
           </p:cNvSpPr>
@@ -1568,18 +1585,36 @@
           <a:bodyPr/>
           <a:lstStyle/>
           <a:p>
-            <a:fld id="{0198E33A-3E23-44AC-B0F1-7EE9715F20F1}" type="slidenum">
-              <a:rPr lang="en-US" smtClean="0"/>
+            <a:pPr>
+              <a:defRPr/>
+            </a:pPr>
+            <a:fld id="{52669F0D-795E-449C-AD68-9797EE4A94EB}" type="slidenum">
+              <a:rPr lang="en-US" smtClean="0">
+                <a:solidFill>
+                  <a:prstClr val="black">
+                    <a:tint val="75000"/>
+                  </a:prstClr>
+                </a:solidFill>
+              </a:rPr>
+              <a:pPr>
+                <a:defRPr/>
+              </a:pPr>
               <a:t>‹#›</a:t>
             </a:fld>
-            <a:endParaRPr lang="en-US"/>
+            <a:endParaRPr lang="en-US">
+              <a:solidFill>
+                <a:prstClr val="black">
+                  <a:tint val="75000"/>
+                </a:prstClr>
+              </a:solidFill>
+            </a:endParaRPr>
           </a:p>
         </p:txBody>
       </p:sp>
     </p:spTree>
     <p:extLst>
       <p:ext uri="{BB962C8B-B14F-4D97-AF65-F5344CB8AC3E}">
-        <p14:creationId xmlns:p14="http://schemas.microsoft.com/office/powerpoint/2010/main" val="3972581544"/>
+        <p14:creationId xmlns:p14="http://schemas.microsoft.com/office/powerpoint/2010/main" val="2637590326"/>
       </p:ext>
     </p:extLst>
   </p:cSld>
@@ -1608,10 +1643,235 @@
       </p:grpSpPr>
       <p:sp>
         <p:nvSpPr>
-          <p:cNvPr id="2" name="Vertical Title 1">
+          <p:cNvPr id="2" name="Vertical Title 1"/>
+          <p:cNvSpPr>
+            <a:spLocks noGrp="1"/>
+          </p:cNvSpPr>
+          <p:nvPr>
+            <p:ph type="title" orient="vert"/>
+          </p:nvPr>
+        </p:nvSpPr>
+        <p:spPr>
+          <a:xfrm>
+            <a:off x="6543676" y="365126"/>
+            <a:ext cx="1971675" cy="5811838"/>
+          </a:xfrm>
+        </p:spPr>
+        <p:txBody>
+          <a:bodyPr vert="eaVert"/>
+          <a:lstStyle/>
+          <a:p>
+            <a:r>
+              <a:rPr lang="en-US" smtClean="0"/>
+              <a:t>Click to edit Master title style</a:t>
+            </a:r>
+            <a:endParaRPr lang="en-US" dirty="0"/>
+          </a:p>
+        </p:txBody>
+      </p:sp>
+      <p:sp>
+        <p:nvSpPr>
+          <p:cNvPr id="3" name="Vertical Text Placeholder 2"/>
+          <p:cNvSpPr>
+            <a:spLocks noGrp="1"/>
+          </p:cNvSpPr>
+          <p:nvPr>
+            <p:ph type="body" orient="vert" idx="1"/>
+          </p:nvPr>
+        </p:nvSpPr>
+        <p:spPr>
+          <a:xfrm>
+            <a:off x="628652" y="365126"/>
+            <a:ext cx="5800725" cy="5811838"/>
+          </a:xfrm>
+        </p:spPr>
+        <p:txBody>
+          <a:bodyPr vert="eaVert"/>
+          <a:lstStyle/>
+          <a:p>
+            <a:pPr lvl="0"/>
+            <a:r>
+              <a:rPr lang="en-US" smtClean="0"/>
+              <a:t>Edit Master text styles</a:t>
+            </a:r>
+          </a:p>
+          <a:p>
+            <a:pPr lvl="1"/>
+            <a:r>
+              <a:rPr lang="en-US" smtClean="0"/>
+              <a:t>Second level</a:t>
+            </a:r>
+          </a:p>
+          <a:p>
+            <a:pPr lvl="2"/>
+            <a:r>
+              <a:rPr lang="en-US" smtClean="0"/>
+              <a:t>Third level</a:t>
+            </a:r>
+          </a:p>
+          <a:p>
+            <a:pPr lvl="3"/>
+            <a:r>
+              <a:rPr lang="en-US" smtClean="0"/>
+              <a:t>Fourth level</a:t>
+            </a:r>
+          </a:p>
+          <a:p>
+            <a:pPr lvl="4"/>
+            <a:r>
+              <a:rPr lang="en-US" smtClean="0"/>
+              <a:t>Fifth level</a:t>
+            </a:r>
+            <a:endParaRPr lang="en-US" dirty="0"/>
+          </a:p>
+        </p:txBody>
+      </p:sp>
+      <p:sp>
+        <p:nvSpPr>
+          <p:cNvPr id="4" name="Date Placeholder 3"/>
+          <p:cNvSpPr>
+            <a:spLocks noGrp="1"/>
+          </p:cNvSpPr>
+          <p:nvPr>
+            <p:ph type="dt" sz="half" idx="10"/>
+          </p:nvPr>
+        </p:nvSpPr>
+        <p:spPr/>
+        <p:txBody>
+          <a:bodyPr/>
+          <a:lstStyle/>
+          <a:p>
+            <a:pPr>
+              <a:defRPr/>
+            </a:pPr>
+            <a:fld id="{9285AD09-59D5-478E-BFB4-5748C04604E9}" type="datetimeFigureOut">
+              <a:rPr lang="en-US" smtClean="0">
+                <a:solidFill>
+                  <a:prstClr val="black">
+                    <a:tint val="75000"/>
+                  </a:prstClr>
+                </a:solidFill>
+              </a:rPr>
+              <a:pPr>
+                <a:defRPr/>
+              </a:pPr>
+              <a:t>05/10/2025</a:t>
+            </a:fld>
+            <a:endParaRPr lang="en-US">
+              <a:solidFill>
+                <a:prstClr val="black">
+                  <a:tint val="75000"/>
+                </a:prstClr>
+              </a:solidFill>
+            </a:endParaRPr>
+          </a:p>
+        </p:txBody>
+      </p:sp>
+      <p:sp>
+        <p:nvSpPr>
+          <p:cNvPr id="5" name="Footer Placeholder 4"/>
+          <p:cNvSpPr>
+            <a:spLocks noGrp="1"/>
+          </p:cNvSpPr>
+          <p:nvPr>
+            <p:ph type="ftr" sz="quarter" idx="11"/>
+          </p:nvPr>
+        </p:nvSpPr>
+        <p:spPr/>
+        <p:txBody>
+          <a:bodyPr/>
+          <a:lstStyle/>
+          <a:p>
+            <a:pPr>
+              <a:defRPr/>
+            </a:pPr>
+            <a:endParaRPr lang="en-US">
+              <a:solidFill>
+                <a:prstClr val="black">
+                  <a:tint val="75000"/>
+                </a:prstClr>
+              </a:solidFill>
+            </a:endParaRPr>
+          </a:p>
+        </p:txBody>
+      </p:sp>
+      <p:sp>
+        <p:nvSpPr>
+          <p:cNvPr id="6" name="Slide Number Placeholder 5"/>
+          <p:cNvSpPr>
+            <a:spLocks noGrp="1"/>
+          </p:cNvSpPr>
+          <p:nvPr>
+            <p:ph type="sldNum" sz="quarter" idx="12"/>
+          </p:nvPr>
+        </p:nvSpPr>
+        <p:spPr/>
+        <p:txBody>
+          <a:bodyPr/>
+          <a:lstStyle/>
+          <a:p>
+            <a:pPr>
+              <a:defRPr/>
+            </a:pPr>
+            <a:fld id="{52669F0D-795E-449C-AD68-9797EE4A94EB}" type="slidenum">
+              <a:rPr lang="en-US" smtClean="0">
+                <a:solidFill>
+                  <a:prstClr val="black">
+                    <a:tint val="75000"/>
+                  </a:prstClr>
+                </a:solidFill>
+              </a:rPr>
+              <a:pPr>
+                <a:defRPr/>
+              </a:pPr>
+              <a:t>‹#›</a:t>
+            </a:fld>
+            <a:endParaRPr lang="en-US">
+              <a:solidFill>
+                <a:prstClr val="black">
+                  <a:tint val="75000"/>
+                </a:prstClr>
+              </a:solidFill>
+            </a:endParaRPr>
+          </a:p>
+        </p:txBody>
+      </p:sp>
+    </p:spTree>
+    <p:extLst>
+      <p:ext uri="{BB962C8B-B14F-4D97-AF65-F5344CB8AC3E}">
+        <p14:creationId xmlns:p14="http://schemas.microsoft.com/office/powerpoint/2010/main" val="3312801479"/>
+      </p:ext>
+    </p:extLst>
+  </p:cSld>
+  <p:clrMapOvr>
+    <a:masterClrMapping/>
+  </p:clrMapOvr>
+</p:sldLayout>
+</file>
+
+<file path=ppt/slideLayouts/slideLayout12.xml><?xml version="1.0" encoding="utf-8"?>
+<p:sldLayout xmlns:a="http://schemas.openxmlformats.org/drawingml/2006/main" xmlns:r="http://schemas.openxmlformats.org/officeDocument/2006/relationships" xmlns:p="http://schemas.openxmlformats.org/presentationml/2006/main" type="title" preserve="1">
+  <p:cSld name="Title Slide">
+    <p:spTree>
+      <p:nvGrpSpPr>
+        <p:cNvPr id="1" name=""/>
+        <p:cNvGrpSpPr/>
+        <p:nvPr/>
+      </p:nvGrpSpPr>
+      <p:grpSpPr>
+        <a:xfrm>
+          <a:off x="0" y="0"/>
+          <a:ext cx="0" cy="0"/>
+          <a:chOff x="0" y="0"/>
+          <a:chExt cx="0" cy="0"/>
+        </a:xfrm>
+      </p:grpSpPr>
+      <p:sp>
+        <p:nvSpPr>
+          <p:cNvPr id="2" name="Title 1">
             <a:extLst>
               <a:ext uri="{FF2B5EF4-FFF2-40B4-BE49-F238E27FC236}">
-                <a16:creationId xmlns:a16="http://schemas.microsoft.com/office/drawing/2014/main" id="{BF56845E-8B49-4EB5-8EE2-8F055F654AA4}"/>
+                <a16:creationId xmlns:a16="http://schemas.microsoft.com/office/drawing/2014/main" id="{F82C31F7-F938-4E9C-A096-F4279C482216}"/>
               </a:ext>
             </a:extLst>
           </p:cNvPr>
@@ -1619,18 +1879,22 @@
             <a:spLocks noGrp="1"/>
           </p:cNvSpPr>
           <p:nvPr>
-            <p:ph type="title" orient="vert"/>
+            <p:ph type="ctrTitle"/>
           </p:nvPr>
         </p:nvSpPr>
         <p:spPr>
           <a:xfrm>
-            <a:off x="6543676" y="365125"/>
-            <a:ext cx="1971675" cy="5811838"/>
+            <a:off x="1143000" y="1122363"/>
+            <a:ext cx="6858000" cy="2387600"/>
           </a:xfrm>
         </p:spPr>
         <p:txBody>
-          <a:bodyPr vert="eaVert"/>
-          <a:lstStyle/>
+          <a:bodyPr anchor="b"/>
+          <a:lstStyle>
+            <a:lvl1pPr algn="ctr">
+              <a:defRPr sz="4500"/>
+            </a:lvl1pPr>
+          </a:lstStyle>
           <a:p>
             <a:r>
               <a:rPr lang="en-US"/>
@@ -1641,10 +1905,10 @@
       </p:sp>
       <p:sp>
         <p:nvSpPr>
-          <p:cNvPr id="3" name="Vertical Text Placeholder 2">
+          <p:cNvPr id="3" name="Subtitle 2">
             <a:extLst>
               <a:ext uri="{FF2B5EF4-FFF2-40B4-BE49-F238E27FC236}">
-                <a16:creationId xmlns:a16="http://schemas.microsoft.com/office/drawing/2014/main" id="{FE95B40B-11E0-4C32-8229-2B72E009CCA2}"/>
+                <a16:creationId xmlns:a16="http://schemas.microsoft.com/office/drawing/2014/main" id="{DBD8100E-4847-4E14-AD63-8FC7DBAA50C7}"/>
               </a:ext>
             </a:extLst>
           </p:cNvPr>
@@ -1652,51 +1916,59 @@
             <a:spLocks noGrp="1"/>
           </p:cNvSpPr>
           <p:nvPr>
-            <p:ph type="body" orient="vert" idx="1"/>
+            <p:ph type="subTitle" idx="1"/>
           </p:nvPr>
         </p:nvSpPr>
         <p:spPr>
           <a:xfrm>
-            <a:off x="628651" y="365125"/>
-            <a:ext cx="5800725" cy="5811838"/>
+            <a:off x="1143000" y="3602038"/>
+            <a:ext cx="6858000" cy="1655762"/>
           </a:xfrm>
         </p:spPr>
         <p:txBody>
-          <a:bodyPr vert="eaVert"/>
-          <a:lstStyle/>
-          <a:p>
-            <a:pPr lvl="0"/>
+          <a:bodyPr/>
+          <a:lstStyle>
+            <a:lvl1pPr marL="0" indent="0" algn="ctr">
+              <a:buNone/>
+              <a:defRPr sz="1800"/>
+            </a:lvl1pPr>
+            <a:lvl2pPr marL="342900" indent="0" algn="ctr">
+              <a:buNone/>
+              <a:defRPr sz="1500"/>
+            </a:lvl2pPr>
+            <a:lvl3pPr marL="685800" indent="0" algn="ctr">
+              <a:buNone/>
+              <a:defRPr sz="1350"/>
+            </a:lvl3pPr>
+            <a:lvl4pPr marL="1028700" indent="0" algn="ctr">
+              <a:buNone/>
+              <a:defRPr sz="1200"/>
+            </a:lvl4pPr>
+            <a:lvl5pPr marL="1371600" indent="0" algn="ctr">
+              <a:buNone/>
+              <a:defRPr sz="1200"/>
+            </a:lvl5pPr>
+            <a:lvl6pPr marL="1714500" indent="0" algn="ctr">
+              <a:buNone/>
+              <a:defRPr sz="1200"/>
+            </a:lvl6pPr>
+            <a:lvl7pPr marL="2057400" indent="0" algn="ctr">
+              <a:buNone/>
+              <a:defRPr sz="1200"/>
+            </a:lvl7pPr>
+            <a:lvl8pPr marL="2400300" indent="0" algn="ctr">
+              <a:buNone/>
+              <a:defRPr sz="1200"/>
+            </a:lvl8pPr>
+            <a:lvl9pPr marL="2743200" indent="0" algn="ctr">
+              <a:buNone/>
+              <a:defRPr sz="1200"/>
+            </a:lvl9pPr>
+          </a:lstStyle>
+          <a:p>
             <a:r>
               <a:rPr lang="en-US"/>
-              <a:t>Edit Master text styles</a:t>
-            </a:r>
-          </a:p>
-          <a:p>
-            <a:pPr lvl="1"/>
-            <a:r>
-              <a:rPr lang="en-US"/>
-              <a:t>Second level</a:t>
-            </a:r>
-          </a:p>
-          <a:p>
-            <a:pPr lvl="2"/>
-            <a:r>
-              <a:rPr lang="en-US"/>
-              <a:t>Third level</a:t>
-            </a:r>
-          </a:p>
-          <a:p>
-            <a:pPr lvl="3"/>
-            <a:r>
-              <a:rPr lang="en-US"/>
-              <a:t>Fourth level</a:t>
-            </a:r>
-          </a:p>
-          <a:p>
-            <a:pPr lvl="4"/>
-            <a:r>
-              <a:rPr lang="en-US"/>
-              <a:t>Fifth level</a:t>
+              <a:t>Click to edit Master subtitle style</a:t>
             </a:r>
           </a:p>
         </p:txBody>
@@ -1706,7 +1978,7 @@
           <p:cNvPr id="4" name="Date Placeholder 3">
             <a:extLst>
               <a:ext uri="{FF2B5EF4-FFF2-40B4-BE49-F238E27FC236}">
-                <a16:creationId xmlns:a16="http://schemas.microsoft.com/office/drawing/2014/main" id="{06684D00-C866-4EDC-B7BE-5643529C4051}"/>
+                <a16:creationId xmlns:a16="http://schemas.microsoft.com/office/drawing/2014/main" id="{135ABF85-FD9C-4996-AF82-7BC0438CADC2}"/>
               </a:ext>
             </a:extLst>
           </p:cNvPr>
@@ -1722,11 +1994,75 @@
           <a:bodyPr/>
           <a:lstStyle/>
           <a:p>
-            <a:fld id="{0499211D-10D7-4F49-ADEF-55BEAD014249}" type="datetimeFigureOut">
-              <a:rPr lang="en-US" smtClean="0"/>
-              <a:t>14/09/2025</a:t>
+            <a:pPr marL="0" marR="0" lvl="0" indent="0" algn="l" defTabSz="914400" rtl="0" eaLnBrk="1" fontAlgn="auto" latinLnBrk="0" hangingPunct="1">
+              <a:lnSpc>
+                <a:spcPct val="100000"/>
+              </a:lnSpc>
+              <a:spcBef>
+                <a:spcPts val="0"/>
+              </a:spcBef>
+              <a:spcAft>
+                <a:spcPts val="0"/>
+              </a:spcAft>
+              <a:buClrTx/>
+              <a:buSzTx/>
+              <a:buFontTx/>
+              <a:buNone/>
+              <a:tabLst/>
+              <a:defRPr/>
+            </a:pPr>
+            <a:fld id="{9285AD09-59D5-478E-BFB4-5748C04604E9}" type="datetimeFigureOut">
+              <a:rPr kumimoji="0" lang="en-US" sz="900" b="0" i="0" u="none" strike="noStrike" kern="1200" cap="none" spc="0" normalizeH="0" baseline="0" noProof="0" smtClean="0">
+                <a:ln>
+                  <a:noFill/>
+                </a:ln>
+                <a:solidFill>
+                  <a:prstClr val="black">
+                    <a:tint val="75000"/>
+                  </a:prstClr>
+                </a:solidFill>
+                <a:effectLst/>
+                <a:uLnTx/>
+                <a:uFillTx/>
+                <a:latin typeface="Calibri" panose="020F0502020204030204"/>
+                <a:ea typeface="+mn-ea"/>
+                <a:cs typeface="+mn-cs"/>
+              </a:rPr>
+              <a:pPr marL="0" marR="0" lvl="0" indent="0" algn="l" defTabSz="914400" rtl="0" eaLnBrk="1" fontAlgn="auto" latinLnBrk="0" hangingPunct="1">
+                <a:lnSpc>
+                  <a:spcPct val="100000"/>
+                </a:lnSpc>
+                <a:spcBef>
+                  <a:spcPts val="0"/>
+                </a:spcBef>
+                <a:spcAft>
+                  <a:spcPts val="0"/>
+                </a:spcAft>
+                <a:buClrTx/>
+                <a:buSzTx/>
+                <a:buFontTx/>
+                <a:buNone/>
+                <a:tabLst/>
+                <a:defRPr/>
+              </a:pPr>
+              <a:t>05/10/2025</a:t>
             </a:fld>
-            <a:endParaRPr lang="en-US"/>
+            <a:endParaRPr kumimoji="0" lang="en-US" sz="900" b="0" i="0" u="none" strike="noStrike" kern="1200" cap="none" spc="0" normalizeH="0" baseline="0" noProof="0">
+              <a:ln>
+                <a:noFill/>
+              </a:ln>
+              <a:solidFill>
+                <a:prstClr val="black">
+                  <a:tint val="75000"/>
+                </a:prstClr>
+              </a:solidFill>
+              <a:effectLst/>
+              <a:uLnTx/>
+              <a:uFillTx/>
+              <a:latin typeface="Calibri" panose="020F0502020204030204"/>
+              <a:ea typeface="+mn-ea"/>
+              <a:cs typeface="+mn-cs"/>
+            </a:endParaRPr>
           </a:p>
         </p:txBody>
       </p:sp>
@@ -1735,7 +2071,7 @@
           <p:cNvPr id="5" name="Footer Placeholder 4">
             <a:extLst>
               <a:ext uri="{FF2B5EF4-FFF2-40B4-BE49-F238E27FC236}">
-                <a16:creationId xmlns:a16="http://schemas.microsoft.com/office/drawing/2014/main" id="{8834941C-FAF5-461D-B473-4CCC57830983}"/>
+                <a16:creationId xmlns:a16="http://schemas.microsoft.com/office/drawing/2014/main" id="{98829C89-07F4-4094-8039-68D138BA2195}"/>
               </a:ext>
             </a:extLst>
           </p:cNvPr>
@@ -1751,7 +2087,39 @@
           <a:bodyPr/>
           <a:lstStyle/>
           <a:p>
-            <a:endParaRPr lang="en-US"/>
+            <a:pPr marL="0" marR="0" lvl="0" indent="0" algn="ctr" defTabSz="914400" rtl="0" eaLnBrk="1" fontAlgn="auto" latinLnBrk="0" hangingPunct="1">
+              <a:lnSpc>
+                <a:spcPct val="100000"/>
+              </a:lnSpc>
+              <a:spcBef>
+                <a:spcPts val="0"/>
+              </a:spcBef>
+              <a:spcAft>
+                <a:spcPts val="0"/>
+              </a:spcAft>
+              <a:buClrTx/>
+              <a:buSzTx/>
+              <a:buFontTx/>
+              <a:buNone/>
+              <a:tabLst/>
+              <a:defRPr/>
+            </a:pPr>
+            <a:endParaRPr kumimoji="0" lang="en-US" sz="900" b="0" i="0" u="none" strike="noStrike" kern="1200" cap="none" spc="0" normalizeH="0" baseline="0" noProof="0">
+              <a:ln>
+                <a:noFill/>
+              </a:ln>
+              <a:solidFill>
+                <a:prstClr val="black">
+                  <a:tint val="75000"/>
+                </a:prstClr>
+              </a:solidFill>
+              <a:effectLst/>
+              <a:uLnTx/>
+              <a:uFillTx/>
+              <a:latin typeface="Calibri" panose="020F0502020204030204"/>
+              <a:ea typeface="+mn-ea"/>
+              <a:cs typeface="+mn-cs"/>
+            </a:endParaRPr>
           </a:p>
         </p:txBody>
       </p:sp>
@@ -1760,7 +2128,7 @@
           <p:cNvPr id="6" name="Slide Number Placeholder 5">
             <a:extLst>
               <a:ext uri="{FF2B5EF4-FFF2-40B4-BE49-F238E27FC236}">
-                <a16:creationId xmlns:a16="http://schemas.microsoft.com/office/drawing/2014/main" id="{6DA8363D-8592-44AE-9FF3-DBB24DF8640F}"/>
+                <a16:creationId xmlns:a16="http://schemas.microsoft.com/office/drawing/2014/main" id="{274002B5-FED8-447B-9A71-795416630DBB}"/>
               </a:ext>
             </a:extLst>
           </p:cNvPr>
@@ -1776,18 +2144,82 @@
           <a:bodyPr/>
           <a:lstStyle/>
           <a:p>
-            <a:fld id="{0198E33A-3E23-44AC-B0F1-7EE9715F20F1}" type="slidenum">
-              <a:rPr lang="en-US" smtClean="0"/>
+            <a:pPr marL="0" marR="0" lvl="0" indent="0" algn="r" defTabSz="914400" rtl="0" eaLnBrk="1" fontAlgn="auto" latinLnBrk="0" hangingPunct="1">
+              <a:lnSpc>
+                <a:spcPct val="100000"/>
+              </a:lnSpc>
+              <a:spcBef>
+                <a:spcPts val="0"/>
+              </a:spcBef>
+              <a:spcAft>
+                <a:spcPts val="0"/>
+              </a:spcAft>
+              <a:buClrTx/>
+              <a:buSzTx/>
+              <a:buFontTx/>
+              <a:buNone/>
+              <a:tabLst/>
+              <a:defRPr/>
+            </a:pPr>
+            <a:fld id="{52669F0D-795E-449C-AD68-9797EE4A94EB}" type="slidenum">
+              <a:rPr kumimoji="0" lang="en-US" sz="900" b="0" i="0" u="none" strike="noStrike" kern="1200" cap="none" spc="0" normalizeH="0" baseline="0" noProof="0" smtClean="0">
+                <a:ln>
+                  <a:noFill/>
+                </a:ln>
+                <a:solidFill>
+                  <a:prstClr val="black">
+                    <a:tint val="75000"/>
+                  </a:prstClr>
+                </a:solidFill>
+                <a:effectLst/>
+                <a:uLnTx/>
+                <a:uFillTx/>
+                <a:latin typeface="Calibri" panose="020F0502020204030204"/>
+                <a:ea typeface="+mn-ea"/>
+                <a:cs typeface="+mn-cs"/>
+              </a:rPr>
+              <a:pPr marL="0" marR="0" lvl="0" indent="0" algn="r" defTabSz="914400" rtl="0" eaLnBrk="1" fontAlgn="auto" latinLnBrk="0" hangingPunct="1">
+                <a:lnSpc>
+                  <a:spcPct val="100000"/>
+                </a:lnSpc>
+                <a:spcBef>
+                  <a:spcPts val="0"/>
+                </a:spcBef>
+                <a:spcAft>
+                  <a:spcPts val="0"/>
+                </a:spcAft>
+                <a:buClrTx/>
+                <a:buSzTx/>
+                <a:buFontTx/>
+                <a:buNone/>
+                <a:tabLst/>
+                <a:defRPr/>
+              </a:pPr>
               <a:t>‹#›</a:t>
             </a:fld>
-            <a:endParaRPr lang="en-US"/>
+            <a:endParaRPr kumimoji="0" lang="en-US" sz="900" b="0" i="0" u="none" strike="noStrike" kern="1200" cap="none" spc="0" normalizeH="0" baseline="0" noProof="0">
+              <a:ln>
+                <a:noFill/>
+              </a:ln>
+              <a:solidFill>
+                <a:prstClr val="black">
+                  <a:tint val="75000"/>
+                </a:prstClr>
+              </a:solidFill>
+              <a:effectLst/>
+              <a:uLnTx/>
+              <a:uFillTx/>
+              <a:latin typeface="Calibri" panose="020F0502020204030204"/>
+              <a:ea typeface="+mn-ea"/>
+              <a:cs typeface="+mn-cs"/>
+            </a:endParaRPr>
           </a:p>
         </p:txBody>
       </p:sp>
     </p:spTree>
     <p:extLst>
       <p:ext uri="{BB962C8B-B14F-4D97-AF65-F5344CB8AC3E}">
-        <p14:creationId xmlns:p14="http://schemas.microsoft.com/office/powerpoint/2010/main" val="668455406"/>
+        <p14:creationId xmlns:p14="http://schemas.microsoft.com/office/powerpoint/2010/main" val="2471126787"/>
       </p:ext>
     </p:extLst>
   </p:cSld>
@@ -1797,7 +2229,7 @@
 </p:sldLayout>
 </file>
 
-<file path=ppt/slideLayouts/slideLayout2.xml><?xml version="1.0" encoding="utf-8"?>
+<file path=ppt/slideLayouts/slideLayout13.xml><?xml version="1.0" encoding="utf-8"?>
 <p:sldLayout xmlns:a="http://schemas.openxmlformats.org/drawingml/2006/main" xmlns:r="http://schemas.openxmlformats.org/officeDocument/2006/relationships" xmlns:p="http://schemas.openxmlformats.org/presentationml/2006/main" type="obj" preserve="1">
   <p:cSld name="Title and Content">
     <p:spTree>
@@ -1920,11 +2352,75 @@
           <a:bodyPr/>
           <a:lstStyle/>
           <a:p>
-            <a:fld id="{0499211D-10D7-4F49-ADEF-55BEAD014249}" type="datetimeFigureOut">
-              <a:rPr lang="en-US" smtClean="0"/>
-              <a:t>14/09/2025</a:t>
+            <a:pPr marL="0" marR="0" lvl="0" indent="0" algn="l" defTabSz="914400" rtl="0" eaLnBrk="1" fontAlgn="auto" latinLnBrk="0" hangingPunct="1">
+              <a:lnSpc>
+                <a:spcPct val="100000"/>
+              </a:lnSpc>
+              <a:spcBef>
+                <a:spcPts val="0"/>
+              </a:spcBef>
+              <a:spcAft>
+                <a:spcPts val="0"/>
+              </a:spcAft>
+              <a:buClrTx/>
+              <a:buSzTx/>
+              <a:buFontTx/>
+              <a:buNone/>
+              <a:tabLst/>
+              <a:defRPr/>
+            </a:pPr>
+            <a:fld id="{9285AD09-59D5-478E-BFB4-5748C04604E9}" type="datetimeFigureOut">
+              <a:rPr kumimoji="0" lang="en-US" sz="900" b="0" i="0" u="none" strike="noStrike" kern="1200" cap="none" spc="0" normalizeH="0" baseline="0" noProof="0" smtClean="0">
+                <a:ln>
+                  <a:noFill/>
+                </a:ln>
+                <a:solidFill>
+                  <a:prstClr val="black">
+                    <a:tint val="75000"/>
+                  </a:prstClr>
+                </a:solidFill>
+                <a:effectLst/>
+                <a:uLnTx/>
+                <a:uFillTx/>
+                <a:latin typeface="Calibri" panose="020F0502020204030204"/>
+                <a:ea typeface="+mn-ea"/>
+                <a:cs typeface="+mn-cs"/>
+              </a:rPr>
+              <a:pPr marL="0" marR="0" lvl="0" indent="0" algn="l" defTabSz="914400" rtl="0" eaLnBrk="1" fontAlgn="auto" latinLnBrk="0" hangingPunct="1">
+                <a:lnSpc>
+                  <a:spcPct val="100000"/>
+                </a:lnSpc>
+                <a:spcBef>
+                  <a:spcPts val="0"/>
+                </a:spcBef>
+                <a:spcAft>
+                  <a:spcPts val="0"/>
+                </a:spcAft>
+                <a:buClrTx/>
+                <a:buSzTx/>
+                <a:buFontTx/>
+                <a:buNone/>
+                <a:tabLst/>
+                <a:defRPr/>
+              </a:pPr>
+              <a:t>05/10/2025</a:t>
             </a:fld>
-            <a:endParaRPr lang="en-US"/>
+            <a:endParaRPr kumimoji="0" lang="en-US" sz="900" b="0" i="0" u="none" strike="noStrike" kern="1200" cap="none" spc="0" normalizeH="0" baseline="0" noProof="0">
+              <a:ln>
+                <a:noFill/>
+              </a:ln>
+              <a:solidFill>
+                <a:prstClr val="black">
+                  <a:tint val="75000"/>
+                </a:prstClr>
+              </a:solidFill>
+              <a:effectLst/>
+              <a:uLnTx/>
+              <a:uFillTx/>
+              <a:latin typeface="Calibri" panose="020F0502020204030204"/>
+              <a:ea typeface="+mn-ea"/>
+              <a:cs typeface="+mn-cs"/>
+            </a:endParaRPr>
           </a:p>
         </p:txBody>
       </p:sp>
@@ -1949,7 +2445,39 @@
           <a:bodyPr/>
           <a:lstStyle/>
           <a:p>
-            <a:endParaRPr lang="en-US"/>
+            <a:pPr marL="0" marR="0" lvl="0" indent="0" algn="ctr" defTabSz="914400" rtl="0" eaLnBrk="1" fontAlgn="auto" latinLnBrk="0" hangingPunct="1">
+              <a:lnSpc>
+                <a:spcPct val="100000"/>
+              </a:lnSpc>
+              <a:spcBef>
+                <a:spcPts val="0"/>
+              </a:spcBef>
+              <a:spcAft>
+                <a:spcPts val="0"/>
+              </a:spcAft>
+              <a:buClrTx/>
+              <a:buSzTx/>
+              <a:buFontTx/>
+              <a:buNone/>
+              <a:tabLst/>
+              <a:defRPr/>
+            </a:pPr>
+            <a:endParaRPr kumimoji="0" lang="en-US" sz="900" b="0" i="0" u="none" strike="noStrike" kern="1200" cap="none" spc="0" normalizeH="0" baseline="0" noProof="0">
+              <a:ln>
+                <a:noFill/>
+              </a:ln>
+              <a:solidFill>
+                <a:prstClr val="black">
+                  <a:tint val="75000"/>
+                </a:prstClr>
+              </a:solidFill>
+              <a:effectLst/>
+              <a:uLnTx/>
+              <a:uFillTx/>
+              <a:latin typeface="Calibri" panose="020F0502020204030204"/>
+              <a:ea typeface="+mn-ea"/>
+              <a:cs typeface="+mn-cs"/>
+            </a:endParaRPr>
           </a:p>
         </p:txBody>
       </p:sp>
@@ -1974,18 +2502,82 @@
           <a:bodyPr/>
           <a:lstStyle/>
           <a:p>
-            <a:fld id="{0198E33A-3E23-44AC-B0F1-7EE9715F20F1}" type="slidenum">
-              <a:rPr lang="en-US" smtClean="0"/>
+            <a:pPr marL="0" marR="0" lvl="0" indent="0" algn="r" defTabSz="914400" rtl="0" eaLnBrk="1" fontAlgn="auto" latinLnBrk="0" hangingPunct="1">
+              <a:lnSpc>
+                <a:spcPct val="100000"/>
+              </a:lnSpc>
+              <a:spcBef>
+                <a:spcPts val="0"/>
+              </a:spcBef>
+              <a:spcAft>
+                <a:spcPts val="0"/>
+              </a:spcAft>
+              <a:buClrTx/>
+              <a:buSzTx/>
+              <a:buFontTx/>
+              <a:buNone/>
+              <a:tabLst/>
+              <a:defRPr/>
+            </a:pPr>
+            <a:fld id="{52669F0D-795E-449C-AD68-9797EE4A94EB}" type="slidenum">
+              <a:rPr kumimoji="0" lang="en-US" sz="900" b="0" i="0" u="none" strike="noStrike" kern="1200" cap="none" spc="0" normalizeH="0" baseline="0" noProof="0" smtClean="0">
+                <a:ln>
+                  <a:noFill/>
+                </a:ln>
+                <a:solidFill>
+                  <a:prstClr val="black">
+                    <a:tint val="75000"/>
+                  </a:prstClr>
+                </a:solidFill>
+                <a:effectLst/>
+                <a:uLnTx/>
+                <a:uFillTx/>
+                <a:latin typeface="Calibri" panose="020F0502020204030204"/>
+                <a:ea typeface="+mn-ea"/>
+                <a:cs typeface="+mn-cs"/>
+              </a:rPr>
+              <a:pPr marL="0" marR="0" lvl="0" indent="0" algn="r" defTabSz="914400" rtl="0" eaLnBrk="1" fontAlgn="auto" latinLnBrk="0" hangingPunct="1">
+                <a:lnSpc>
+                  <a:spcPct val="100000"/>
+                </a:lnSpc>
+                <a:spcBef>
+                  <a:spcPts val="0"/>
+                </a:spcBef>
+                <a:spcAft>
+                  <a:spcPts val="0"/>
+                </a:spcAft>
+                <a:buClrTx/>
+                <a:buSzTx/>
+                <a:buFontTx/>
+                <a:buNone/>
+                <a:tabLst/>
+                <a:defRPr/>
+              </a:pPr>
               <a:t>‹#›</a:t>
             </a:fld>
-            <a:endParaRPr lang="en-US"/>
+            <a:endParaRPr kumimoji="0" lang="en-US" sz="900" b="0" i="0" u="none" strike="noStrike" kern="1200" cap="none" spc="0" normalizeH="0" baseline="0" noProof="0">
+              <a:ln>
+                <a:noFill/>
+              </a:ln>
+              <a:solidFill>
+                <a:prstClr val="black">
+                  <a:tint val="75000"/>
+                </a:prstClr>
+              </a:solidFill>
+              <a:effectLst/>
+              <a:uLnTx/>
+              <a:uFillTx/>
+              <a:latin typeface="Calibri" panose="020F0502020204030204"/>
+              <a:ea typeface="+mn-ea"/>
+              <a:cs typeface="+mn-cs"/>
+            </a:endParaRPr>
           </a:p>
         </p:txBody>
       </p:sp>
     </p:spTree>
     <p:extLst>
       <p:ext uri="{BB962C8B-B14F-4D97-AF65-F5344CB8AC3E}">
-        <p14:creationId xmlns:p14="http://schemas.microsoft.com/office/powerpoint/2010/main" val="4068213330"/>
+        <p14:creationId xmlns:p14="http://schemas.microsoft.com/office/powerpoint/2010/main" val="1396854420"/>
       </p:ext>
     </p:extLst>
   </p:cSld>
@@ -1995,7 +2587,7 @@
 </p:sldLayout>
 </file>
 
-<file path=ppt/slideLayouts/slideLayout3.xml><?xml version="1.0" encoding="utf-8"?>
+<file path=ppt/slideLayouts/slideLayout14.xml><?xml version="1.0" encoding="utf-8"?>
 <p:sldLayout xmlns:a="http://schemas.openxmlformats.org/drawingml/2006/main" xmlns:r="http://schemas.openxmlformats.org/officeDocument/2006/relationships" xmlns:p="http://schemas.openxmlformats.org/presentationml/2006/main" type="secHead" preserve="1">
   <p:cSld name="Section Header">
     <p:spTree>
@@ -2195,11 +2787,75 @@
           <a:bodyPr/>
           <a:lstStyle/>
           <a:p>
-            <a:fld id="{0499211D-10D7-4F49-ADEF-55BEAD014249}" type="datetimeFigureOut">
-              <a:rPr lang="en-US" smtClean="0"/>
-              <a:t>14/09/2025</a:t>
+            <a:pPr marL="0" marR="0" lvl="0" indent="0" algn="l" defTabSz="914400" rtl="0" eaLnBrk="1" fontAlgn="auto" latinLnBrk="0" hangingPunct="1">
+              <a:lnSpc>
+                <a:spcPct val="100000"/>
+              </a:lnSpc>
+              <a:spcBef>
+                <a:spcPts val="0"/>
+              </a:spcBef>
+              <a:spcAft>
+                <a:spcPts val="0"/>
+              </a:spcAft>
+              <a:buClrTx/>
+              <a:buSzTx/>
+              <a:buFontTx/>
+              <a:buNone/>
+              <a:tabLst/>
+              <a:defRPr/>
+            </a:pPr>
+            <a:fld id="{9285AD09-59D5-478E-BFB4-5748C04604E9}" type="datetimeFigureOut">
+              <a:rPr kumimoji="0" lang="en-US" sz="900" b="0" i="0" u="none" strike="noStrike" kern="1200" cap="none" spc="0" normalizeH="0" baseline="0" noProof="0" smtClean="0">
+                <a:ln>
+                  <a:noFill/>
+                </a:ln>
+                <a:solidFill>
+                  <a:prstClr val="black">
+                    <a:tint val="75000"/>
+                  </a:prstClr>
+                </a:solidFill>
+                <a:effectLst/>
+                <a:uLnTx/>
+                <a:uFillTx/>
+                <a:latin typeface="Calibri" panose="020F0502020204030204"/>
+                <a:ea typeface="+mn-ea"/>
+                <a:cs typeface="+mn-cs"/>
+              </a:rPr>
+              <a:pPr marL="0" marR="0" lvl="0" indent="0" algn="l" defTabSz="914400" rtl="0" eaLnBrk="1" fontAlgn="auto" latinLnBrk="0" hangingPunct="1">
+                <a:lnSpc>
+                  <a:spcPct val="100000"/>
+                </a:lnSpc>
+                <a:spcBef>
+                  <a:spcPts val="0"/>
+                </a:spcBef>
+                <a:spcAft>
+                  <a:spcPts val="0"/>
+                </a:spcAft>
+                <a:buClrTx/>
+                <a:buSzTx/>
+                <a:buFontTx/>
+                <a:buNone/>
+                <a:tabLst/>
+                <a:defRPr/>
+              </a:pPr>
+              <a:t>05/10/2025</a:t>
             </a:fld>
-            <a:endParaRPr lang="en-US"/>
+            <a:endParaRPr kumimoji="0" lang="en-US" sz="900" b="0" i="0" u="none" strike="noStrike" kern="1200" cap="none" spc="0" normalizeH="0" baseline="0" noProof="0">
+              <a:ln>
+                <a:noFill/>
+              </a:ln>
+              <a:solidFill>
+                <a:prstClr val="black">
+                  <a:tint val="75000"/>
+                </a:prstClr>
+              </a:solidFill>
+              <a:effectLst/>
+              <a:uLnTx/>
+              <a:uFillTx/>
+              <a:latin typeface="Calibri" panose="020F0502020204030204"/>
+              <a:ea typeface="+mn-ea"/>
+              <a:cs typeface="+mn-cs"/>
+            </a:endParaRPr>
           </a:p>
         </p:txBody>
       </p:sp>
@@ -2224,7 +2880,39 @@
           <a:bodyPr/>
           <a:lstStyle/>
           <a:p>
-            <a:endParaRPr lang="en-US"/>
+            <a:pPr marL="0" marR="0" lvl="0" indent="0" algn="ctr" defTabSz="914400" rtl="0" eaLnBrk="1" fontAlgn="auto" latinLnBrk="0" hangingPunct="1">
+              <a:lnSpc>
+                <a:spcPct val="100000"/>
+              </a:lnSpc>
+              <a:spcBef>
+                <a:spcPts val="0"/>
+              </a:spcBef>
+              <a:spcAft>
+                <a:spcPts val="0"/>
+              </a:spcAft>
+              <a:buClrTx/>
+              <a:buSzTx/>
+              <a:buFontTx/>
+              <a:buNone/>
+              <a:tabLst/>
+              <a:defRPr/>
+            </a:pPr>
+            <a:endParaRPr kumimoji="0" lang="en-US" sz="900" b="0" i="0" u="none" strike="noStrike" kern="1200" cap="none" spc="0" normalizeH="0" baseline="0" noProof="0">
+              <a:ln>
+                <a:noFill/>
+              </a:ln>
+              <a:solidFill>
+                <a:prstClr val="black">
+                  <a:tint val="75000"/>
+                </a:prstClr>
+              </a:solidFill>
+              <a:effectLst/>
+              <a:uLnTx/>
+              <a:uFillTx/>
+              <a:latin typeface="Calibri" panose="020F0502020204030204"/>
+              <a:ea typeface="+mn-ea"/>
+              <a:cs typeface="+mn-cs"/>
+            </a:endParaRPr>
           </a:p>
         </p:txBody>
       </p:sp>
@@ -2249,18 +2937,82 @@
           <a:bodyPr/>
           <a:lstStyle/>
           <a:p>
-            <a:fld id="{0198E33A-3E23-44AC-B0F1-7EE9715F20F1}" type="slidenum">
-              <a:rPr lang="en-US" smtClean="0"/>
+            <a:pPr marL="0" marR="0" lvl="0" indent="0" algn="r" defTabSz="914400" rtl="0" eaLnBrk="1" fontAlgn="auto" latinLnBrk="0" hangingPunct="1">
+              <a:lnSpc>
+                <a:spcPct val="100000"/>
+              </a:lnSpc>
+              <a:spcBef>
+                <a:spcPts val="0"/>
+              </a:spcBef>
+              <a:spcAft>
+                <a:spcPts val="0"/>
+              </a:spcAft>
+              <a:buClrTx/>
+              <a:buSzTx/>
+              <a:buFontTx/>
+              <a:buNone/>
+              <a:tabLst/>
+              <a:defRPr/>
+            </a:pPr>
+            <a:fld id="{52669F0D-795E-449C-AD68-9797EE4A94EB}" type="slidenum">
+              <a:rPr kumimoji="0" lang="en-US" sz="900" b="0" i="0" u="none" strike="noStrike" kern="1200" cap="none" spc="0" normalizeH="0" baseline="0" noProof="0" smtClean="0">
+                <a:ln>
+                  <a:noFill/>
+                </a:ln>
+                <a:solidFill>
+                  <a:prstClr val="black">
+                    <a:tint val="75000"/>
+                  </a:prstClr>
+                </a:solidFill>
+                <a:effectLst/>
+                <a:uLnTx/>
+                <a:uFillTx/>
+                <a:latin typeface="Calibri" panose="020F0502020204030204"/>
+                <a:ea typeface="+mn-ea"/>
+                <a:cs typeface="+mn-cs"/>
+              </a:rPr>
+              <a:pPr marL="0" marR="0" lvl="0" indent="0" algn="r" defTabSz="914400" rtl="0" eaLnBrk="1" fontAlgn="auto" latinLnBrk="0" hangingPunct="1">
+                <a:lnSpc>
+                  <a:spcPct val="100000"/>
+                </a:lnSpc>
+                <a:spcBef>
+                  <a:spcPts val="0"/>
+                </a:spcBef>
+                <a:spcAft>
+                  <a:spcPts val="0"/>
+                </a:spcAft>
+                <a:buClrTx/>
+                <a:buSzTx/>
+                <a:buFontTx/>
+                <a:buNone/>
+                <a:tabLst/>
+                <a:defRPr/>
+              </a:pPr>
               <a:t>‹#›</a:t>
             </a:fld>
-            <a:endParaRPr lang="en-US"/>
+            <a:endParaRPr kumimoji="0" lang="en-US" sz="900" b="0" i="0" u="none" strike="noStrike" kern="1200" cap="none" spc="0" normalizeH="0" baseline="0" noProof="0">
+              <a:ln>
+                <a:noFill/>
+              </a:ln>
+              <a:solidFill>
+                <a:prstClr val="black">
+                  <a:tint val="75000"/>
+                </a:prstClr>
+              </a:solidFill>
+              <a:effectLst/>
+              <a:uLnTx/>
+              <a:uFillTx/>
+              <a:latin typeface="Calibri" panose="020F0502020204030204"/>
+              <a:ea typeface="+mn-ea"/>
+              <a:cs typeface="+mn-cs"/>
+            </a:endParaRPr>
           </a:p>
         </p:txBody>
       </p:sp>
     </p:spTree>
     <p:extLst>
       <p:ext uri="{BB962C8B-B14F-4D97-AF65-F5344CB8AC3E}">
-        <p14:creationId xmlns:p14="http://schemas.microsoft.com/office/powerpoint/2010/main" val="4286100846"/>
+        <p14:creationId xmlns:p14="http://schemas.microsoft.com/office/powerpoint/2010/main" val="1096432827"/>
       </p:ext>
     </p:extLst>
   </p:cSld>
@@ -2270,7 +3022,7 @@
 </p:sldLayout>
 </file>
 
-<file path=ppt/slideLayouts/slideLayout4.xml><?xml version="1.0" encoding="utf-8"?>
+<file path=ppt/slideLayouts/slideLayout15.xml><?xml version="1.0" encoding="utf-8"?>
 <p:sldLayout xmlns:a="http://schemas.openxmlformats.org/drawingml/2006/main" xmlns:r="http://schemas.openxmlformats.org/officeDocument/2006/relationships" xmlns:p="http://schemas.openxmlformats.org/presentationml/2006/main" type="twoObj" preserve="1">
   <p:cSld name="Two Content">
     <p:spTree>
@@ -2460,11 +3212,75 @@
           <a:bodyPr/>
           <a:lstStyle/>
           <a:p>
-            <a:fld id="{0499211D-10D7-4F49-ADEF-55BEAD014249}" type="datetimeFigureOut">
-              <a:rPr lang="en-US" smtClean="0"/>
-              <a:t>14/09/2025</a:t>
+            <a:pPr marL="0" marR="0" lvl="0" indent="0" algn="l" defTabSz="914400" rtl="0" eaLnBrk="1" fontAlgn="auto" latinLnBrk="0" hangingPunct="1">
+              <a:lnSpc>
+                <a:spcPct val="100000"/>
+              </a:lnSpc>
+              <a:spcBef>
+                <a:spcPts val="0"/>
+              </a:spcBef>
+              <a:spcAft>
+                <a:spcPts val="0"/>
+              </a:spcAft>
+              <a:buClrTx/>
+              <a:buSzTx/>
+              <a:buFontTx/>
+              <a:buNone/>
+              <a:tabLst/>
+              <a:defRPr/>
+            </a:pPr>
+            <a:fld id="{9285AD09-59D5-478E-BFB4-5748C04604E9}" type="datetimeFigureOut">
+              <a:rPr kumimoji="0" lang="en-US" sz="900" b="0" i="0" u="none" strike="noStrike" kern="1200" cap="none" spc="0" normalizeH="0" baseline="0" noProof="0" smtClean="0">
+                <a:ln>
+                  <a:noFill/>
+                </a:ln>
+                <a:solidFill>
+                  <a:prstClr val="black">
+                    <a:tint val="75000"/>
+                  </a:prstClr>
+                </a:solidFill>
+                <a:effectLst/>
+                <a:uLnTx/>
+                <a:uFillTx/>
+                <a:latin typeface="Calibri" panose="020F0502020204030204"/>
+                <a:ea typeface="+mn-ea"/>
+                <a:cs typeface="+mn-cs"/>
+              </a:rPr>
+              <a:pPr marL="0" marR="0" lvl="0" indent="0" algn="l" defTabSz="914400" rtl="0" eaLnBrk="1" fontAlgn="auto" latinLnBrk="0" hangingPunct="1">
+                <a:lnSpc>
+                  <a:spcPct val="100000"/>
+                </a:lnSpc>
+                <a:spcBef>
+                  <a:spcPts val="0"/>
+                </a:spcBef>
+                <a:spcAft>
+                  <a:spcPts val="0"/>
+                </a:spcAft>
+                <a:buClrTx/>
+                <a:buSzTx/>
+                <a:buFontTx/>
+                <a:buNone/>
+                <a:tabLst/>
+                <a:defRPr/>
+              </a:pPr>
+              <a:t>05/10/2025</a:t>
             </a:fld>
-            <a:endParaRPr lang="en-US"/>
+            <a:endParaRPr kumimoji="0" lang="en-US" sz="900" b="0" i="0" u="none" strike="noStrike" kern="1200" cap="none" spc="0" normalizeH="0" baseline="0" noProof="0">
+              <a:ln>
+                <a:noFill/>
+              </a:ln>
+              <a:solidFill>
+                <a:prstClr val="black">
+                  <a:tint val="75000"/>
+                </a:prstClr>
+              </a:solidFill>
+              <a:effectLst/>
+              <a:uLnTx/>
+              <a:uFillTx/>
+              <a:latin typeface="Calibri" panose="020F0502020204030204"/>
+              <a:ea typeface="+mn-ea"/>
+              <a:cs typeface="+mn-cs"/>
+            </a:endParaRPr>
           </a:p>
         </p:txBody>
       </p:sp>
@@ -2489,7 +3305,39 @@
           <a:bodyPr/>
           <a:lstStyle/>
           <a:p>
-            <a:endParaRPr lang="en-US"/>
+            <a:pPr marL="0" marR="0" lvl="0" indent="0" algn="ctr" defTabSz="914400" rtl="0" eaLnBrk="1" fontAlgn="auto" latinLnBrk="0" hangingPunct="1">
+              <a:lnSpc>
+                <a:spcPct val="100000"/>
+              </a:lnSpc>
+              <a:spcBef>
+                <a:spcPts val="0"/>
+              </a:spcBef>
+              <a:spcAft>
+                <a:spcPts val="0"/>
+              </a:spcAft>
+              <a:buClrTx/>
+              <a:buSzTx/>
+              <a:buFontTx/>
+              <a:buNone/>
+              <a:tabLst/>
+              <a:defRPr/>
+            </a:pPr>
+            <a:endParaRPr kumimoji="0" lang="en-US" sz="900" b="0" i="0" u="none" strike="noStrike" kern="1200" cap="none" spc="0" normalizeH="0" baseline="0" noProof="0">
+              <a:ln>
+                <a:noFill/>
+              </a:ln>
+              <a:solidFill>
+                <a:prstClr val="black">
+                  <a:tint val="75000"/>
+                </a:prstClr>
+              </a:solidFill>
+              <a:effectLst/>
+              <a:uLnTx/>
+              <a:uFillTx/>
+              <a:latin typeface="Calibri" panose="020F0502020204030204"/>
+              <a:ea typeface="+mn-ea"/>
+              <a:cs typeface="+mn-cs"/>
+            </a:endParaRPr>
           </a:p>
         </p:txBody>
       </p:sp>
@@ -2514,18 +3362,82 @@
           <a:bodyPr/>
           <a:lstStyle/>
           <a:p>
-            <a:fld id="{0198E33A-3E23-44AC-B0F1-7EE9715F20F1}" type="slidenum">
-              <a:rPr lang="en-US" smtClean="0"/>
+            <a:pPr marL="0" marR="0" lvl="0" indent="0" algn="r" defTabSz="914400" rtl="0" eaLnBrk="1" fontAlgn="auto" latinLnBrk="0" hangingPunct="1">
+              <a:lnSpc>
+                <a:spcPct val="100000"/>
+              </a:lnSpc>
+              <a:spcBef>
+                <a:spcPts val="0"/>
+              </a:spcBef>
+              <a:spcAft>
+                <a:spcPts val="0"/>
+              </a:spcAft>
+              <a:buClrTx/>
+              <a:buSzTx/>
+              <a:buFontTx/>
+              <a:buNone/>
+              <a:tabLst/>
+              <a:defRPr/>
+            </a:pPr>
+            <a:fld id="{52669F0D-795E-449C-AD68-9797EE4A94EB}" type="slidenum">
+              <a:rPr kumimoji="0" lang="en-US" sz="900" b="0" i="0" u="none" strike="noStrike" kern="1200" cap="none" spc="0" normalizeH="0" baseline="0" noProof="0" smtClean="0">
+                <a:ln>
+                  <a:noFill/>
+                </a:ln>
+                <a:solidFill>
+                  <a:prstClr val="black">
+                    <a:tint val="75000"/>
+                  </a:prstClr>
+                </a:solidFill>
+                <a:effectLst/>
+                <a:uLnTx/>
+                <a:uFillTx/>
+                <a:latin typeface="Calibri" panose="020F0502020204030204"/>
+                <a:ea typeface="+mn-ea"/>
+                <a:cs typeface="+mn-cs"/>
+              </a:rPr>
+              <a:pPr marL="0" marR="0" lvl="0" indent="0" algn="r" defTabSz="914400" rtl="0" eaLnBrk="1" fontAlgn="auto" latinLnBrk="0" hangingPunct="1">
+                <a:lnSpc>
+                  <a:spcPct val="100000"/>
+                </a:lnSpc>
+                <a:spcBef>
+                  <a:spcPts val="0"/>
+                </a:spcBef>
+                <a:spcAft>
+                  <a:spcPts val="0"/>
+                </a:spcAft>
+                <a:buClrTx/>
+                <a:buSzTx/>
+                <a:buFontTx/>
+                <a:buNone/>
+                <a:tabLst/>
+                <a:defRPr/>
+              </a:pPr>
               <a:t>‹#›</a:t>
             </a:fld>
-            <a:endParaRPr lang="en-US"/>
+            <a:endParaRPr kumimoji="0" lang="en-US" sz="900" b="0" i="0" u="none" strike="noStrike" kern="1200" cap="none" spc="0" normalizeH="0" baseline="0" noProof="0">
+              <a:ln>
+                <a:noFill/>
+              </a:ln>
+              <a:solidFill>
+                <a:prstClr val="black">
+                  <a:tint val="75000"/>
+                </a:prstClr>
+              </a:solidFill>
+              <a:effectLst/>
+              <a:uLnTx/>
+              <a:uFillTx/>
+              <a:latin typeface="Calibri" panose="020F0502020204030204"/>
+              <a:ea typeface="+mn-ea"/>
+              <a:cs typeface="+mn-cs"/>
+            </a:endParaRPr>
           </a:p>
         </p:txBody>
       </p:sp>
     </p:spTree>
     <p:extLst>
       <p:ext uri="{BB962C8B-B14F-4D97-AF65-F5344CB8AC3E}">
-        <p14:creationId xmlns:p14="http://schemas.microsoft.com/office/powerpoint/2010/main" val="2590737265"/>
+        <p14:creationId xmlns:p14="http://schemas.microsoft.com/office/powerpoint/2010/main" val="3999103598"/>
       </p:ext>
     </p:extLst>
   </p:cSld>
@@ -2535,7 +3447,7 @@
 </p:sldLayout>
 </file>
 
-<file path=ppt/slideLayouts/slideLayout5.xml><?xml version="1.0" encoding="utf-8"?>
+<file path=ppt/slideLayouts/slideLayout16.xml><?xml version="1.0" encoding="utf-8"?>
 <p:sldLayout xmlns:a="http://schemas.openxmlformats.org/drawingml/2006/main" xmlns:r="http://schemas.openxmlformats.org/officeDocument/2006/relationships" xmlns:p="http://schemas.openxmlformats.org/presentationml/2006/main" type="twoTxTwoObj" preserve="1">
   <p:cSld name="Comparison">
     <p:spTree>
@@ -2872,11 +3784,75 @@
           <a:bodyPr/>
           <a:lstStyle/>
           <a:p>
-            <a:fld id="{0499211D-10D7-4F49-ADEF-55BEAD014249}" type="datetimeFigureOut">
-              <a:rPr lang="en-US" smtClean="0"/>
-              <a:t>14/09/2025</a:t>
+            <a:pPr marL="0" marR="0" lvl="0" indent="0" algn="l" defTabSz="914400" rtl="0" eaLnBrk="1" fontAlgn="auto" latinLnBrk="0" hangingPunct="1">
+              <a:lnSpc>
+                <a:spcPct val="100000"/>
+              </a:lnSpc>
+              <a:spcBef>
+                <a:spcPts val="0"/>
+              </a:spcBef>
+              <a:spcAft>
+                <a:spcPts val="0"/>
+              </a:spcAft>
+              <a:buClrTx/>
+              <a:buSzTx/>
+              <a:buFontTx/>
+              <a:buNone/>
+              <a:tabLst/>
+              <a:defRPr/>
+            </a:pPr>
+            <a:fld id="{9285AD09-59D5-478E-BFB4-5748C04604E9}" type="datetimeFigureOut">
+              <a:rPr kumimoji="0" lang="en-US" sz="900" b="0" i="0" u="none" strike="noStrike" kern="1200" cap="none" spc="0" normalizeH="0" baseline="0" noProof="0" smtClean="0">
+                <a:ln>
+                  <a:noFill/>
+                </a:ln>
+                <a:solidFill>
+                  <a:prstClr val="black">
+                    <a:tint val="75000"/>
+                  </a:prstClr>
+                </a:solidFill>
+                <a:effectLst/>
+                <a:uLnTx/>
+                <a:uFillTx/>
+                <a:latin typeface="Calibri" panose="020F0502020204030204"/>
+                <a:ea typeface="+mn-ea"/>
+                <a:cs typeface="+mn-cs"/>
+              </a:rPr>
+              <a:pPr marL="0" marR="0" lvl="0" indent="0" algn="l" defTabSz="914400" rtl="0" eaLnBrk="1" fontAlgn="auto" latinLnBrk="0" hangingPunct="1">
+                <a:lnSpc>
+                  <a:spcPct val="100000"/>
+                </a:lnSpc>
+                <a:spcBef>
+                  <a:spcPts val="0"/>
+                </a:spcBef>
+                <a:spcAft>
+                  <a:spcPts val="0"/>
+                </a:spcAft>
+                <a:buClrTx/>
+                <a:buSzTx/>
+                <a:buFontTx/>
+                <a:buNone/>
+                <a:tabLst/>
+                <a:defRPr/>
+              </a:pPr>
+              <a:t>05/10/2025</a:t>
             </a:fld>
-            <a:endParaRPr lang="en-US"/>
+            <a:endParaRPr kumimoji="0" lang="en-US" sz="900" b="0" i="0" u="none" strike="noStrike" kern="1200" cap="none" spc="0" normalizeH="0" baseline="0" noProof="0">
+              <a:ln>
+                <a:noFill/>
+              </a:ln>
+              <a:solidFill>
+                <a:prstClr val="black">
+                  <a:tint val="75000"/>
+                </a:prstClr>
+              </a:solidFill>
+              <a:effectLst/>
+              <a:uLnTx/>
+              <a:uFillTx/>
+              <a:latin typeface="Calibri" panose="020F0502020204030204"/>
+              <a:ea typeface="+mn-ea"/>
+              <a:cs typeface="+mn-cs"/>
+            </a:endParaRPr>
           </a:p>
         </p:txBody>
       </p:sp>
@@ -2901,7 +3877,39 @@
           <a:bodyPr/>
           <a:lstStyle/>
           <a:p>
-            <a:endParaRPr lang="en-US"/>
+            <a:pPr marL="0" marR="0" lvl="0" indent="0" algn="ctr" defTabSz="914400" rtl="0" eaLnBrk="1" fontAlgn="auto" latinLnBrk="0" hangingPunct="1">
+              <a:lnSpc>
+                <a:spcPct val="100000"/>
+              </a:lnSpc>
+              <a:spcBef>
+                <a:spcPts val="0"/>
+              </a:spcBef>
+              <a:spcAft>
+                <a:spcPts val="0"/>
+              </a:spcAft>
+              <a:buClrTx/>
+              <a:buSzTx/>
+              <a:buFontTx/>
+              <a:buNone/>
+              <a:tabLst/>
+              <a:defRPr/>
+            </a:pPr>
+            <a:endParaRPr kumimoji="0" lang="en-US" sz="900" b="0" i="0" u="none" strike="noStrike" kern="1200" cap="none" spc="0" normalizeH="0" baseline="0" noProof="0">
+              <a:ln>
+                <a:noFill/>
+              </a:ln>
+              <a:solidFill>
+                <a:prstClr val="black">
+                  <a:tint val="75000"/>
+                </a:prstClr>
+              </a:solidFill>
+              <a:effectLst/>
+              <a:uLnTx/>
+              <a:uFillTx/>
+              <a:latin typeface="Calibri" panose="020F0502020204030204"/>
+              <a:ea typeface="+mn-ea"/>
+              <a:cs typeface="+mn-cs"/>
+            </a:endParaRPr>
           </a:p>
         </p:txBody>
       </p:sp>
@@ -2926,18 +3934,82 @@
           <a:bodyPr/>
           <a:lstStyle/>
           <a:p>
-            <a:fld id="{0198E33A-3E23-44AC-B0F1-7EE9715F20F1}" type="slidenum">
-              <a:rPr lang="en-US" smtClean="0"/>
+            <a:pPr marL="0" marR="0" lvl="0" indent="0" algn="r" defTabSz="914400" rtl="0" eaLnBrk="1" fontAlgn="auto" latinLnBrk="0" hangingPunct="1">
+              <a:lnSpc>
+                <a:spcPct val="100000"/>
+              </a:lnSpc>
+              <a:spcBef>
+                <a:spcPts val="0"/>
+              </a:spcBef>
+              <a:spcAft>
+                <a:spcPts val="0"/>
+              </a:spcAft>
+              <a:buClrTx/>
+              <a:buSzTx/>
+              <a:buFontTx/>
+              <a:buNone/>
+              <a:tabLst/>
+              <a:defRPr/>
+            </a:pPr>
+            <a:fld id="{52669F0D-795E-449C-AD68-9797EE4A94EB}" type="slidenum">
+              <a:rPr kumimoji="0" lang="en-US" sz="900" b="0" i="0" u="none" strike="noStrike" kern="1200" cap="none" spc="0" normalizeH="0" baseline="0" noProof="0" smtClean="0">
+                <a:ln>
+                  <a:noFill/>
+                </a:ln>
+                <a:solidFill>
+                  <a:prstClr val="black">
+                    <a:tint val="75000"/>
+                  </a:prstClr>
+                </a:solidFill>
+                <a:effectLst/>
+                <a:uLnTx/>
+                <a:uFillTx/>
+                <a:latin typeface="Calibri" panose="020F0502020204030204"/>
+                <a:ea typeface="+mn-ea"/>
+                <a:cs typeface="+mn-cs"/>
+              </a:rPr>
+              <a:pPr marL="0" marR="0" lvl="0" indent="0" algn="r" defTabSz="914400" rtl="0" eaLnBrk="1" fontAlgn="auto" latinLnBrk="0" hangingPunct="1">
+                <a:lnSpc>
+                  <a:spcPct val="100000"/>
+                </a:lnSpc>
+                <a:spcBef>
+                  <a:spcPts val="0"/>
+                </a:spcBef>
+                <a:spcAft>
+                  <a:spcPts val="0"/>
+                </a:spcAft>
+                <a:buClrTx/>
+                <a:buSzTx/>
+                <a:buFontTx/>
+                <a:buNone/>
+                <a:tabLst/>
+                <a:defRPr/>
+              </a:pPr>
               <a:t>‹#›</a:t>
             </a:fld>
-            <a:endParaRPr lang="en-US"/>
+            <a:endParaRPr kumimoji="0" lang="en-US" sz="900" b="0" i="0" u="none" strike="noStrike" kern="1200" cap="none" spc="0" normalizeH="0" baseline="0" noProof="0">
+              <a:ln>
+                <a:noFill/>
+              </a:ln>
+              <a:solidFill>
+                <a:prstClr val="black">
+                  <a:tint val="75000"/>
+                </a:prstClr>
+              </a:solidFill>
+              <a:effectLst/>
+              <a:uLnTx/>
+              <a:uFillTx/>
+              <a:latin typeface="Calibri" panose="020F0502020204030204"/>
+              <a:ea typeface="+mn-ea"/>
+              <a:cs typeface="+mn-cs"/>
+            </a:endParaRPr>
           </a:p>
         </p:txBody>
       </p:sp>
     </p:spTree>
     <p:extLst>
       <p:ext uri="{BB962C8B-B14F-4D97-AF65-F5344CB8AC3E}">
-        <p14:creationId xmlns:p14="http://schemas.microsoft.com/office/powerpoint/2010/main" val="526366525"/>
+        <p14:creationId xmlns:p14="http://schemas.microsoft.com/office/powerpoint/2010/main" val="2874641983"/>
       </p:ext>
     </p:extLst>
   </p:cSld>
@@ -2947,7 +4019,7 @@
 </p:sldLayout>
 </file>
 
-<file path=ppt/slideLayouts/slideLayout6.xml><?xml version="1.0" encoding="utf-8"?>
+<file path=ppt/slideLayouts/slideLayout17.xml><?xml version="1.0" encoding="utf-8"?>
 <p:sldLayout xmlns:a="http://schemas.openxmlformats.org/drawingml/2006/main" xmlns:r="http://schemas.openxmlformats.org/officeDocument/2006/relationships" xmlns:p="http://schemas.openxmlformats.org/presentationml/2006/main" type="titleOnly" preserve="1">
   <p:cSld name="Title Only">
     <p:spTree>
@@ -3013,11 +4085,75 @@
           <a:bodyPr/>
           <a:lstStyle/>
           <a:p>
-            <a:fld id="{0499211D-10D7-4F49-ADEF-55BEAD014249}" type="datetimeFigureOut">
-              <a:rPr lang="en-US" smtClean="0"/>
-              <a:t>14/09/2025</a:t>
+            <a:pPr marL="0" marR="0" lvl="0" indent="0" algn="l" defTabSz="914400" rtl="0" eaLnBrk="1" fontAlgn="auto" latinLnBrk="0" hangingPunct="1">
+              <a:lnSpc>
+                <a:spcPct val="100000"/>
+              </a:lnSpc>
+              <a:spcBef>
+                <a:spcPts val="0"/>
+              </a:spcBef>
+              <a:spcAft>
+                <a:spcPts val="0"/>
+              </a:spcAft>
+              <a:buClrTx/>
+              <a:buSzTx/>
+              <a:buFontTx/>
+              <a:buNone/>
+              <a:tabLst/>
+              <a:defRPr/>
+            </a:pPr>
+            <a:fld id="{9285AD09-59D5-478E-BFB4-5748C04604E9}" type="datetimeFigureOut">
+              <a:rPr kumimoji="0" lang="en-US" sz="900" b="0" i="0" u="none" strike="noStrike" kern="1200" cap="none" spc="0" normalizeH="0" baseline="0" noProof="0" smtClean="0">
+                <a:ln>
+                  <a:noFill/>
+                </a:ln>
+                <a:solidFill>
+                  <a:prstClr val="black">
+                    <a:tint val="75000"/>
+                  </a:prstClr>
+                </a:solidFill>
+                <a:effectLst/>
+                <a:uLnTx/>
+                <a:uFillTx/>
+                <a:latin typeface="Calibri" panose="020F0502020204030204"/>
+                <a:ea typeface="+mn-ea"/>
+                <a:cs typeface="+mn-cs"/>
+              </a:rPr>
+              <a:pPr marL="0" marR="0" lvl="0" indent="0" algn="l" defTabSz="914400" rtl="0" eaLnBrk="1" fontAlgn="auto" latinLnBrk="0" hangingPunct="1">
+                <a:lnSpc>
+                  <a:spcPct val="100000"/>
+                </a:lnSpc>
+                <a:spcBef>
+                  <a:spcPts val="0"/>
+                </a:spcBef>
+                <a:spcAft>
+                  <a:spcPts val="0"/>
+                </a:spcAft>
+                <a:buClrTx/>
+                <a:buSzTx/>
+                <a:buFontTx/>
+                <a:buNone/>
+                <a:tabLst/>
+                <a:defRPr/>
+              </a:pPr>
+              <a:t>05/10/2025</a:t>
             </a:fld>
-            <a:endParaRPr lang="en-US"/>
+            <a:endParaRPr kumimoji="0" lang="en-US" sz="900" b="0" i="0" u="none" strike="noStrike" kern="1200" cap="none" spc="0" normalizeH="0" baseline="0" noProof="0">
+              <a:ln>
+                <a:noFill/>
+              </a:ln>
+              <a:solidFill>
+                <a:prstClr val="black">
+                  <a:tint val="75000"/>
+                </a:prstClr>
+              </a:solidFill>
+              <a:effectLst/>
+              <a:uLnTx/>
+              <a:uFillTx/>
+              <a:latin typeface="Calibri" panose="020F0502020204030204"/>
+              <a:ea typeface="+mn-ea"/>
+              <a:cs typeface="+mn-cs"/>
+            </a:endParaRPr>
           </a:p>
         </p:txBody>
       </p:sp>
@@ -3042,7 +4178,39 @@
           <a:bodyPr/>
           <a:lstStyle/>
           <a:p>
-            <a:endParaRPr lang="en-US"/>
+            <a:pPr marL="0" marR="0" lvl="0" indent="0" algn="ctr" defTabSz="914400" rtl="0" eaLnBrk="1" fontAlgn="auto" latinLnBrk="0" hangingPunct="1">
+              <a:lnSpc>
+                <a:spcPct val="100000"/>
+              </a:lnSpc>
+              <a:spcBef>
+                <a:spcPts val="0"/>
+              </a:spcBef>
+              <a:spcAft>
+                <a:spcPts val="0"/>
+              </a:spcAft>
+              <a:buClrTx/>
+              <a:buSzTx/>
+              <a:buFontTx/>
+              <a:buNone/>
+              <a:tabLst/>
+              <a:defRPr/>
+            </a:pPr>
+            <a:endParaRPr kumimoji="0" lang="en-US" sz="900" b="0" i="0" u="none" strike="noStrike" kern="1200" cap="none" spc="0" normalizeH="0" baseline="0" noProof="0">
+              <a:ln>
+                <a:noFill/>
+              </a:ln>
+              <a:solidFill>
+                <a:prstClr val="black">
+                  <a:tint val="75000"/>
+                </a:prstClr>
+              </a:solidFill>
+              <a:effectLst/>
+              <a:uLnTx/>
+              <a:uFillTx/>
+              <a:latin typeface="Calibri" panose="020F0502020204030204"/>
+              <a:ea typeface="+mn-ea"/>
+              <a:cs typeface="+mn-cs"/>
+            </a:endParaRPr>
           </a:p>
         </p:txBody>
       </p:sp>
@@ -3067,18 +4235,82 @@
           <a:bodyPr/>
           <a:lstStyle/>
           <a:p>
-            <a:fld id="{0198E33A-3E23-44AC-B0F1-7EE9715F20F1}" type="slidenum">
-              <a:rPr lang="en-US" smtClean="0"/>
+            <a:pPr marL="0" marR="0" lvl="0" indent="0" algn="r" defTabSz="914400" rtl="0" eaLnBrk="1" fontAlgn="auto" latinLnBrk="0" hangingPunct="1">
+              <a:lnSpc>
+                <a:spcPct val="100000"/>
+              </a:lnSpc>
+              <a:spcBef>
+                <a:spcPts val="0"/>
+              </a:spcBef>
+              <a:spcAft>
+                <a:spcPts val="0"/>
+              </a:spcAft>
+              <a:buClrTx/>
+              <a:buSzTx/>
+              <a:buFontTx/>
+              <a:buNone/>
+              <a:tabLst/>
+              <a:defRPr/>
+            </a:pPr>
+            <a:fld id="{52669F0D-795E-449C-AD68-9797EE4A94EB}" type="slidenum">
+              <a:rPr kumimoji="0" lang="en-US" sz="900" b="0" i="0" u="none" strike="noStrike" kern="1200" cap="none" spc="0" normalizeH="0" baseline="0" noProof="0" smtClean="0">
+                <a:ln>
+                  <a:noFill/>
+                </a:ln>
+                <a:solidFill>
+                  <a:prstClr val="black">
+                    <a:tint val="75000"/>
+                  </a:prstClr>
+                </a:solidFill>
+                <a:effectLst/>
+                <a:uLnTx/>
+                <a:uFillTx/>
+                <a:latin typeface="Calibri" panose="020F0502020204030204"/>
+                <a:ea typeface="+mn-ea"/>
+                <a:cs typeface="+mn-cs"/>
+              </a:rPr>
+              <a:pPr marL="0" marR="0" lvl="0" indent="0" algn="r" defTabSz="914400" rtl="0" eaLnBrk="1" fontAlgn="auto" latinLnBrk="0" hangingPunct="1">
+                <a:lnSpc>
+                  <a:spcPct val="100000"/>
+                </a:lnSpc>
+                <a:spcBef>
+                  <a:spcPts val="0"/>
+                </a:spcBef>
+                <a:spcAft>
+                  <a:spcPts val="0"/>
+                </a:spcAft>
+                <a:buClrTx/>
+                <a:buSzTx/>
+                <a:buFontTx/>
+                <a:buNone/>
+                <a:tabLst/>
+                <a:defRPr/>
+              </a:pPr>
               <a:t>‹#›</a:t>
             </a:fld>
-            <a:endParaRPr lang="en-US"/>
+            <a:endParaRPr kumimoji="0" lang="en-US" sz="900" b="0" i="0" u="none" strike="noStrike" kern="1200" cap="none" spc="0" normalizeH="0" baseline="0" noProof="0">
+              <a:ln>
+                <a:noFill/>
+              </a:ln>
+              <a:solidFill>
+                <a:prstClr val="black">
+                  <a:tint val="75000"/>
+                </a:prstClr>
+              </a:solidFill>
+              <a:effectLst/>
+              <a:uLnTx/>
+              <a:uFillTx/>
+              <a:latin typeface="Calibri" panose="020F0502020204030204"/>
+              <a:ea typeface="+mn-ea"/>
+              <a:cs typeface="+mn-cs"/>
+            </a:endParaRPr>
           </a:p>
         </p:txBody>
       </p:sp>
     </p:spTree>
     <p:extLst>
       <p:ext uri="{BB962C8B-B14F-4D97-AF65-F5344CB8AC3E}">
-        <p14:creationId xmlns:p14="http://schemas.microsoft.com/office/powerpoint/2010/main" val="315922146"/>
+        <p14:creationId xmlns:p14="http://schemas.microsoft.com/office/powerpoint/2010/main" val="1975755022"/>
       </p:ext>
     </p:extLst>
   </p:cSld>
@@ -3088,7 +4320,7 @@
 </p:sldLayout>
 </file>
 
-<file path=ppt/slideLayouts/slideLayout7.xml><?xml version="1.0" encoding="utf-8"?>
+<file path=ppt/slideLayouts/slideLayout18.xml><?xml version="1.0" encoding="utf-8"?>
 <p:sldLayout xmlns:a="http://schemas.openxmlformats.org/drawingml/2006/main" xmlns:r="http://schemas.openxmlformats.org/officeDocument/2006/relationships" xmlns:p="http://schemas.openxmlformats.org/presentationml/2006/main" type="blank" preserve="1">
   <p:cSld name="Blank">
     <p:spTree>
@@ -3126,11 +4358,75 @@
           <a:bodyPr/>
           <a:lstStyle/>
           <a:p>
-            <a:fld id="{0499211D-10D7-4F49-ADEF-55BEAD014249}" type="datetimeFigureOut">
-              <a:rPr lang="en-US" smtClean="0"/>
-              <a:t>14/09/2025</a:t>
+            <a:pPr marL="0" marR="0" lvl="0" indent="0" algn="l" defTabSz="914400" rtl="0" eaLnBrk="1" fontAlgn="auto" latinLnBrk="0" hangingPunct="1">
+              <a:lnSpc>
+                <a:spcPct val="100000"/>
+              </a:lnSpc>
+              <a:spcBef>
+                <a:spcPts val="0"/>
+              </a:spcBef>
+              <a:spcAft>
+                <a:spcPts val="0"/>
+              </a:spcAft>
+              <a:buClrTx/>
+              <a:buSzTx/>
+              <a:buFontTx/>
+              <a:buNone/>
+              <a:tabLst/>
+              <a:defRPr/>
+            </a:pPr>
+            <a:fld id="{9285AD09-59D5-478E-BFB4-5748C04604E9}" type="datetimeFigureOut">
+              <a:rPr kumimoji="0" lang="en-US" sz="900" b="0" i="0" u="none" strike="noStrike" kern="1200" cap="none" spc="0" normalizeH="0" baseline="0" noProof="0" smtClean="0">
+                <a:ln>
+                  <a:noFill/>
+                </a:ln>
+                <a:solidFill>
+                  <a:prstClr val="black">
+                    <a:tint val="75000"/>
+                  </a:prstClr>
+                </a:solidFill>
+                <a:effectLst/>
+                <a:uLnTx/>
+                <a:uFillTx/>
+                <a:latin typeface="Calibri" panose="020F0502020204030204"/>
+                <a:ea typeface="+mn-ea"/>
+                <a:cs typeface="+mn-cs"/>
+              </a:rPr>
+              <a:pPr marL="0" marR="0" lvl="0" indent="0" algn="l" defTabSz="914400" rtl="0" eaLnBrk="1" fontAlgn="auto" latinLnBrk="0" hangingPunct="1">
+                <a:lnSpc>
+                  <a:spcPct val="100000"/>
+                </a:lnSpc>
+                <a:spcBef>
+                  <a:spcPts val="0"/>
+                </a:spcBef>
+                <a:spcAft>
+                  <a:spcPts val="0"/>
+                </a:spcAft>
+                <a:buClrTx/>
+                <a:buSzTx/>
+                <a:buFontTx/>
+                <a:buNone/>
+                <a:tabLst/>
+                <a:defRPr/>
+              </a:pPr>
+              <a:t>05/10/2025</a:t>
             </a:fld>
-            <a:endParaRPr lang="en-US"/>
+            <a:endParaRPr kumimoji="0" lang="en-US" sz="900" b="0" i="0" u="none" strike="noStrike" kern="1200" cap="none" spc="0" normalizeH="0" baseline="0" noProof="0">
+              <a:ln>
+                <a:noFill/>
+              </a:ln>
+              <a:solidFill>
+                <a:prstClr val="black">
+                  <a:tint val="75000"/>
+                </a:prstClr>
+              </a:solidFill>
+              <a:effectLst/>
+              <a:uLnTx/>
+              <a:uFillTx/>
+              <a:latin typeface="Calibri" panose="020F0502020204030204"/>
+              <a:ea typeface="+mn-ea"/>
+              <a:cs typeface="+mn-cs"/>
+            </a:endParaRPr>
           </a:p>
         </p:txBody>
       </p:sp>
@@ -3155,7 +4451,39 @@
           <a:bodyPr/>
           <a:lstStyle/>
           <a:p>
-            <a:endParaRPr lang="en-US"/>
+            <a:pPr marL="0" marR="0" lvl="0" indent="0" algn="ctr" defTabSz="914400" rtl="0" eaLnBrk="1" fontAlgn="auto" latinLnBrk="0" hangingPunct="1">
+              <a:lnSpc>
+                <a:spcPct val="100000"/>
+              </a:lnSpc>
+              <a:spcBef>
+                <a:spcPts val="0"/>
+              </a:spcBef>
+              <a:spcAft>
+                <a:spcPts val="0"/>
+              </a:spcAft>
+              <a:buClrTx/>
+              <a:buSzTx/>
+              <a:buFontTx/>
+              <a:buNone/>
+              <a:tabLst/>
+              <a:defRPr/>
+            </a:pPr>
+            <a:endParaRPr kumimoji="0" lang="en-US" sz="900" b="0" i="0" u="none" strike="noStrike" kern="1200" cap="none" spc="0" normalizeH="0" baseline="0" noProof="0">
+              <a:ln>
+                <a:noFill/>
+              </a:ln>
+              <a:solidFill>
+                <a:prstClr val="black">
+                  <a:tint val="75000"/>
+                </a:prstClr>
+              </a:solidFill>
+              <a:effectLst/>
+              <a:uLnTx/>
+              <a:uFillTx/>
+              <a:latin typeface="Calibri" panose="020F0502020204030204"/>
+              <a:ea typeface="+mn-ea"/>
+              <a:cs typeface="+mn-cs"/>
+            </a:endParaRPr>
           </a:p>
         </p:txBody>
       </p:sp>
@@ -3180,18 +4508,82 @@
           <a:bodyPr/>
           <a:lstStyle/>
           <a:p>
-            <a:fld id="{0198E33A-3E23-44AC-B0F1-7EE9715F20F1}" type="slidenum">
-              <a:rPr lang="en-US" smtClean="0"/>
+            <a:pPr marL="0" marR="0" lvl="0" indent="0" algn="r" defTabSz="914400" rtl="0" eaLnBrk="1" fontAlgn="auto" latinLnBrk="0" hangingPunct="1">
+              <a:lnSpc>
+                <a:spcPct val="100000"/>
+              </a:lnSpc>
+              <a:spcBef>
+                <a:spcPts val="0"/>
+              </a:spcBef>
+              <a:spcAft>
+                <a:spcPts val="0"/>
+              </a:spcAft>
+              <a:buClrTx/>
+              <a:buSzTx/>
+              <a:buFontTx/>
+              <a:buNone/>
+              <a:tabLst/>
+              <a:defRPr/>
+            </a:pPr>
+            <a:fld id="{52669F0D-795E-449C-AD68-9797EE4A94EB}" type="slidenum">
+              <a:rPr kumimoji="0" lang="en-US" sz="900" b="0" i="0" u="none" strike="noStrike" kern="1200" cap="none" spc="0" normalizeH="0" baseline="0" noProof="0" smtClean="0">
+                <a:ln>
+                  <a:noFill/>
+                </a:ln>
+                <a:solidFill>
+                  <a:prstClr val="black">
+                    <a:tint val="75000"/>
+                  </a:prstClr>
+                </a:solidFill>
+                <a:effectLst/>
+                <a:uLnTx/>
+                <a:uFillTx/>
+                <a:latin typeface="Calibri" panose="020F0502020204030204"/>
+                <a:ea typeface="+mn-ea"/>
+                <a:cs typeface="+mn-cs"/>
+              </a:rPr>
+              <a:pPr marL="0" marR="0" lvl="0" indent="0" algn="r" defTabSz="914400" rtl="0" eaLnBrk="1" fontAlgn="auto" latinLnBrk="0" hangingPunct="1">
+                <a:lnSpc>
+                  <a:spcPct val="100000"/>
+                </a:lnSpc>
+                <a:spcBef>
+                  <a:spcPts val="0"/>
+                </a:spcBef>
+                <a:spcAft>
+                  <a:spcPts val="0"/>
+                </a:spcAft>
+                <a:buClrTx/>
+                <a:buSzTx/>
+                <a:buFontTx/>
+                <a:buNone/>
+                <a:tabLst/>
+                <a:defRPr/>
+              </a:pPr>
               <a:t>‹#›</a:t>
             </a:fld>
-            <a:endParaRPr lang="en-US"/>
+            <a:endParaRPr kumimoji="0" lang="en-US" sz="900" b="0" i="0" u="none" strike="noStrike" kern="1200" cap="none" spc="0" normalizeH="0" baseline="0" noProof="0">
+              <a:ln>
+                <a:noFill/>
+              </a:ln>
+              <a:solidFill>
+                <a:prstClr val="black">
+                  <a:tint val="75000"/>
+                </a:prstClr>
+              </a:solidFill>
+              <a:effectLst/>
+              <a:uLnTx/>
+              <a:uFillTx/>
+              <a:latin typeface="Calibri" panose="020F0502020204030204"/>
+              <a:ea typeface="+mn-ea"/>
+              <a:cs typeface="+mn-cs"/>
+            </a:endParaRPr>
           </a:p>
         </p:txBody>
       </p:sp>
     </p:spTree>
     <p:extLst>
       <p:ext uri="{BB962C8B-B14F-4D97-AF65-F5344CB8AC3E}">
-        <p14:creationId xmlns:p14="http://schemas.microsoft.com/office/powerpoint/2010/main" val="2128707154"/>
+        <p14:creationId xmlns:p14="http://schemas.microsoft.com/office/powerpoint/2010/main" val="2580671996"/>
       </p:ext>
     </p:extLst>
   </p:cSld>
@@ -3201,7 +4593,7 @@
 </p:sldLayout>
 </file>
 
-<file path=ppt/slideLayouts/slideLayout8.xml><?xml version="1.0" encoding="utf-8"?>
+<file path=ppt/slideLayouts/slideLayout19.xml><?xml version="1.0" encoding="utf-8"?>
 <p:sldLayout xmlns:a="http://schemas.openxmlformats.org/drawingml/2006/main" xmlns:r="http://schemas.openxmlformats.org/officeDocument/2006/relationships" xmlns:p="http://schemas.openxmlformats.org/presentationml/2006/main" type="objTx" preserve="1">
   <p:cSld name="Content with Caption">
     <p:spTree>
@@ -3437,11 +4829,75 @@
           <a:bodyPr/>
           <a:lstStyle/>
           <a:p>
-            <a:fld id="{0499211D-10D7-4F49-ADEF-55BEAD014249}" type="datetimeFigureOut">
-              <a:rPr lang="en-US" smtClean="0"/>
-              <a:t>14/09/2025</a:t>
+            <a:pPr marL="0" marR="0" lvl="0" indent="0" algn="l" defTabSz="914400" rtl="0" eaLnBrk="1" fontAlgn="auto" latinLnBrk="0" hangingPunct="1">
+              <a:lnSpc>
+                <a:spcPct val="100000"/>
+              </a:lnSpc>
+              <a:spcBef>
+                <a:spcPts val="0"/>
+              </a:spcBef>
+              <a:spcAft>
+                <a:spcPts val="0"/>
+              </a:spcAft>
+              <a:buClrTx/>
+              <a:buSzTx/>
+              <a:buFontTx/>
+              <a:buNone/>
+              <a:tabLst/>
+              <a:defRPr/>
+            </a:pPr>
+            <a:fld id="{9285AD09-59D5-478E-BFB4-5748C04604E9}" type="datetimeFigureOut">
+              <a:rPr kumimoji="0" lang="en-US" sz="900" b="0" i="0" u="none" strike="noStrike" kern="1200" cap="none" spc="0" normalizeH="0" baseline="0" noProof="0" smtClean="0">
+                <a:ln>
+                  <a:noFill/>
+                </a:ln>
+                <a:solidFill>
+                  <a:prstClr val="black">
+                    <a:tint val="75000"/>
+                  </a:prstClr>
+                </a:solidFill>
+                <a:effectLst/>
+                <a:uLnTx/>
+                <a:uFillTx/>
+                <a:latin typeface="Calibri" panose="020F0502020204030204"/>
+                <a:ea typeface="+mn-ea"/>
+                <a:cs typeface="+mn-cs"/>
+              </a:rPr>
+              <a:pPr marL="0" marR="0" lvl="0" indent="0" algn="l" defTabSz="914400" rtl="0" eaLnBrk="1" fontAlgn="auto" latinLnBrk="0" hangingPunct="1">
+                <a:lnSpc>
+                  <a:spcPct val="100000"/>
+                </a:lnSpc>
+                <a:spcBef>
+                  <a:spcPts val="0"/>
+                </a:spcBef>
+                <a:spcAft>
+                  <a:spcPts val="0"/>
+                </a:spcAft>
+                <a:buClrTx/>
+                <a:buSzTx/>
+                <a:buFontTx/>
+                <a:buNone/>
+                <a:tabLst/>
+                <a:defRPr/>
+              </a:pPr>
+              <a:t>05/10/2025</a:t>
             </a:fld>
-            <a:endParaRPr lang="en-US"/>
+            <a:endParaRPr kumimoji="0" lang="en-US" sz="900" b="0" i="0" u="none" strike="noStrike" kern="1200" cap="none" spc="0" normalizeH="0" baseline="0" noProof="0">
+              <a:ln>
+                <a:noFill/>
+              </a:ln>
+              <a:solidFill>
+                <a:prstClr val="black">
+                  <a:tint val="75000"/>
+                </a:prstClr>
+              </a:solidFill>
+              <a:effectLst/>
+              <a:uLnTx/>
+              <a:uFillTx/>
+              <a:latin typeface="Calibri" panose="020F0502020204030204"/>
+              <a:ea typeface="+mn-ea"/>
+              <a:cs typeface="+mn-cs"/>
+            </a:endParaRPr>
           </a:p>
         </p:txBody>
       </p:sp>
@@ -3466,7 +4922,39 @@
           <a:bodyPr/>
           <a:lstStyle/>
           <a:p>
-            <a:endParaRPr lang="en-US"/>
+            <a:pPr marL="0" marR="0" lvl="0" indent="0" algn="ctr" defTabSz="914400" rtl="0" eaLnBrk="1" fontAlgn="auto" latinLnBrk="0" hangingPunct="1">
+              <a:lnSpc>
+                <a:spcPct val="100000"/>
+              </a:lnSpc>
+              <a:spcBef>
+                <a:spcPts val="0"/>
+              </a:spcBef>
+              <a:spcAft>
+                <a:spcPts val="0"/>
+              </a:spcAft>
+              <a:buClrTx/>
+              <a:buSzTx/>
+              <a:buFontTx/>
+              <a:buNone/>
+              <a:tabLst/>
+              <a:defRPr/>
+            </a:pPr>
+            <a:endParaRPr kumimoji="0" lang="en-US" sz="900" b="0" i="0" u="none" strike="noStrike" kern="1200" cap="none" spc="0" normalizeH="0" baseline="0" noProof="0">
+              <a:ln>
+                <a:noFill/>
+              </a:ln>
+              <a:solidFill>
+                <a:prstClr val="black">
+                  <a:tint val="75000"/>
+                </a:prstClr>
+              </a:solidFill>
+              <a:effectLst/>
+              <a:uLnTx/>
+              <a:uFillTx/>
+              <a:latin typeface="Calibri" panose="020F0502020204030204"/>
+              <a:ea typeface="+mn-ea"/>
+              <a:cs typeface="+mn-cs"/>
+            </a:endParaRPr>
           </a:p>
         </p:txBody>
       </p:sp>
@@ -3491,18 +4979,3074 @@
           <a:bodyPr/>
           <a:lstStyle/>
           <a:p>
-            <a:fld id="{0198E33A-3E23-44AC-B0F1-7EE9715F20F1}" type="slidenum">
-              <a:rPr lang="en-US" smtClean="0"/>
+            <a:pPr marL="0" marR="0" lvl="0" indent="0" algn="r" defTabSz="914400" rtl="0" eaLnBrk="1" fontAlgn="auto" latinLnBrk="0" hangingPunct="1">
+              <a:lnSpc>
+                <a:spcPct val="100000"/>
+              </a:lnSpc>
+              <a:spcBef>
+                <a:spcPts val="0"/>
+              </a:spcBef>
+              <a:spcAft>
+                <a:spcPts val="0"/>
+              </a:spcAft>
+              <a:buClrTx/>
+              <a:buSzTx/>
+              <a:buFontTx/>
+              <a:buNone/>
+              <a:tabLst/>
+              <a:defRPr/>
+            </a:pPr>
+            <a:fld id="{52669F0D-795E-449C-AD68-9797EE4A94EB}" type="slidenum">
+              <a:rPr kumimoji="0" lang="en-US" sz="900" b="0" i="0" u="none" strike="noStrike" kern="1200" cap="none" spc="0" normalizeH="0" baseline="0" noProof="0" smtClean="0">
+                <a:ln>
+                  <a:noFill/>
+                </a:ln>
+                <a:solidFill>
+                  <a:prstClr val="black">
+                    <a:tint val="75000"/>
+                  </a:prstClr>
+                </a:solidFill>
+                <a:effectLst/>
+                <a:uLnTx/>
+                <a:uFillTx/>
+                <a:latin typeface="Calibri" panose="020F0502020204030204"/>
+                <a:ea typeface="+mn-ea"/>
+                <a:cs typeface="+mn-cs"/>
+              </a:rPr>
+              <a:pPr marL="0" marR="0" lvl="0" indent="0" algn="r" defTabSz="914400" rtl="0" eaLnBrk="1" fontAlgn="auto" latinLnBrk="0" hangingPunct="1">
+                <a:lnSpc>
+                  <a:spcPct val="100000"/>
+                </a:lnSpc>
+                <a:spcBef>
+                  <a:spcPts val="0"/>
+                </a:spcBef>
+                <a:spcAft>
+                  <a:spcPts val="0"/>
+                </a:spcAft>
+                <a:buClrTx/>
+                <a:buSzTx/>
+                <a:buFontTx/>
+                <a:buNone/>
+                <a:tabLst/>
+                <a:defRPr/>
+              </a:pPr>
               <a:t>‹#›</a:t>
             </a:fld>
-            <a:endParaRPr lang="en-US"/>
+            <a:endParaRPr kumimoji="0" lang="en-US" sz="900" b="0" i="0" u="none" strike="noStrike" kern="1200" cap="none" spc="0" normalizeH="0" baseline="0" noProof="0">
+              <a:ln>
+                <a:noFill/>
+              </a:ln>
+              <a:solidFill>
+                <a:prstClr val="black">
+                  <a:tint val="75000"/>
+                </a:prstClr>
+              </a:solidFill>
+              <a:effectLst/>
+              <a:uLnTx/>
+              <a:uFillTx/>
+              <a:latin typeface="Calibri" panose="020F0502020204030204"/>
+              <a:ea typeface="+mn-ea"/>
+              <a:cs typeface="+mn-cs"/>
+            </a:endParaRPr>
           </a:p>
         </p:txBody>
       </p:sp>
     </p:spTree>
     <p:extLst>
       <p:ext uri="{BB962C8B-B14F-4D97-AF65-F5344CB8AC3E}">
-        <p14:creationId xmlns:p14="http://schemas.microsoft.com/office/powerpoint/2010/main" val="317297203"/>
+        <p14:creationId xmlns:p14="http://schemas.microsoft.com/office/powerpoint/2010/main" val="2514777548"/>
+      </p:ext>
+    </p:extLst>
+  </p:cSld>
+  <p:clrMapOvr>
+    <a:masterClrMapping/>
+  </p:clrMapOvr>
+</p:sldLayout>
+</file>
+
+<file path=ppt/slideLayouts/slideLayout2.xml><?xml version="1.0" encoding="utf-8"?>
+<p:sldLayout xmlns:a="http://schemas.openxmlformats.org/drawingml/2006/main" xmlns:r="http://schemas.openxmlformats.org/officeDocument/2006/relationships" xmlns:p="http://schemas.openxmlformats.org/presentationml/2006/main" type="obj" preserve="1">
+  <p:cSld name="Title and Content">
+    <p:spTree>
+      <p:nvGrpSpPr>
+        <p:cNvPr id="1" name=""/>
+        <p:cNvGrpSpPr/>
+        <p:nvPr/>
+      </p:nvGrpSpPr>
+      <p:grpSpPr>
+        <a:xfrm>
+          <a:off x="0" y="0"/>
+          <a:ext cx="0" cy="0"/>
+          <a:chOff x="0" y="0"/>
+          <a:chExt cx="0" cy="0"/>
+        </a:xfrm>
+      </p:grpSpPr>
+      <p:sp>
+        <p:nvSpPr>
+          <p:cNvPr id="2" name="Title 1"/>
+          <p:cNvSpPr>
+            <a:spLocks noGrp="1"/>
+          </p:cNvSpPr>
+          <p:nvPr>
+            <p:ph type="title"/>
+          </p:nvPr>
+        </p:nvSpPr>
+        <p:spPr/>
+        <p:txBody>
+          <a:bodyPr/>
+          <a:lstStyle/>
+          <a:p>
+            <a:r>
+              <a:rPr lang="en-US" smtClean="0"/>
+              <a:t>Click to edit Master title style</a:t>
+            </a:r>
+            <a:endParaRPr lang="en-US" dirty="0"/>
+          </a:p>
+        </p:txBody>
+      </p:sp>
+      <p:sp>
+        <p:nvSpPr>
+          <p:cNvPr id="3" name="Content Placeholder 2"/>
+          <p:cNvSpPr>
+            <a:spLocks noGrp="1"/>
+          </p:cNvSpPr>
+          <p:nvPr>
+            <p:ph idx="1"/>
+          </p:nvPr>
+        </p:nvSpPr>
+        <p:spPr/>
+        <p:txBody>
+          <a:bodyPr/>
+          <a:lstStyle/>
+          <a:p>
+            <a:pPr lvl="0"/>
+            <a:r>
+              <a:rPr lang="en-US" smtClean="0"/>
+              <a:t>Edit Master text styles</a:t>
+            </a:r>
+          </a:p>
+          <a:p>
+            <a:pPr lvl="1"/>
+            <a:r>
+              <a:rPr lang="en-US" smtClean="0"/>
+              <a:t>Second level</a:t>
+            </a:r>
+          </a:p>
+          <a:p>
+            <a:pPr lvl="2"/>
+            <a:r>
+              <a:rPr lang="en-US" smtClean="0"/>
+              <a:t>Third level</a:t>
+            </a:r>
+          </a:p>
+          <a:p>
+            <a:pPr lvl="3"/>
+            <a:r>
+              <a:rPr lang="en-US" smtClean="0"/>
+              <a:t>Fourth level</a:t>
+            </a:r>
+          </a:p>
+          <a:p>
+            <a:pPr lvl="4"/>
+            <a:r>
+              <a:rPr lang="en-US" smtClean="0"/>
+              <a:t>Fifth level</a:t>
+            </a:r>
+            <a:endParaRPr lang="en-US" dirty="0"/>
+          </a:p>
+        </p:txBody>
+      </p:sp>
+      <p:sp>
+        <p:nvSpPr>
+          <p:cNvPr id="4" name="Date Placeholder 3"/>
+          <p:cNvSpPr>
+            <a:spLocks noGrp="1"/>
+          </p:cNvSpPr>
+          <p:nvPr>
+            <p:ph type="dt" sz="half" idx="10"/>
+          </p:nvPr>
+        </p:nvSpPr>
+        <p:spPr/>
+        <p:txBody>
+          <a:bodyPr/>
+          <a:lstStyle/>
+          <a:p>
+            <a:pPr>
+              <a:defRPr/>
+            </a:pPr>
+            <a:fld id="{9285AD09-59D5-478E-BFB4-5748C04604E9}" type="datetimeFigureOut">
+              <a:rPr lang="en-US" smtClean="0">
+                <a:solidFill>
+                  <a:prstClr val="black">
+                    <a:tint val="75000"/>
+                  </a:prstClr>
+                </a:solidFill>
+              </a:rPr>
+              <a:pPr>
+                <a:defRPr/>
+              </a:pPr>
+              <a:t>05/10/2025</a:t>
+            </a:fld>
+            <a:endParaRPr lang="en-US">
+              <a:solidFill>
+                <a:prstClr val="black">
+                  <a:tint val="75000"/>
+                </a:prstClr>
+              </a:solidFill>
+            </a:endParaRPr>
+          </a:p>
+        </p:txBody>
+      </p:sp>
+      <p:sp>
+        <p:nvSpPr>
+          <p:cNvPr id="5" name="Footer Placeholder 4"/>
+          <p:cNvSpPr>
+            <a:spLocks noGrp="1"/>
+          </p:cNvSpPr>
+          <p:nvPr>
+            <p:ph type="ftr" sz="quarter" idx="11"/>
+          </p:nvPr>
+        </p:nvSpPr>
+        <p:spPr/>
+        <p:txBody>
+          <a:bodyPr/>
+          <a:lstStyle/>
+          <a:p>
+            <a:pPr>
+              <a:defRPr/>
+            </a:pPr>
+            <a:endParaRPr lang="en-US">
+              <a:solidFill>
+                <a:prstClr val="black">
+                  <a:tint val="75000"/>
+                </a:prstClr>
+              </a:solidFill>
+            </a:endParaRPr>
+          </a:p>
+        </p:txBody>
+      </p:sp>
+      <p:sp>
+        <p:nvSpPr>
+          <p:cNvPr id="6" name="Slide Number Placeholder 5"/>
+          <p:cNvSpPr>
+            <a:spLocks noGrp="1"/>
+          </p:cNvSpPr>
+          <p:nvPr>
+            <p:ph type="sldNum" sz="quarter" idx="12"/>
+          </p:nvPr>
+        </p:nvSpPr>
+        <p:spPr/>
+        <p:txBody>
+          <a:bodyPr/>
+          <a:lstStyle/>
+          <a:p>
+            <a:pPr>
+              <a:defRPr/>
+            </a:pPr>
+            <a:fld id="{52669F0D-795E-449C-AD68-9797EE4A94EB}" type="slidenum">
+              <a:rPr lang="en-US" smtClean="0">
+                <a:solidFill>
+                  <a:prstClr val="black">
+                    <a:tint val="75000"/>
+                  </a:prstClr>
+                </a:solidFill>
+              </a:rPr>
+              <a:pPr>
+                <a:defRPr/>
+              </a:pPr>
+              <a:t>‹#›</a:t>
+            </a:fld>
+            <a:endParaRPr lang="en-US">
+              <a:solidFill>
+                <a:prstClr val="black">
+                  <a:tint val="75000"/>
+                </a:prstClr>
+              </a:solidFill>
+            </a:endParaRPr>
+          </a:p>
+        </p:txBody>
+      </p:sp>
+    </p:spTree>
+    <p:extLst>
+      <p:ext uri="{BB962C8B-B14F-4D97-AF65-F5344CB8AC3E}">
+        <p14:creationId xmlns:p14="http://schemas.microsoft.com/office/powerpoint/2010/main" val="2534872376"/>
+      </p:ext>
+    </p:extLst>
+  </p:cSld>
+  <p:clrMapOvr>
+    <a:masterClrMapping/>
+  </p:clrMapOvr>
+</p:sldLayout>
+</file>
+
+<file path=ppt/slideLayouts/slideLayout20.xml><?xml version="1.0" encoding="utf-8"?>
+<p:sldLayout xmlns:a="http://schemas.openxmlformats.org/drawingml/2006/main" xmlns:r="http://schemas.openxmlformats.org/officeDocument/2006/relationships" xmlns:p="http://schemas.openxmlformats.org/presentationml/2006/main" type="picTx" preserve="1">
+  <p:cSld name="Picture with Caption">
+    <p:spTree>
+      <p:nvGrpSpPr>
+        <p:cNvPr id="1" name=""/>
+        <p:cNvGrpSpPr/>
+        <p:nvPr/>
+      </p:nvGrpSpPr>
+      <p:grpSpPr>
+        <a:xfrm>
+          <a:off x="0" y="0"/>
+          <a:ext cx="0" cy="0"/>
+          <a:chOff x="0" y="0"/>
+          <a:chExt cx="0" cy="0"/>
+        </a:xfrm>
+      </p:grpSpPr>
+      <p:sp>
+        <p:nvSpPr>
+          <p:cNvPr id="2" name="Title 1">
+            <a:extLst>
+              <a:ext uri="{FF2B5EF4-FFF2-40B4-BE49-F238E27FC236}">
+                <a16:creationId xmlns:a16="http://schemas.microsoft.com/office/drawing/2014/main" id="{4D13B8BD-CB71-4064-8317-18A73848517A}"/>
+              </a:ext>
+            </a:extLst>
+          </p:cNvPr>
+          <p:cNvSpPr>
+            <a:spLocks noGrp="1"/>
+          </p:cNvSpPr>
+          <p:nvPr>
+            <p:ph type="title"/>
+          </p:nvPr>
+        </p:nvSpPr>
+        <p:spPr>
+          <a:xfrm>
+            <a:off x="629841" y="457200"/>
+            <a:ext cx="2949178" cy="1600200"/>
+          </a:xfrm>
+        </p:spPr>
+        <p:txBody>
+          <a:bodyPr anchor="b"/>
+          <a:lstStyle>
+            <a:lvl1pPr>
+              <a:defRPr sz="2400"/>
+            </a:lvl1pPr>
+          </a:lstStyle>
+          <a:p>
+            <a:r>
+              <a:rPr lang="en-US"/>
+              <a:t>Click to edit Master title style</a:t>
+            </a:r>
+          </a:p>
+        </p:txBody>
+      </p:sp>
+      <p:sp>
+        <p:nvSpPr>
+          <p:cNvPr id="3" name="Picture Placeholder 2">
+            <a:extLst>
+              <a:ext uri="{FF2B5EF4-FFF2-40B4-BE49-F238E27FC236}">
+                <a16:creationId xmlns:a16="http://schemas.microsoft.com/office/drawing/2014/main" id="{11939EA6-C663-4398-BA37-245E170ABA84}"/>
+              </a:ext>
+            </a:extLst>
+          </p:cNvPr>
+          <p:cNvSpPr>
+            <a:spLocks noGrp="1"/>
+          </p:cNvSpPr>
+          <p:nvPr>
+            <p:ph type="pic" idx="1"/>
+          </p:nvPr>
+        </p:nvSpPr>
+        <p:spPr>
+          <a:xfrm>
+            <a:off x="3887391" y="987428"/>
+            <a:ext cx="4629150" cy="4873625"/>
+          </a:xfrm>
+        </p:spPr>
+        <p:txBody>
+          <a:bodyPr/>
+          <a:lstStyle>
+            <a:lvl1pPr marL="0" indent="0">
+              <a:buNone/>
+              <a:defRPr sz="2400"/>
+            </a:lvl1pPr>
+            <a:lvl2pPr marL="342900" indent="0">
+              <a:buNone/>
+              <a:defRPr sz="2100"/>
+            </a:lvl2pPr>
+            <a:lvl3pPr marL="685800" indent="0">
+              <a:buNone/>
+              <a:defRPr sz="1800"/>
+            </a:lvl3pPr>
+            <a:lvl4pPr marL="1028700" indent="0">
+              <a:buNone/>
+              <a:defRPr sz="1500"/>
+            </a:lvl4pPr>
+            <a:lvl5pPr marL="1371600" indent="0">
+              <a:buNone/>
+              <a:defRPr sz="1500"/>
+            </a:lvl5pPr>
+            <a:lvl6pPr marL="1714500" indent="0">
+              <a:buNone/>
+              <a:defRPr sz="1500"/>
+            </a:lvl6pPr>
+            <a:lvl7pPr marL="2057400" indent="0">
+              <a:buNone/>
+              <a:defRPr sz="1500"/>
+            </a:lvl7pPr>
+            <a:lvl8pPr marL="2400300" indent="0">
+              <a:buNone/>
+              <a:defRPr sz="1500"/>
+            </a:lvl8pPr>
+            <a:lvl9pPr marL="2743200" indent="0">
+              <a:buNone/>
+              <a:defRPr sz="1500"/>
+            </a:lvl9pPr>
+          </a:lstStyle>
+          <a:p>
+            <a:endParaRPr lang="en-US"/>
+          </a:p>
+        </p:txBody>
+      </p:sp>
+      <p:sp>
+        <p:nvSpPr>
+          <p:cNvPr id="4" name="Text Placeholder 3">
+            <a:extLst>
+              <a:ext uri="{FF2B5EF4-FFF2-40B4-BE49-F238E27FC236}">
+                <a16:creationId xmlns:a16="http://schemas.microsoft.com/office/drawing/2014/main" id="{AB73E8CA-4CEF-444A-88A4-6CB73729D6A5}"/>
+              </a:ext>
+            </a:extLst>
+          </p:cNvPr>
+          <p:cNvSpPr>
+            <a:spLocks noGrp="1"/>
+          </p:cNvSpPr>
+          <p:nvPr>
+            <p:ph type="body" sz="half" idx="2"/>
+          </p:nvPr>
+        </p:nvSpPr>
+        <p:spPr>
+          <a:xfrm>
+            <a:off x="629841" y="2057400"/>
+            <a:ext cx="2949178" cy="3811588"/>
+          </a:xfrm>
+        </p:spPr>
+        <p:txBody>
+          <a:bodyPr/>
+          <a:lstStyle>
+            <a:lvl1pPr marL="0" indent="0">
+              <a:buNone/>
+              <a:defRPr sz="1200"/>
+            </a:lvl1pPr>
+            <a:lvl2pPr marL="342900" indent="0">
+              <a:buNone/>
+              <a:defRPr sz="1050"/>
+            </a:lvl2pPr>
+            <a:lvl3pPr marL="685800" indent="0">
+              <a:buNone/>
+              <a:defRPr sz="900"/>
+            </a:lvl3pPr>
+            <a:lvl4pPr marL="1028700" indent="0">
+              <a:buNone/>
+              <a:defRPr sz="750"/>
+            </a:lvl4pPr>
+            <a:lvl5pPr marL="1371600" indent="0">
+              <a:buNone/>
+              <a:defRPr sz="750"/>
+            </a:lvl5pPr>
+            <a:lvl6pPr marL="1714500" indent="0">
+              <a:buNone/>
+              <a:defRPr sz="750"/>
+            </a:lvl6pPr>
+            <a:lvl7pPr marL="2057400" indent="0">
+              <a:buNone/>
+              <a:defRPr sz="750"/>
+            </a:lvl7pPr>
+            <a:lvl8pPr marL="2400300" indent="0">
+              <a:buNone/>
+              <a:defRPr sz="750"/>
+            </a:lvl8pPr>
+            <a:lvl9pPr marL="2743200" indent="0">
+              <a:buNone/>
+              <a:defRPr sz="750"/>
+            </a:lvl9pPr>
+          </a:lstStyle>
+          <a:p>
+            <a:pPr lvl="0"/>
+            <a:r>
+              <a:rPr lang="en-US"/>
+              <a:t>Edit Master text styles</a:t>
+            </a:r>
+          </a:p>
+        </p:txBody>
+      </p:sp>
+      <p:sp>
+        <p:nvSpPr>
+          <p:cNvPr id="5" name="Date Placeholder 4">
+            <a:extLst>
+              <a:ext uri="{FF2B5EF4-FFF2-40B4-BE49-F238E27FC236}">
+                <a16:creationId xmlns:a16="http://schemas.microsoft.com/office/drawing/2014/main" id="{38F389F6-D8A5-4F55-B4FA-15D60C2C6663}"/>
+              </a:ext>
+            </a:extLst>
+          </p:cNvPr>
+          <p:cNvSpPr>
+            <a:spLocks noGrp="1"/>
+          </p:cNvSpPr>
+          <p:nvPr>
+            <p:ph type="dt" sz="half" idx="10"/>
+          </p:nvPr>
+        </p:nvSpPr>
+        <p:spPr/>
+        <p:txBody>
+          <a:bodyPr/>
+          <a:lstStyle/>
+          <a:p>
+            <a:pPr marL="0" marR="0" lvl="0" indent="0" algn="l" defTabSz="914400" rtl="0" eaLnBrk="1" fontAlgn="auto" latinLnBrk="0" hangingPunct="1">
+              <a:lnSpc>
+                <a:spcPct val="100000"/>
+              </a:lnSpc>
+              <a:spcBef>
+                <a:spcPts val="0"/>
+              </a:spcBef>
+              <a:spcAft>
+                <a:spcPts val="0"/>
+              </a:spcAft>
+              <a:buClrTx/>
+              <a:buSzTx/>
+              <a:buFontTx/>
+              <a:buNone/>
+              <a:tabLst/>
+              <a:defRPr/>
+            </a:pPr>
+            <a:fld id="{9285AD09-59D5-478E-BFB4-5748C04604E9}" type="datetimeFigureOut">
+              <a:rPr kumimoji="0" lang="en-US" sz="900" b="0" i="0" u="none" strike="noStrike" kern="1200" cap="none" spc="0" normalizeH="0" baseline="0" noProof="0" smtClean="0">
+                <a:ln>
+                  <a:noFill/>
+                </a:ln>
+                <a:solidFill>
+                  <a:prstClr val="black">
+                    <a:tint val="75000"/>
+                  </a:prstClr>
+                </a:solidFill>
+                <a:effectLst/>
+                <a:uLnTx/>
+                <a:uFillTx/>
+                <a:latin typeface="Calibri" panose="020F0502020204030204"/>
+                <a:ea typeface="+mn-ea"/>
+                <a:cs typeface="+mn-cs"/>
+              </a:rPr>
+              <a:pPr marL="0" marR="0" lvl="0" indent="0" algn="l" defTabSz="914400" rtl="0" eaLnBrk="1" fontAlgn="auto" latinLnBrk="0" hangingPunct="1">
+                <a:lnSpc>
+                  <a:spcPct val="100000"/>
+                </a:lnSpc>
+                <a:spcBef>
+                  <a:spcPts val="0"/>
+                </a:spcBef>
+                <a:spcAft>
+                  <a:spcPts val="0"/>
+                </a:spcAft>
+                <a:buClrTx/>
+                <a:buSzTx/>
+                <a:buFontTx/>
+                <a:buNone/>
+                <a:tabLst/>
+                <a:defRPr/>
+              </a:pPr>
+              <a:t>05/10/2025</a:t>
+            </a:fld>
+            <a:endParaRPr kumimoji="0" lang="en-US" sz="900" b="0" i="0" u="none" strike="noStrike" kern="1200" cap="none" spc="0" normalizeH="0" baseline="0" noProof="0">
+              <a:ln>
+                <a:noFill/>
+              </a:ln>
+              <a:solidFill>
+                <a:prstClr val="black">
+                  <a:tint val="75000"/>
+                </a:prstClr>
+              </a:solidFill>
+              <a:effectLst/>
+              <a:uLnTx/>
+              <a:uFillTx/>
+              <a:latin typeface="Calibri" panose="020F0502020204030204"/>
+              <a:ea typeface="+mn-ea"/>
+              <a:cs typeface="+mn-cs"/>
+            </a:endParaRPr>
+          </a:p>
+        </p:txBody>
+      </p:sp>
+      <p:sp>
+        <p:nvSpPr>
+          <p:cNvPr id="6" name="Footer Placeholder 5">
+            <a:extLst>
+              <a:ext uri="{FF2B5EF4-FFF2-40B4-BE49-F238E27FC236}">
+                <a16:creationId xmlns:a16="http://schemas.microsoft.com/office/drawing/2014/main" id="{3232A61A-F5EF-46A2-9BE4-934C5BF03745}"/>
+              </a:ext>
+            </a:extLst>
+          </p:cNvPr>
+          <p:cNvSpPr>
+            <a:spLocks noGrp="1"/>
+          </p:cNvSpPr>
+          <p:nvPr>
+            <p:ph type="ftr" sz="quarter" idx="11"/>
+          </p:nvPr>
+        </p:nvSpPr>
+        <p:spPr/>
+        <p:txBody>
+          <a:bodyPr/>
+          <a:lstStyle/>
+          <a:p>
+            <a:pPr marL="0" marR="0" lvl="0" indent="0" algn="ctr" defTabSz="914400" rtl="0" eaLnBrk="1" fontAlgn="auto" latinLnBrk="0" hangingPunct="1">
+              <a:lnSpc>
+                <a:spcPct val="100000"/>
+              </a:lnSpc>
+              <a:spcBef>
+                <a:spcPts val="0"/>
+              </a:spcBef>
+              <a:spcAft>
+                <a:spcPts val="0"/>
+              </a:spcAft>
+              <a:buClrTx/>
+              <a:buSzTx/>
+              <a:buFontTx/>
+              <a:buNone/>
+              <a:tabLst/>
+              <a:defRPr/>
+            </a:pPr>
+            <a:endParaRPr kumimoji="0" lang="en-US" sz="900" b="0" i="0" u="none" strike="noStrike" kern="1200" cap="none" spc="0" normalizeH="0" baseline="0" noProof="0">
+              <a:ln>
+                <a:noFill/>
+              </a:ln>
+              <a:solidFill>
+                <a:prstClr val="black">
+                  <a:tint val="75000"/>
+                </a:prstClr>
+              </a:solidFill>
+              <a:effectLst/>
+              <a:uLnTx/>
+              <a:uFillTx/>
+              <a:latin typeface="Calibri" panose="020F0502020204030204"/>
+              <a:ea typeface="+mn-ea"/>
+              <a:cs typeface="+mn-cs"/>
+            </a:endParaRPr>
+          </a:p>
+        </p:txBody>
+      </p:sp>
+      <p:sp>
+        <p:nvSpPr>
+          <p:cNvPr id="7" name="Slide Number Placeholder 6">
+            <a:extLst>
+              <a:ext uri="{FF2B5EF4-FFF2-40B4-BE49-F238E27FC236}">
+                <a16:creationId xmlns:a16="http://schemas.microsoft.com/office/drawing/2014/main" id="{DA13FF44-C988-4C13-BCCB-C8B090905246}"/>
+              </a:ext>
+            </a:extLst>
+          </p:cNvPr>
+          <p:cNvSpPr>
+            <a:spLocks noGrp="1"/>
+          </p:cNvSpPr>
+          <p:nvPr>
+            <p:ph type="sldNum" sz="quarter" idx="12"/>
+          </p:nvPr>
+        </p:nvSpPr>
+        <p:spPr/>
+        <p:txBody>
+          <a:bodyPr/>
+          <a:lstStyle/>
+          <a:p>
+            <a:pPr marL="0" marR="0" lvl="0" indent="0" algn="r" defTabSz="914400" rtl="0" eaLnBrk="1" fontAlgn="auto" latinLnBrk="0" hangingPunct="1">
+              <a:lnSpc>
+                <a:spcPct val="100000"/>
+              </a:lnSpc>
+              <a:spcBef>
+                <a:spcPts val="0"/>
+              </a:spcBef>
+              <a:spcAft>
+                <a:spcPts val="0"/>
+              </a:spcAft>
+              <a:buClrTx/>
+              <a:buSzTx/>
+              <a:buFontTx/>
+              <a:buNone/>
+              <a:tabLst/>
+              <a:defRPr/>
+            </a:pPr>
+            <a:fld id="{52669F0D-795E-449C-AD68-9797EE4A94EB}" type="slidenum">
+              <a:rPr kumimoji="0" lang="en-US" sz="900" b="0" i="0" u="none" strike="noStrike" kern="1200" cap="none" spc="0" normalizeH="0" baseline="0" noProof="0" smtClean="0">
+                <a:ln>
+                  <a:noFill/>
+                </a:ln>
+                <a:solidFill>
+                  <a:prstClr val="black">
+                    <a:tint val="75000"/>
+                  </a:prstClr>
+                </a:solidFill>
+                <a:effectLst/>
+                <a:uLnTx/>
+                <a:uFillTx/>
+                <a:latin typeface="Calibri" panose="020F0502020204030204"/>
+                <a:ea typeface="+mn-ea"/>
+                <a:cs typeface="+mn-cs"/>
+              </a:rPr>
+              <a:pPr marL="0" marR="0" lvl="0" indent="0" algn="r" defTabSz="914400" rtl="0" eaLnBrk="1" fontAlgn="auto" latinLnBrk="0" hangingPunct="1">
+                <a:lnSpc>
+                  <a:spcPct val="100000"/>
+                </a:lnSpc>
+                <a:spcBef>
+                  <a:spcPts val="0"/>
+                </a:spcBef>
+                <a:spcAft>
+                  <a:spcPts val="0"/>
+                </a:spcAft>
+                <a:buClrTx/>
+                <a:buSzTx/>
+                <a:buFontTx/>
+                <a:buNone/>
+                <a:tabLst/>
+                <a:defRPr/>
+              </a:pPr>
+              <a:t>‹#›</a:t>
+            </a:fld>
+            <a:endParaRPr kumimoji="0" lang="en-US" sz="900" b="0" i="0" u="none" strike="noStrike" kern="1200" cap="none" spc="0" normalizeH="0" baseline="0" noProof="0">
+              <a:ln>
+                <a:noFill/>
+              </a:ln>
+              <a:solidFill>
+                <a:prstClr val="black">
+                  <a:tint val="75000"/>
+                </a:prstClr>
+              </a:solidFill>
+              <a:effectLst/>
+              <a:uLnTx/>
+              <a:uFillTx/>
+              <a:latin typeface="Calibri" panose="020F0502020204030204"/>
+              <a:ea typeface="+mn-ea"/>
+              <a:cs typeface="+mn-cs"/>
+            </a:endParaRPr>
+          </a:p>
+        </p:txBody>
+      </p:sp>
+    </p:spTree>
+    <p:extLst>
+      <p:ext uri="{BB962C8B-B14F-4D97-AF65-F5344CB8AC3E}">
+        <p14:creationId xmlns:p14="http://schemas.microsoft.com/office/powerpoint/2010/main" val="3036945791"/>
+      </p:ext>
+    </p:extLst>
+  </p:cSld>
+  <p:clrMapOvr>
+    <a:masterClrMapping/>
+  </p:clrMapOvr>
+</p:sldLayout>
+</file>
+
+<file path=ppt/slideLayouts/slideLayout21.xml><?xml version="1.0" encoding="utf-8"?>
+<p:sldLayout xmlns:a="http://schemas.openxmlformats.org/drawingml/2006/main" xmlns:r="http://schemas.openxmlformats.org/officeDocument/2006/relationships" xmlns:p="http://schemas.openxmlformats.org/presentationml/2006/main" type="vertTx" preserve="1">
+  <p:cSld name="Title and Vertical Text">
+    <p:spTree>
+      <p:nvGrpSpPr>
+        <p:cNvPr id="1" name=""/>
+        <p:cNvGrpSpPr/>
+        <p:nvPr/>
+      </p:nvGrpSpPr>
+      <p:grpSpPr>
+        <a:xfrm>
+          <a:off x="0" y="0"/>
+          <a:ext cx="0" cy="0"/>
+          <a:chOff x="0" y="0"/>
+          <a:chExt cx="0" cy="0"/>
+        </a:xfrm>
+      </p:grpSpPr>
+      <p:sp>
+        <p:nvSpPr>
+          <p:cNvPr id="2" name="Title 1">
+            <a:extLst>
+              <a:ext uri="{FF2B5EF4-FFF2-40B4-BE49-F238E27FC236}">
+                <a16:creationId xmlns:a16="http://schemas.microsoft.com/office/drawing/2014/main" id="{E4A4CBD1-317B-4184-8540-DC2AF8E42EBA}"/>
+              </a:ext>
+            </a:extLst>
+          </p:cNvPr>
+          <p:cNvSpPr>
+            <a:spLocks noGrp="1"/>
+          </p:cNvSpPr>
+          <p:nvPr>
+            <p:ph type="title"/>
+          </p:nvPr>
+        </p:nvSpPr>
+        <p:spPr/>
+        <p:txBody>
+          <a:bodyPr/>
+          <a:lstStyle/>
+          <a:p>
+            <a:r>
+              <a:rPr lang="en-US"/>
+              <a:t>Click to edit Master title style</a:t>
+            </a:r>
+          </a:p>
+        </p:txBody>
+      </p:sp>
+      <p:sp>
+        <p:nvSpPr>
+          <p:cNvPr id="3" name="Vertical Text Placeholder 2">
+            <a:extLst>
+              <a:ext uri="{FF2B5EF4-FFF2-40B4-BE49-F238E27FC236}">
+                <a16:creationId xmlns:a16="http://schemas.microsoft.com/office/drawing/2014/main" id="{94B6263B-425C-4936-BC3E-83D2D3A8626F}"/>
+              </a:ext>
+            </a:extLst>
+          </p:cNvPr>
+          <p:cNvSpPr>
+            <a:spLocks noGrp="1"/>
+          </p:cNvSpPr>
+          <p:nvPr>
+            <p:ph type="body" orient="vert" idx="1"/>
+          </p:nvPr>
+        </p:nvSpPr>
+        <p:spPr/>
+        <p:txBody>
+          <a:bodyPr vert="eaVert"/>
+          <a:lstStyle/>
+          <a:p>
+            <a:pPr lvl="0"/>
+            <a:r>
+              <a:rPr lang="en-US"/>
+              <a:t>Edit Master text styles</a:t>
+            </a:r>
+          </a:p>
+          <a:p>
+            <a:pPr lvl="1"/>
+            <a:r>
+              <a:rPr lang="en-US"/>
+              <a:t>Second level</a:t>
+            </a:r>
+          </a:p>
+          <a:p>
+            <a:pPr lvl="2"/>
+            <a:r>
+              <a:rPr lang="en-US"/>
+              <a:t>Third level</a:t>
+            </a:r>
+          </a:p>
+          <a:p>
+            <a:pPr lvl="3"/>
+            <a:r>
+              <a:rPr lang="en-US"/>
+              <a:t>Fourth level</a:t>
+            </a:r>
+          </a:p>
+          <a:p>
+            <a:pPr lvl="4"/>
+            <a:r>
+              <a:rPr lang="en-US"/>
+              <a:t>Fifth level</a:t>
+            </a:r>
+          </a:p>
+        </p:txBody>
+      </p:sp>
+      <p:sp>
+        <p:nvSpPr>
+          <p:cNvPr id="4" name="Date Placeholder 3">
+            <a:extLst>
+              <a:ext uri="{FF2B5EF4-FFF2-40B4-BE49-F238E27FC236}">
+                <a16:creationId xmlns:a16="http://schemas.microsoft.com/office/drawing/2014/main" id="{B8EA9AAF-8452-4300-9ED2-F2D7B2FFD92C}"/>
+              </a:ext>
+            </a:extLst>
+          </p:cNvPr>
+          <p:cNvSpPr>
+            <a:spLocks noGrp="1"/>
+          </p:cNvSpPr>
+          <p:nvPr>
+            <p:ph type="dt" sz="half" idx="10"/>
+          </p:nvPr>
+        </p:nvSpPr>
+        <p:spPr/>
+        <p:txBody>
+          <a:bodyPr/>
+          <a:lstStyle/>
+          <a:p>
+            <a:pPr marL="0" marR="0" lvl="0" indent="0" algn="l" defTabSz="914400" rtl="0" eaLnBrk="1" fontAlgn="auto" latinLnBrk="0" hangingPunct="1">
+              <a:lnSpc>
+                <a:spcPct val="100000"/>
+              </a:lnSpc>
+              <a:spcBef>
+                <a:spcPts val="0"/>
+              </a:spcBef>
+              <a:spcAft>
+                <a:spcPts val="0"/>
+              </a:spcAft>
+              <a:buClrTx/>
+              <a:buSzTx/>
+              <a:buFontTx/>
+              <a:buNone/>
+              <a:tabLst/>
+              <a:defRPr/>
+            </a:pPr>
+            <a:fld id="{9285AD09-59D5-478E-BFB4-5748C04604E9}" type="datetimeFigureOut">
+              <a:rPr kumimoji="0" lang="en-US" sz="900" b="0" i="0" u="none" strike="noStrike" kern="1200" cap="none" spc="0" normalizeH="0" baseline="0" noProof="0" smtClean="0">
+                <a:ln>
+                  <a:noFill/>
+                </a:ln>
+                <a:solidFill>
+                  <a:prstClr val="black">
+                    <a:tint val="75000"/>
+                  </a:prstClr>
+                </a:solidFill>
+                <a:effectLst/>
+                <a:uLnTx/>
+                <a:uFillTx/>
+                <a:latin typeface="Calibri" panose="020F0502020204030204"/>
+                <a:ea typeface="+mn-ea"/>
+                <a:cs typeface="+mn-cs"/>
+              </a:rPr>
+              <a:pPr marL="0" marR="0" lvl="0" indent="0" algn="l" defTabSz="914400" rtl="0" eaLnBrk="1" fontAlgn="auto" latinLnBrk="0" hangingPunct="1">
+                <a:lnSpc>
+                  <a:spcPct val="100000"/>
+                </a:lnSpc>
+                <a:spcBef>
+                  <a:spcPts val="0"/>
+                </a:spcBef>
+                <a:spcAft>
+                  <a:spcPts val="0"/>
+                </a:spcAft>
+                <a:buClrTx/>
+                <a:buSzTx/>
+                <a:buFontTx/>
+                <a:buNone/>
+                <a:tabLst/>
+                <a:defRPr/>
+              </a:pPr>
+              <a:t>05/10/2025</a:t>
+            </a:fld>
+            <a:endParaRPr kumimoji="0" lang="en-US" sz="900" b="0" i="0" u="none" strike="noStrike" kern="1200" cap="none" spc="0" normalizeH="0" baseline="0" noProof="0">
+              <a:ln>
+                <a:noFill/>
+              </a:ln>
+              <a:solidFill>
+                <a:prstClr val="black">
+                  <a:tint val="75000"/>
+                </a:prstClr>
+              </a:solidFill>
+              <a:effectLst/>
+              <a:uLnTx/>
+              <a:uFillTx/>
+              <a:latin typeface="Calibri" panose="020F0502020204030204"/>
+              <a:ea typeface="+mn-ea"/>
+              <a:cs typeface="+mn-cs"/>
+            </a:endParaRPr>
+          </a:p>
+        </p:txBody>
+      </p:sp>
+      <p:sp>
+        <p:nvSpPr>
+          <p:cNvPr id="5" name="Footer Placeholder 4">
+            <a:extLst>
+              <a:ext uri="{FF2B5EF4-FFF2-40B4-BE49-F238E27FC236}">
+                <a16:creationId xmlns:a16="http://schemas.microsoft.com/office/drawing/2014/main" id="{5D941FC1-FF81-419C-8CF3-A3F0967EDDE3}"/>
+              </a:ext>
+            </a:extLst>
+          </p:cNvPr>
+          <p:cNvSpPr>
+            <a:spLocks noGrp="1"/>
+          </p:cNvSpPr>
+          <p:nvPr>
+            <p:ph type="ftr" sz="quarter" idx="11"/>
+          </p:nvPr>
+        </p:nvSpPr>
+        <p:spPr/>
+        <p:txBody>
+          <a:bodyPr/>
+          <a:lstStyle/>
+          <a:p>
+            <a:pPr marL="0" marR="0" lvl="0" indent="0" algn="ctr" defTabSz="914400" rtl="0" eaLnBrk="1" fontAlgn="auto" latinLnBrk="0" hangingPunct="1">
+              <a:lnSpc>
+                <a:spcPct val="100000"/>
+              </a:lnSpc>
+              <a:spcBef>
+                <a:spcPts val="0"/>
+              </a:spcBef>
+              <a:spcAft>
+                <a:spcPts val="0"/>
+              </a:spcAft>
+              <a:buClrTx/>
+              <a:buSzTx/>
+              <a:buFontTx/>
+              <a:buNone/>
+              <a:tabLst/>
+              <a:defRPr/>
+            </a:pPr>
+            <a:endParaRPr kumimoji="0" lang="en-US" sz="900" b="0" i="0" u="none" strike="noStrike" kern="1200" cap="none" spc="0" normalizeH="0" baseline="0" noProof="0">
+              <a:ln>
+                <a:noFill/>
+              </a:ln>
+              <a:solidFill>
+                <a:prstClr val="black">
+                  <a:tint val="75000"/>
+                </a:prstClr>
+              </a:solidFill>
+              <a:effectLst/>
+              <a:uLnTx/>
+              <a:uFillTx/>
+              <a:latin typeface="Calibri" panose="020F0502020204030204"/>
+              <a:ea typeface="+mn-ea"/>
+              <a:cs typeface="+mn-cs"/>
+            </a:endParaRPr>
+          </a:p>
+        </p:txBody>
+      </p:sp>
+      <p:sp>
+        <p:nvSpPr>
+          <p:cNvPr id="6" name="Slide Number Placeholder 5">
+            <a:extLst>
+              <a:ext uri="{FF2B5EF4-FFF2-40B4-BE49-F238E27FC236}">
+                <a16:creationId xmlns:a16="http://schemas.microsoft.com/office/drawing/2014/main" id="{7780F23B-0785-461F-9E9E-78F8ED3E6AD3}"/>
+              </a:ext>
+            </a:extLst>
+          </p:cNvPr>
+          <p:cNvSpPr>
+            <a:spLocks noGrp="1"/>
+          </p:cNvSpPr>
+          <p:nvPr>
+            <p:ph type="sldNum" sz="quarter" idx="12"/>
+          </p:nvPr>
+        </p:nvSpPr>
+        <p:spPr/>
+        <p:txBody>
+          <a:bodyPr/>
+          <a:lstStyle/>
+          <a:p>
+            <a:pPr marL="0" marR="0" lvl="0" indent="0" algn="r" defTabSz="914400" rtl="0" eaLnBrk="1" fontAlgn="auto" latinLnBrk="0" hangingPunct="1">
+              <a:lnSpc>
+                <a:spcPct val="100000"/>
+              </a:lnSpc>
+              <a:spcBef>
+                <a:spcPts val="0"/>
+              </a:spcBef>
+              <a:spcAft>
+                <a:spcPts val="0"/>
+              </a:spcAft>
+              <a:buClrTx/>
+              <a:buSzTx/>
+              <a:buFontTx/>
+              <a:buNone/>
+              <a:tabLst/>
+              <a:defRPr/>
+            </a:pPr>
+            <a:fld id="{52669F0D-795E-449C-AD68-9797EE4A94EB}" type="slidenum">
+              <a:rPr kumimoji="0" lang="en-US" sz="900" b="0" i="0" u="none" strike="noStrike" kern="1200" cap="none" spc="0" normalizeH="0" baseline="0" noProof="0" smtClean="0">
+                <a:ln>
+                  <a:noFill/>
+                </a:ln>
+                <a:solidFill>
+                  <a:prstClr val="black">
+                    <a:tint val="75000"/>
+                  </a:prstClr>
+                </a:solidFill>
+                <a:effectLst/>
+                <a:uLnTx/>
+                <a:uFillTx/>
+                <a:latin typeface="Calibri" panose="020F0502020204030204"/>
+                <a:ea typeface="+mn-ea"/>
+                <a:cs typeface="+mn-cs"/>
+              </a:rPr>
+              <a:pPr marL="0" marR="0" lvl="0" indent="0" algn="r" defTabSz="914400" rtl="0" eaLnBrk="1" fontAlgn="auto" latinLnBrk="0" hangingPunct="1">
+                <a:lnSpc>
+                  <a:spcPct val="100000"/>
+                </a:lnSpc>
+                <a:spcBef>
+                  <a:spcPts val="0"/>
+                </a:spcBef>
+                <a:spcAft>
+                  <a:spcPts val="0"/>
+                </a:spcAft>
+                <a:buClrTx/>
+                <a:buSzTx/>
+                <a:buFontTx/>
+                <a:buNone/>
+                <a:tabLst/>
+                <a:defRPr/>
+              </a:pPr>
+              <a:t>‹#›</a:t>
+            </a:fld>
+            <a:endParaRPr kumimoji="0" lang="en-US" sz="900" b="0" i="0" u="none" strike="noStrike" kern="1200" cap="none" spc="0" normalizeH="0" baseline="0" noProof="0">
+              <a:ln>
+                <a:noFill/>
+              </a:ln>
+              <a:solidFill>
+                <a:prstClr val="black">
+                  <a:tint val="75000"/>
+                </a:prstClr>
+              </a:solidFill>
+              <a:effectLst/>
+              <a:uLnTx/>
+              <a:uFillTx/>
+              <a:latin typeface="Calibri" panose="020F0502020204030204"/>
+              <a:ea typeface="+mn-ea"/>
+              <a:cs typeface="+mn-cs"/>
+            </a:endParaRPr>
+          </a:p>
+        </p:txBody>
+      </p:sp>
+    </p:spTree>
+    <p:extLst>
+      <p:ext uri="{BB962C8B-B14F-4D97-AF65-F5344CB8AC3E}">
+        <p14:creationId xmlns:p14="http://schemas.microsoft.com/office/powerpoint/2010/main" val="2628033816"/>
+      </p:ext>
+    </p:extLst>
+  </p:cSld>
+  <p:clrMapOvr>
+    <a:masterClrMapping/>
+  </p:clrMapOvr>
+</p:sldLayout>
+</file>
+
+<file path=ppt/slideLayouts/slideLayout22.xml><?xml version="1.0" encoding="utf-8"?>
+<p:sldLayout xmlns:a="http://schemas.openxmlformats.org/drawingml/2006/main" xmlns:r="http://schemas.openxmlformats.org/officeDocument/2006/relationships" xmlns:p="http://schemas.openxmlformats.org/presentationml/2006/main" type="vertTitleAndTx" preserve="1">
+  <p:cSld name="Vertical Title and Text">
+    <p:spTree>
+      <p:nvGrpSpPr>
+        <p:cNvPr id="1" name=""/>
+        <p:cNvGrpSpPr/>
+        <p:nvPr/>
+      </p:nvGrpSpPr>
+      <p:grpSpPr>
+        <a:xfrm>
+          <a:off x="0" y="0"/>
+          <a:ext cx="0" cy="0"/>
+          <a:chOff x="0" y="0"/>
+          <a:chExt cx="0" cy="0"/>
+        </a:xfrm>
+      </p:grpSpPr>
+      <p:sp>
+        <p:nvSpPr>
+          <p:cNvPr id="2" name="Vertical Title 1">
+            <a:extLst>
+              <a:ext uri="{FF2B5EF4-FFF2-40B4-BE49-F238E27FC236}">
+                <a16:creationId xmlns:a16="http://schemas.microsoft.com/office/drawing/2014/main" id="{BF56845E-8B49-4EB5-8EE2-8F055F654AA4}"/>
+              </a:ext>
+            </a:extLst>
+          </p:cNvPr>
+          <p:cNvSpPr>
+            <a:spLocks noGrp="1"/>
+          </p:cNvSpPr>
+          <p:nvPr>
+            <p:ph type="title" orient="vert"/>
+          </p:nvPr>
+        </p:nvSpPr>
+        <p:spPr>
+          <a:xfrm>
+            <a:off x="6543676" y="365125"/>
+            <a:ext cx="1971675" cy="5811838"/>
+          </a:xfrm>
+        </p:spPr>
+        <p:txBody>
+          <a:bodyPr vert="eaVert"/>
+          <a:lstStyle/>
+          <a:p>
+            <a:r>
+              <a:rPr lang="en-US"/>
+              <a:t>Click to edit Master title style</a:t>
+            </a:r>
+          </a:p>
+        </p:txBody>
+      </p:sp>
+      <p:sp>
+        <p:nvSpPr>
+          <p:cNvPr id="3" name="Vertical Text Placeholder 2">
+            <a:extLst>
+              <a:ext uri="{FF2B5EF4-FFF2-40B4-BE49-F238E27FC236}">
+                <a16:creationId xmlns:a16="http://schemas.microsoft.com/office/drawing/2014/main" id="{FE95B40B-11E0-4C32-8229-2B72E009CCA2}"/>
+              </a:ext>
+            </a:extLst>
+          </p:cNvPr>
+          <p:cNvSpPr>
+            <a:spLocks noGrp="1"/>
+          </p:cNvSpPr>
+          <p:nvPr>
+            <p:ph type="body" orient="vert" idx="1"/>
+          </p:nvPr>
+        </p:nvSpPr>
+        <p:spPr>
+          <a:xfrm>
+            <a:off x="628651" y="365125"/>
+            <a:ext cx="5800725" cy="5811838"/>
+          </a:xfrm>
+        </p:spPr>
+        <p:txBody>
+          <a:bodyPr vert="eaVert"/>
+          <a:lstStyle/>
+          <a:p>
+            <a:pPr lvl="0"/>
+            <a:r>
+              <a:rPr lang="en-US"/>
+              <a:t>Edit Master text styles</a:t>
+            </a:r>
+          </a:p>
+          <a:p>
+            <a:pPr lvl="1"/>
+            <a:r>
+              <a:rPr lang="en-US"/>
+              <a:t>Second level</a:t>
+            </a:r>
+          </a:p>
+          <a:p>
+            <a:pPr lvl="2"/>
+            <a:r>
+              <a:rPr lang="en-US"/>
+              <a:t>Third level</a:t>
+            </a:r>
+          </a:p>
+          <a:p>
+            <a:pPr lvl="3"/>
+            <a:r>
+              <a:rPr lang="en-US"/>
+              <a:t>Fourth level</a:t>
+            </a:r>
+          </a:p>
+          <a:p>
+            <a:pPr lvl="4"/>
+            <a:r>
+              <a:rPr lang="en-US"/>
+              <a:t>Fifth level</a:t>
+            </a:r>
+          </a:p>
+        </p:txBody>
+      </p:sp>
+      <p:sp>
+        <p:nvSpPr>
+          <p:cNvPr id="4" name="Date Placeholder 3">
+            <a:extLst>
+              <a:ext uri="{FF2B5EF4-FFF2-40B4-BE49-F238E27FC236}">
+                <a16:creationId xmlns:a16="http://schemas.microsoft.com/office/drawing/2014/main" id="{06684D00-C866-4EDC-B7BE-5643529C4051}"/>
+              </a:ext>
+            </a:extLst>
+          </p:cNvPr>
+          <p:cNvSpPr>
+            <a:spLocks noGrp="1"/>
+          </p:cNvSpPr>
+          <p:nvPr>
+            <p:ph type="dt" sz="half" idx="10"/>
+          </p:nvPr>
+        </p:nvSpPr>
+        <p:spPr/>
+        <p:txBody>
+          <a:bodyPr/>
+          <a:lstStyle/>
+          <a:p>
+            <a:pPr marL="0" marR="0" lvl="0" indent="0" algn="l" defTabSz="914400" rtl="0" eaLnBrk="1" fontAlgn="auto" latinLnBrk="0" hangingPunct="1">
+              <a:lnSpc>
+                <a:spcPct val="100000"/>
+              </a:lnSpc>
+              <a:spcBef>
+                <a:spcPts val="0"/>
+              </a:spcBef>
+              <a:spcAft>
+                <a:spcPts val="0"/>
+              </a:spcAft>
+              <a:buClrTx/>
+              <a:buSzTx/>
+              <a:buFontTx/>
+              <a:buNone/>
+              <a:tabLst/>
+              <a:defRPr/>
+            </a:pPr>
+            <a:fld id="{9285AD09-59D5-478E-BFB4-5748C04604E9}" type="datetimeFigureOut">
+              <a:rPr kumimoji="0" lang="en-US" sz="900" b="0" i="0" u="none" strike="noStrike" kern="1200" cap="none" spc="0" normalizeH="0" baseline="0" noProof="0" smtClean="0">
+                <a:ln>
+                  <a:noFill/>
+                </a:ln>
+                <a:solidFill>
+                  <a:prstClr val="black">
+                    <a:tint val="75000"/>
+                  </a:prstClr>
+                </a:solidFill>
+                <a:effectLst/>
+                <a:uLnTx/>
+                <a:uFillTx/>
+                <a:latin typeface="Calibri" panose="020F0502020204030204"/>
+                <a:ea typeface="+mn-ea"/>
+                <a:cs typeface="+mn-cs"/>
+              </a:rPr>
+              <a:pPr marL="0" marR="0" lvl="0" indent="0" algn="l" defTabSz="914400" rtl="0" eaLnBrk="1" fontAlgn="auto" latinLnBrk="0" hangingPunct="1">
+                <a:lnSpc>
+                  <a:spcPct val="100000"/>
+                </a:lnSpc>
+                <a:spcBef>
+                  <a:spcPts val="0"/>
+                </a:spcBef>
+                <a:spcAft>
+                  <a:spcPts val="0"/>
+                </a:spcAft>
+                <a:buClrTx/>
+                <a:buSzTx/>
+                <a:buFontTx/>
+                <a:buNone/>
+                <a:tabLst/>
+                <a:defRPr/>
+              </a:pPr>
+              <a:t>05/10/2025</a:t>
+            </a:fld>
+            <a:endParaRPr kumimoji="0" lang="en-US" sz="900" b="0" i="0" u="none" strike="noStrike" kern="1200" cap="none" spc="0" normalizeH="0" baseline="0" noProof="0">
+              <a:ln>
+                <a:noFill/>
+              </a:ln>
+              <a:solidFill>
+                <a:prstClr val="black">
+                  <a:tint val="75000"/>
+                </a:prstClr>
+              </a:solidFill>
+              <a:effectLst/>
+              <a:uLnTx/>
+              <a:uFillTx/>
+              <a:latin typeface="Calibri" panose="020F0502020204030204"/>
+              <a:ea typeface="+mn-ea"/>
+              <a:cs typeface="+mn-cs"/>
+            </a:endParaRPr>
+          </a:p>
+        </p:txBody>
+      </p:sp>
+      <p:sp>
+        <p:nvSpPr>
+          <p:cNvPr id="5" name="Footer Placeholder 4">
+            <a:extLst>
+              <a:ext uri="{FF2B5EF4-FFF2-40B4-BE49-F238E27FC236}">
+                <a16:creationId xmlns:a16="http://schemas.microsoft.com/office/drawing/2014/main" id="{8834941C-FAF5-461D-B473-4CCC57830983}"/>
+              </a:ext>
+            </a:extLst>
+          </p:cNvPr>
+          <p:cNvSpPr>
+            <a:spLocks noGrp="1"/>
+          </p:cNvSpPr>
+          <p:nvPr>
+            <p:ph type="ftr" sz="quarter" idx="11"/>
+          </p:nvPr>
+        </p:nvSpPr>
+        <p:spPr/>
+        <p:txBody>
+          <a:bodyPr/>
+          <a:lstStyle/>
+          <a:p>
+            <a:pPr marL="0" marR="0" lvl="0" indent="0" algn="ctr" defTabSz="914400" rtl="0" eaLnBrk="1" fontAlgn="auto" latinLnBrk="0" hangingPunct="1">
+              <a:lnSpc>
+                <a:spcPct val="100000"/>
+              </a:lnSpc>
+              <a:spcBef>
+                <a:spcPts val="0"/>
+              </a:spcBef>
+              <a:spcAft>
+                <a:spcPts val="0"/>
+              </a:spcAft>
+              <a:buClrTx/>
+              <a:buSzTx/>
+              <a:buFontTx/>
+              <a:buNone/>
+              <a:tabLst/>
+              <a:defRPr/>
+            </a:pPr>
+            <a:endParaRPr kumimoji="0" lang="en-US" sz="900" b="0" i="0" u="none" strike="noStrike" kern="1200" cap="none" spc="0" normalizeH="0" baseline="0" noProof="0">
+              <a:ln>
+                <a:noFill/>
+              </a:ln>
+              <a:solidFill>
+                <a:prstClr val="black">
+                  <a:tint val="75000"/>
+                </a:prstClr>
+              </a:solidFill>
+              <a:effectLst/>
+              <a:uLnTx/>
+              <a:uFillTx/>
+              <a:latin typeface="Calibri" panose="020F0502020204030204"/>
+              <a:ea typeface="+mn-ea"/>
+              <a:cs typeface="+mn-cs"/>
+            </a:endParaRPr>
+          </a:p>
+        </p:txBody>
+      </p:sp>
+      <p:sp>
+        <p:nvSpPr>
+          <p:cNvPr id="6" name="Slide Number Placeholder 5">
+            <a:extLst>
+              <a:ext uri="{FF2B5EF4-FFF2-40B4-BE49-F238E27FC236}">
+                <a16:creationId xmlns:a16="http://schemas.microsoft.com/office/drawing/2014/main" id="{6DA8363D-8592-44AE-9FF3-DBB24DF8640F}"/>
+              </a:ext>
+            </a:extLst>
+          </p:cNvPr>
+          <p:cNvSpPr>
+            <a:spLocks noGrp="1"/>
+          </p:cNvSpPr>
+          <p:nvPr>
+            <p:ph type="sldNum" sz="quarter" idx="12"/>
+          </p:nvPr>
+        </p:nvSpPr>
+        <p:spPr/>
+        <p:txBody>
+          <a:bodyPr/>
+          <a:lstStyle/>
+          <a:p>
+            <a:pPr marL="0" marR="0" lvl="0" indent="0" algn="r" defTabSz="914400" rtl="0" eaLnBrk="1" fontAlgn="auto" latinLnBrk="0" hangingPunct="1">
+              <a:lnSpc>
+                <a:spcPct val="100000"/>
+              </a:lnSpc>
+              <a:spcBef>
+                <a:spcPts val="0"/>
+              </a:spcBef>
+              <a:spcAft>
+                <a:spcPts val="0"/>
+              </a:spcAft>
+              <a:buClrTx/>
+              <a:buSzTx/>
+              <a:buFontTx/>
+              <a:buNone/>
+              <a:tabLst/>
+              <a:defRPr/>
+            </a:pPr>
+            <a:fld id="{52669F0D-795E-449C-AD68-9797EE4A94EB}" type="slidenum">
+              <a:rPr kumimoji="0" lang="en-US" sz="900" b="0" i="0" u="none" strike="noStrike" kern="1200" cap="none" spc="0" normalizeH="0" baseline="0" noProof="0" smtClean="0">
+                <a:ln>
+                  <a:noFill/>
+                </a:ln>
+                <a:solidFill>
+                  <a:prstClr val="black">
+                    <a:tint val="75000"/>
+                  </a:prstClr>
+                </a:solidFill>
+                <a:effectLst/>
+                <a:uLnTx/>
+                <a:uFillTx/>
+                <a:latin typeface="Calibri" panose="020F0502020204030204"/>
+                <a:ea typeface="+mn-ea"/>
+                <a:cs typeface="+mn-cs"/>
+              </a:rPr>
+              <a:pPr marL="0" marR="0" lvl="0" indent="0" algn="r" defTabSz="914400" rtl="0" eaLnBrk="1" fontAlgn="auto" latinLnBrk="0" hangingPunct="1">
+                <a:lnSpc>
+                  <a:spcPct val="100000"/>
+                </a:lnSpc>
+                <a:spcBef>
+                  <a:spcPts val="0"/>
+                </a:spcBef>
+                <a:spcAft>
+                  <a:spcPts val="0"/>
+                </a:spcAft>
+                <a:buClrTx/>
+                <a:buSzTx/>
+                <a:buFontTx/>
+                <a:buNone/>
+                <a:tabLst/>
+                <a:defRPr/>
+              </a:pPr>
+              <a:t>‹#›</a:t>
+            </a:fld>
+            <a:endParaRPr kumimoji="0" lang="en-US" sz="900" b="0" i="0" u="none" strike="noStrike" kern="1200" cap="none" spc="0" normalizeH="0" baseline="0" noProof="0">
+              <a:ln>
+                <a:noFill/>
+              </a:ln>
+              <a:solidFill>
+                <a:prstClr val="black">
+                  <a:tint val="75000"/>
+                </a:prstClr>
+              </a:solidFill>
+              <a:effectLst/>
+              <a:uLnTx/>
+              <a:uFillTx/>
+              <a:latin typeface="Calibri" panose="020F0502020204030204"/>
+              <a:ea typeface="+mn-ea"/>
+              <a:cs typeface="+mn-cs"/>
+            </a:endParaRPr>
+          </a:p>
+        </p:txBody>
+      </p:sp>
+    </p:spTree>
+    <p:extLst>
+      <p:ext uri="{BB962C8B-B14F-4D97-AF65-F5344CB8AC3E}">
+        <p14:creationId xmlns:p14="http://schemas.microsoft.com/office/powerpoint/2010/main" val="766900631"/>
+      </p:ext>
+    </p:extLst>
+  </p:cSld>
+  <p:clrMapOvr>
+    <a:masterClrMapping/>
+  </p:clrMapOvr>
+</p:sldLayout>
+</file>
+
+<file path=ppt/slideLayouts/slideLayout3.xml><?xml version="1.0" encoding="utf-8"?>
+<p:sldLayout xmlns:a="http://schemas.openxmlformats.org/drawingml/2006/main" xmlns:r="http://schemas.openxmlformats.org/officeDocument/2006/relationships" xmlns:p="http://schemas.openxmlformats.org/presentationml/2006/main" type="secHead" preserve="1">
+  <p:cSld name="Section Header">
+    <p:spTree>
+      <p:nvGrpSpPr>
+        <p:cNvPr id="1" name=""/>
+        <p:cNvGrpSpPr/>
+        <p:nvPr/>
+      </p:nvGrpSpPr>
+      <p:grpSpPr>
+        <a:xfrm>
+          <a:off x="0" y="0"/>
+          <a:ext cx="0" cy="0"/>
+          <a:chOff x="0" y="0"/>
+          <a:chExt cx="0" cy="0"/>
+        </a:xfrm>
+      </p:grpSpPr>
+      <p:sp>
+        <p:nvSpPr>
+          <p:cNvPr id="2" name="Title 1"/>
+          <p:cNvSpPr>
+            <a:spLocks noGrp="1"/>
+          </p:cNvSpPr>
+          <p:nvPr>
+            <p:ph type="title"/>
+          </p:nvPr>
+        </p:nvSpPr>
+        <p:spPr>
+          <a:xfrm>
+            <a:off x="623889" y="1709742"/>
+            <a:ext cx="7886700" cy="2852737"/>
+          </a:xfrm>
+        </p:spPr>
+        <p:txBody>
+          <a:bodyPr anchor="b"/>
+          <a:lstStyle>
+            <a:lvl1pPr>
+              <a:defRPr sz="3375"/>
+            </a:lvl1pPr>
+          </a:lstStyle>
+          <a:p>
+            <a:r>
+              <a:rPr lang="en-US" smtClean="0"/>
+              <a:t>Click to edit Master title style</a:t>
+            </a:r>
+            <a:endParaRPr lang="en-US" dirty="0"/>
+          </a:p>
+        </p:txBody>
+      </p:sp>
+      <p:sp>
+        <p:nvSpPr>
+          <p:cNvPr id="3" name="Text Placeholder 2"/>
+          <p:cNvSpPr>
+            <a:spLocks noGrp="1"/>
+          </p:cNvSpPr>
+          <p:nvPr>
+            <p:ph type="body" idx="1"/>
+          </p:nvPr>
+        </p:nvSpPr>
+        <p:spPr>
+          <a:xfrm>
+            <a:off x="623889" y="4589467"/>
+            <a:ext cx="7886700" cy="1500187"/>
+          </a:xfrm>
+        </p:spPr>
+        <p:txBody>
+          <a:bodyPr/>
+          <a:lstStyle>
+            <a:lvl1pPr marL="0" indent="0">
+              <a:buNone/>
+              <a:defRPr sz="1350">
+                <a:solidFill>
+                  <a:schemeClr val="tx1"/>
+                </a:solidFill>
+              </a:defRPr>
+            </a:lvl1pPr>
+            <a:lvl2pPr marL="257175" indent="0">
+              <a:buNone/>
+              <a:defRPr sz="1125">
+                <a:solidFill>
+                  <a:schemeClr val="tx1">
+                    <a:tint val="75000"/>
+                  </a:schemeClr>
+                </a:solidFill>
+              </a:defRPr>
+            </a:lvl2pPr>
+            <a:lvl3pPr marL="514350" indent="0">
+              <a:buNone/>
+              <a:defRPr sz="1013">
+                <a:solidFill>
+                  <a:schemeClr val="tx1">
+                    <a:tint val="75000"/>
+                  </a:schemeClr>
+                </a:solidFill>
+              </a:defRPr>
+            </a:lvl3pPr>
+            <a:lvl4pPr marL="771525" indent="0">
+              <a:buNone/>
+              <a:defRPr sz="900">
+                <a:solidFill>
+                  <a:schemeClr val="tx1">
+                    <a:tint val="75000"/>
+                  </a:schemeClr>
+                </a:solidFill>
+              </a:defRPr>
+            </a:lvl4pPr>
+            <a:lvl5pPr marL="1028700" indent="0">
+              <a:buNone/>
+              <a:defRPr sz="900">
+                <a:solidFill>
+                  <a:schemeClr val="tx1">
+                    <a:tint val="75000"/>
+                  </a:schemeClr>
+                </a:solidFill>
+              </a:defRPr>
+            </a:lvl5pPr>
+            <a:lvl6pPr marL="1285875" indent="0">
+              <a:buNone/>
+              <a:defRPr sz="900">
+                <a:solidFill>
+                  <a:schemeClr val="tx1">
+                    <a:tint val="75000"/>
+                  </a:schemeClr>
+                </a:solidFill>
+              </a:defRPr>
+            </a:lvl6pPr>
+            <a:lvl7pPr marL="1543050" indent="0">
+              <a:buNone/>
+              <a:defRPr sz="900">
+                <a:solidFill>
+                  <a:schemeClr val="tx1">
+                    <a:tint val="75000"/>
+                  </a:schemeClr>
+                </a:solidFill>
+              </a:defRPr>
+            </a:lvl7pPr>
+            <a:lvl8pPr marL="1800225" indent="0">
+              <a:buNone/>
+              <a:defRPr sz="900">
+                <a:solidFill>
+                  <a:schemeClr val="tx1">
+                    <a:tint val="75000"/>
+                  </a:schemeClr>
+                </a:solidFill>
+              </a:defRPr>
+            </a:lvl8pPr>
+            <a:lvl9pPr marL="2057400" indent="0">
+              <a:buNone/>
+              <a:defRPr sz="900">
+                <a:solidFill>
+                  <a:schemeClr val="tx1">
+                    <a:tint val="75000"/>
+                  </a:schemeClr>
+                </a:solidFill>
+              </a:defRPr>
+            </a:lvl9pPr>
+          </a:lstStyle>
+          <a:p>
+            <a:pPr lvl="0"/>
+            <a:r>
+              <a:rPr lang="en-US" smtClean="0"/>
+              <a:t>Edit Master text styles</a:t>
+            </a:r>
+          </a:p>
+        </p:txBody>
+      </p:sp>
+      <p:sp>
+        <p:nvSpPr>
+          <p:cNvPr id="4" name="Date Placeholder 3"/>
+          <p:cNvSpPr>
+            <a:spLocks noGrp="1"/>
+          </p:cNvSpPr>
+          <p:nvPr>
+            <p:ph type="dt" sz="half" idx="10"/>
+          </p:nvPr>
+        </p:nvSpPr>
+        <p:spPr/>
+        <p:txBody>
+          <a:bodyPr/>
+          <a:lstStyle/>
+          <a:p>
+            <a:pPr>
+              <a:defRPr/>
+            </a:pPr>
+            <a:fld id="{9285AD09-59D5-478E-BFB4-5748C04604E9}" type="datetimeFigureOut">
+              <a:rPr lang="en-US" smtClean="0">
+                <a:solidFill>
+                  <a:prstClr val="black">
+                    <a:tint val="75000"/>
+                  </a:prstClr>
+                </a:solidFill>
+              </a:rPr>
+              <a:pPr>
+                <a:defRPr/>
+              </a:pPr>
+              <a:t>05/10/2025</a:t>
+            </a:fld>
+            <a:endParaRPr lang="en-US">
+              <a:solidFill>
+                <a:prstClr val="black">
+                  <a:tint val="75000"/>
+                </a:prstClr>
+              </a:solidFill>
+            </a:endParaRPr>
+          </a:p>
+        </p:txBody>
+      </p:sp>
+      <p:sp>
+        <p:nvSpPr>
+          <p:cNvPr id="5" name="Footer Placeholder 4"/>
+          <p:cNvSpPr>
+            <a:spLocks noGrp="1"/>
+          </p:cNvSpPr>
+          <p:nvPr>
+            <p:ph type="ftr" sz="quarter" idx="11"/>
+          </p:nvPr>
+        </p:nvSpPr>
+        <p:spPr/>
+        <p:txBody>
+          <a:bodyPr/>
+          <a:lstStyle/>
+          <a:p>
+            <a:pPr>
+              <a:defRPr/>
+            </a:pPr>
+            <a:endParaRPr lang="en-US">
+              <a:solidFill>
+                <a:prstClr val="black">
+                  <a:tint val="75000"/>
+                </a:prstClr>
+              </a:solidFill>
+            </a:endParaRPr>
+          </a:p>
+        </p:txBody>
+      </p:sp>
+      <p:sp>
+        <p:nvSpPr>
+          <p:cNvPr id="6" name="Slide Number Placeholder 5"/>
+          <p:cNvSpPr>
+            <a:spLocks noGrp="1"/>
+          </p:cNvSpPr>
+          <p:nvPr>
+            <p:ph type="sldNum" sz="quarter" idx="12"/>
+          </p:nvPr>
+        </p:nvSpPr>
+        <p:spPr/>
+        <p:txBody>
+          <a:bodyPr/>
+          <a:lstStyle/>
+          <a:p>
+            <a:pPr>
+              <a:defRPr/>
+            </a:pPr>
+            <a:fld id="{52669F0D-795E-449C-AD68-9797EE4A94EB}" type="slidenum">
+              <a:rPr lang="en-US" smtClean="0">
+                <a:solidFill>
+                  <a:prstClr val="black">
+                    <a:tint val="75000"/>
+                  </a:prstClr>
+                </a:solidFill>
+              </a:rPr>
+              <a:pPr>
+                <a:defRPr/>
+              </a:pPr>
+              <a:t>‹#›</a:t>
+            </a:fld>
+            <a:endParaRPr lang="en-US">
+              <a:solidFill>
+                <a:prstClr val="black">
+                  <a:tint val="75000"/>
+                </a:prstClr>
+              </a:solidFill>
+            </a:endParaRPr>
+          </a:p>
+        </p:txBody>
+      </p:sp>
+    </p:spTree>
+    <p:extLst>
+      <p:ext uri="{BB962C8B-B14F-4D97-AF65-F5344CB8AC3E}">
+        <p14:creationId xmlns:p14="http://schemas.microsoft.com/office/powerpoint/2010/main" val="4224026640"/>
+      </p:ext>
+    </p:extLst>
+  </p:cSld>
+  <p:clrMapOvr>
+    <a:masterClrMapping/>
+  </p:clrMapOvr>
+</p:sldLayout>
+</file>
+
+<file path=ppt/slideLayouts/slideLayout4.xml><?xml version="1.0" encoding="utf-8"?>
+<p:sldLayout xmlns:a="http://schemas.openxmlformats.org/drawingml/2006/main" xmlns:r="http://schemas.openxmlformats.org/officeDocument/2006/relationships" xmlns:p="http://schemas.openxmlformats.org/presentationml/2006/main" type="twoObj" preserve="1">
+  <p:cSld name="Two Content">
+    <p:spTree>
+      <p:nvGrpSpPr>
+        <p:cNvPr id="1" name=""/>
+        <p:cNvGrpSpPr/>
+        <p:nvPr/>
+      </p:nvGrpSpPr>
+      <p:grpSpPr>
+        <a:xfrm>
+          <a:off x="0" y="0"/>
+          <a:ext cx="0" cy="0"/>
+          <a:chOff x="0" y="0"/>
+          <a:chExt cx="0" cy="0"/>
+        </a:xfrm>
+      </p:grpSpPr>
+      <p:sp>
+        <p:nvSpPr>
+          <p:cNvPr id="2" name="Title 1"/>
+          <p:cNvSpPr>
+            <a:spLocks noGrp="1"/>
+          </p:cNvSpPr>
+          <p:nvPr>
+            <p:ph type="title"/>
+          </p:nvPr>
+        </p:nvSpPr>
+        <p:spPr/>
+        <p:txBody>
+          <a:bodyPr/>
+          <a:lstStyle/>
+          <a:p>
+            <a:r>
+              <a:rPr lang="en-US" smtClean="0"/>
+              <a:t>Click to edit Master title style</a:t>
+            </a:r>
+            <a:endParaRPr lang="en-US" dirty="0"/>
+          </a:p>
+        </p:txBody>
+      </p:sp>
+      <p:sp>
+        <p:nvSpPr>
+          <p:cNvPr id="3" name="Content Placeholder 2"/>
+          <p:cNvSpPr>
+            <a:spLocks noGrp="1"/>
+          </p:cNvSpPr>
+          <p:nvPr>
+            <p:ph sz="half" idx="1"/>
+          </p:nvPr>
+        </p:nvSpPr>
+        <p:spPr>
+          <a:xfrm>
+            <a:off x="628651" y="1825625"/>
+            <a:ext cx="3886200" cy="4351338"/>
+          </a:xfrm>
+        </p:spPr>
+        <p:txBody>
+          <a:bodyPr/>
+          <a:lstStyle/>
+          <a:p>
+            <a:pPr lvl="0"/>
+            <a:r>
+              <a:rPr lang="en-US" smtClean="0"/>
+              <a:t>Edit Master text styles</a:t>
+            </a:r>
+          </a:p>
+          <a:p>
+            <a:pPr lvl="1"/>
+            <a:r>
+              <a:rPr lang="en-US" smtClean="0"/>
+              <a:t>Second level</a:t>
+            </a:r>
+          </a:p>
+          <a:p>
+            <a:pPr lvl="2"/>
+            <a:r>
+              <a:rPr lang="en-US" smtClean="0"/>
+              <a:t>Third level</a:t>
+            </a:r>
+          </a:p>
+          <a:p>
+            <a:pPr lvl="3"/>
+            <a:r>
+              <a:rPr lang="en-US" smtClean="0"/>
+              <a:t>Fourth level</a:t>
+            </a:r>
+          </a:p>
+          <a:p>
+            <a:pPr lvl="4"/>
+            <a:r>
+              <a:rPr lang="en-US" smtClean="0"/>
+              <a:t>Fifth level</a:t>
+            </a:r>
+            <a:endParaRPr lang="en-US" dirty="0"/>
+          </a:p>
+        </p:txBody>
+      </p:sp>
+      <p:sp>
+        <p:nvSpPr>
+          <p:cNvPr id="4" name="Content Placeholder 3"/>
+          <p:cNvSpPr>
+            <a:spLocks noGrp="1"/>
+          </p:cNvSpPr>
+          <p:nvPr>
+            <p:ph sz="half" idx="2"/>
+          </p:nvPr>
+        </p:nvSpPr>
+        <p:spPr>
+          <a:xfrm>
+            <a:off x="4629151" y="1825625"/>
+            <a:ext cx="3886200" cy="4351338"/>
+          </a:xfrm>
+        </p:spPr>
+        <p:txBody>
+          <a:bodyPr/>
+          <a:lstStyle/>
+          <a:p>
+            <a:pPr lvl="0"/>
+            <a:r>
+              <a:rPr lang="en-US" smtClean="0"/>
+              <a:t>Edit Master text styles</a:t>
+            </a:r>
+          </a:p>
+          <a:p>
+            <a:pPr lvl="1"/>
+            <a:r>
+              <a:rPr lang="en-US" smtClean="0"/>
+              <a:t>Second level</a:t>
+            </a:r>
+          </a:p>
+          <a:p>
+            <a:pPr lvl="2"/>
+            <a:r>
+              <a:rPr lang="en-US" smtClean="0"/>
+              <a:t>Third level</a:t>
+            </a:r>
+          </a:p>
+          <a:p>
+            <a:pPr lvl="3"/>
+            <a:r>
+              <a:rPr lang="en-US" smtClean="0"/>
+              <a:t>Fourth level</a:t>
+            </a:r>
+          </a:p>
+          <a:p>
+            <a:pPr lvl="4"/>
+            <a:r>
+              <a:rPr lang="en-US" smtClean="0"/>
+              <a:t>Fifth level</a:t>
+            </a:r>
+            <a:endParaRPr lang="en-US" dirty="0"/>
+          </a:p>
+        </p:txBody>
+      </p:sp>
+      <p:sp>
+        <p:nvSpPr>
+          <p:cNvPr id="5" name="Date Placeholder 4"/>
+          <p:cNvSpPr>
+            <a:spLocks noGrp="1"/>
+          </p:cNvSpPr>
+          <p:nvPr>
+            <p:ph type="dt" sz="half" idx="10"/>
+          </p:nvPr>
+        </p:nvSpPr>
+        <p:spPr/>
+        <p:txBody>
+          <a:bodyPr/>
+          <a:lstStyle/>
+          <a:p>
+            <a:pPr>
+              <a:defRPr/>
+            </a:pPr>
+            <a:fld id="{9285AD09-59D5-478E-BFB4-5748C04604E9}" type="datetimeFigureOut">
+              <a:rPr lang="en-US" smtClean="0">
+                <a:solidFill>
+                  <a:prstClr val="black">
+                    <a:tint val="75000"/>
+                  </a:prstClr>
+                </a:solidFill>
+              </a:rPr>
+              <a:pPr>
+                <a:defRPr/>
+              </a:pPr>
+              <a:t>05/10/2025</a:t>
+            </a:fld>
+            <a:endParaRPr lang="en-US">
+              <a:solidFill>
+                <a:prstClr val="black">
+                  <a:tint val="75000"/>
+                </a:prstClr>
+              </a:solidFill>
+            </a:endParaRPr>
+          </a:p>
+        </p:txBody>
+      </p:sp>
+      <p:sp>
+        <p:nvSpPr>
+          <p:cNvPr id="6" name="Footer Placeholder 5"/>
+          <p:cNvSpPr>
+            <a:spLocks noGrp="1"/>
+          </p:cNvSpPr>
+          <p:nvPr>
+            <p:ph type="ftr" sz="quarter" idx="11"/>
+          </p:nvPr>
+        </p:nvSpPr>
+        <p:spPr/>
+        <p:txBody>
+          <a:bodyPr/>
+          <a:lstStyle/>
+          <a:p>
+            <a:pPr>
+              <a:defRPr/>
+            </a:pPr>
+            <a:endParaRPr lang="en-US">
+              <a:solidFill>
+                <a:prstClr val="black">
+                  <a:tint val="75000"/>
+                </a:prstClr>
+              </a:solidFill>
+            </a:endParaRPr>
+          </a:p>
+        </p:txBody>
+      </p:sp>
+      <p:sp>
+        <p:nvSpPr>
+          <p:cNvPr id="7" name="Slide Number Placeholder 6"/>
+          <p:cNvSpPr>
+            <a:spLocks noGrp="1"/>
+          </p:cNvSpPr>
+          <p:nvPr>
+            <p:ph type="sldNum" sz="quarter" idx="12"/>
+          </p:nvPr>
+        </p:nvSpPr>
+        <p:spPr/>
+        <p:txBody>
+          <a:bodyPr/>
+          <a:lstStyle/>
+          <a:p>
+            <a:pPr>
+              <a:defRPr/>
+            </a:pPr>
+            <a:fld id="{52669F0D-795E-449C-AD68-9797EE4A94EB}" type="slidenum">
+              <a:rPr lang="en-US" smtClean="0">
+                <a:solidFill>
+                  <a:prstClr val="black">
+                    <a:tint val="75000"/>
+                  </a:prstClr>
+                </a:solidFill>
+              </a:rPr>
+              <a:pPr>
+                <a:defRPr/>
+              </a:pPr>
+              <a:t>‹#›</a:t>
+            </a:fld>
+            <a:endParaRPr lang="en-US">
+              <a:solidFill>
+                <a:prstClr val="black">
+                  <a:tint val="75000"/>
+                </a:prstClr>
+              </a:solidFill>
+            </a:endParaRPr>
+          </a:p>
+        </p:txBody>
+      </p:sp>
+    </p:spTree>
+    <p:extLst>
+      <p:ext uri="{BB962C8B-B14F-4D97-AF65-F5344CB8AC3E}">
+        <p14:creationId xmlns:p14="http://schemas.microsoft.com/office/powerpoint/2010/main" val="424619181"/>
+      </p:ext>
+    </p:extLst>
+  </p:cSld>
+  <p:clrMapOvr>
+    <a:masterClrMapping/>
+  </p:clrMapOvr>
+</p:sldLayout>
+</file>
+
+<file path=ppt/slideLayouts/slideLayout5.xml><?xml version="1.0" encoding="utf-8"?>
+<p:sldLayout xmlns:a="http://schemas.openxmlformats.org/drawingml/2006/main" xmlns:r="http://schemas.openxmlformats.org/officeDocument/2006/relationships" xmlns:p="http://schemas.openxmlformats.org/presentationml/2006/main" type="twoTxTwoObj" preserve="1">
+  <p:cSld name="Comparison">
+    <p:spTree>
+      <p:nvGrpSpPr>
+        <p:cNvPr id="1" name=""/>
+        <p:cNvGrpSpPr/>
+        <p:nvPr/>
+      </p:nvGrpSpPr>
+      <p:grpSpPr>
+        <a:xfrm>
+          <a:off x="0" y="0"/>
+          <a:ext cx="0" cy="0"/>
+          <a:chOff x="0" y="0"/>
+          <a:chExt cx="0" cy="0"/>
+        </a:xfrm>
+      </p:grpSpPr>
+      <p:sp>
+        <p:nvSpPr>
+          <p:cNvPr id="2" name="Title 1"/>
+          <p:cNvSpPr>
+            <a:spLocks noGrp="1"/>
+          </p:cNvSpPr>
+          <p:nvPr>
+            <p:ph type="title"/>
+          </p:nvPr>
+        </p:nvSpPr>
+        <p:spPr>
+          <a:xfrm>
+            <a:off x="629842" y="365129"/>
+            <a:ext cx="7886700" cy="1325563"/>
+          </a:xfrm>
+        </p:spPr>
+        <p:txBody>
+          <a:bodyPr/>
+          <a:lstStyle/>
+          <a:p>
+            <a:r>
+              <a:rPr lang="en-US" smtClean="0"/>
+              <a:t>Click to edit Master title style</a:t>
+            </a:r>
+            <a:endParaRPr lang="en-US" dirty="0"/>
+          </a:p>
+        </p:txBody>
+      </p:sp>
+      <p:sp>
+        <p:nvSpPr>
+          <p:cNvPr id="3" name="Text Placeholder 2"/>
+          <p:cNvSpPr>
+            <a:spLocks noGrp="1"/>
+          </p:cNvSpPr>
+          <p:nvPr>
+            <p:ph type="body" idx="1"/>
+          </p:nvPr>
+        </p:nvSpPr>
+        <p:spPr>
+          <a:xfrm>
+            <a:off x="629842" y="1681164"/>
+            <a:ext cx="3868340" cy="823912"/>
+          </a:xfrm>
+        </p:spPr>
+        <p:txBody>
+          <a:bodyPr anchor="b"/>
+          <a:lstStyle>
+            <a:lvl1pPr marL="0" indent="0">
+              <a:buNone/>
+              <a:defRPr sz="1350" b="1"/>
+            </a:lvl1pPr>
+            <a:lvl2pPr marL="257175" indent="0">
+              <a:buNone/>
+              <a:defRPr sz="1125" b="1"/>
+            </a:lvl2pPr>
+            <a:lvl3pPr marL="514350" indent="0">
+              <a:buNone/>
+              <a:defRPr sz="1013" b="1"/>
+            </a:lvl3pPr>
+            <a:lvl4pPr marL="771525" indent="0">
+              <a:buNone/>
+              <a:defRPr sz="900" b="1"/>
+            </a:lvl4pPr>
+            <a:lvl5pPr marL="1028700" indent="0">
+              <a:buNone/>
+              <a:defRPr sz="900" b="1"/>
+            </a:lvl5pPr>
+            <a:lvl6pPr marL="1285875" indent="0">
+              <a:buNone/>
+              <a:defRPr sz="900" b="1"/>
+            </a:lvl6pPr>
+            <a:lvl7pPr marL="1543050" indent="0">
+              <a:buNone/>
+              <a:defRPr sz="900" b="1"/>
+            </a:lvl7pPr>
+            <a:lvl8pPr marL="1800225" indent="0">
+              <a:buNone/>
+              <a:defRPr sz="900" b="1"/>
+            </a:lvl8pPr>
+            <a:lvl9pPr marL="2057400" indent="0">
+              <a:buNone/>
+              <a:defRPr sz="900" b="1"/>
+            </a:lvl9pPr>
+          </a:lstStyle>
+          <a:p>
+            <a:pPr lvl="0"/>
+            <a:r>
+              <a:rPr lang="en-US" smtClean="0"/>
+              <a:t>Edit Master text styles</a:t>
+            </a:r>
+          </a:p>
+        </p:txBody>
+      </p:sp>
+      <p:sp>
+        <p:nvSpPr>
+          <p:cNvPr id="4" name="Content Placeholder 3"/>
+          <p:cNvSpPr>
+            <a:spLocks noGrp="1"/>
+          </p:cNvSpPr>
+          <p:nvPr>
+            <p:ph sz="half" idx="2"/>
+          </p:nvPr>
+        </p:nvSpPr>
+        <p:spPr>
+          <a:xfrm>
+            <a:off x="629842" y="2505075"/>
+            <a:ext cx="3868340" cy="3684588"/>
+          </a:xfrm>
+        </p:spPr>
+        <p:txBody>
+          <a:bodyPr/>
+          <a:lstStyle/>
+          <a:p>
+            <a:pPr lvl="0"/>
+            <a:r>
+              <a:rPr lang="en-US" smtClean="0"/>
+              <a:t>Edit Master text styles</a:t>
+            </a:r>
+          </a:p>
+          <a:p>
+            <a:pPr lvl="1"/>
+            <a:r>
+              <a:rPr lang="en-US" smtClean="0"/>
+              <a:t>Second level</a:t>
+            </a:r>
+          </a:p>
+          <a:p>
+            <a:pPr lvl="2"/>
+            <a:r>
+              <a:rPr lang="en-US" smtClean="0"/>
+              <a:t>Third level</a:t>
+            </a:r>
+          </a:p>
+          <a:p>
+            <a:pPr lvl="3"/>
+            <a:r>
+              <a:rPr lang="en-US" smtClean="0"/>
+              <a:t>Fourth level</a:t>
+            </a:r>
+          </a:p>
+          <a:p>
+            <a:pPr lvl="4"/>
+            <a:r>
+              <a:rPr lang="en-US" smtClean="0"/>
+              <a:t>Fifth level</a:t>
+            </a:r>
+            <a:endParaRPr lang="en-US" dirty="0"/>
+          </a:p>
+        </p:txBody>
+      </p:sp>
+      <p:sp>
+        <p:nvSpPr>
+          <p:cNvPr id="5" name="Text Placeholder 4"/>
+          <p:cNvSpPr>
+            <a:spLocks noGrp="1"/>
+          </p:cNvSpPr>
+          <p:nvPr>
+            <p:ph type="body" sz="quarter" idx="3"/>
+          </p:nvPr>
+        </p:nvSpPr>
+        <p:spPr>
+          <a:xfrm>
+            <a:off x="4629152" y="1681164"/>
+            <a:ext cx="3887391" cy="823912"/>
+          </a:xfrm>
+        </p:spPr>
+        <p:txBody>
+          <a:bodyPr anchor="b"/>
+          <a:lstStyle>
+            <a:lvl1pPr marL="0" indent="0">
+              <a:buNone/>
+              <a:defRPr sz="1350" b="1"/>
+            </a:lvl1pPr>
+            <a:lvl2pPr marL="257175" indent="0">
+              <a:buNone/>
+              <a:defRPr sz="1125" b="1"/>
+            </a:lvl2pPr>
+            <a:lvl3pPr marL="514350" indent="0">
+              <a:buNone/>
+              <a:defRPr sz="1013" b="1"/>
+            </a:lvl3pPr>
+            <a:lvl4pPr marL="771525" indent="0">
+              <a:buNone/>
+              <a:defRPr sz="900" b="1"/>
+            </a:lvl4pPr>
+            <a:lvl5pPr marL="1028700" indent="0">
+              <a:buNone/>
+              <a:defRPr sz="900" b="1"/>
+            </a:lvl5pPr>
+            <a:lvl6pPr marL="1285875" indent="0">
+              <a:buNone/>
+              <a:defRPr sz="900" b="1"/>
+            </a:lvl6pPr>
+            <a:lvl7pPr marL="1543050" indent="0">
+              <a:buNone/>
+              <a:defRPr sz="900" b="1"/>
+            </a:lvl7pPr>
+            <a:lvl8pPr marL="1800225" indent="0">
+              <a:buNone/>
+              <a:defRPr sz="900" b="1"/>
+            </a:lvl8pPr>
+            <a:lvl9pPr marL="2057400" indent="0">
+              <a:buNone/>
+              <a:defRPr sz="900" b="1"/>
+            </a:lvl9pPr>
+          </a:lstStyle>
+          <a:p>
+            <a:pPr lvl="0"/>
+            <a:r>
+              <a:rPr lang="en-US" smtClean="0"/>
+              <a:t>Edit Master text styles</a:t>
+            </a:r>
+          </a:p>
+        </p:txBody>
+      </p:sp>
+      <p:sp>
+        <p:nvSpPr>
+          <p:cNvPr id="6" name="Content Placeholder 5"/>
+          <p:cNvSpPr>
+            <a:spLocks noGrp="1"/>
+          </p:cNvSpPr>
+          <p:nvPr>
+            <p:ph sz="quarter" idx="4"/>
+          </p:nvPr>
+        </p:nvSpPr>
+        <p:spPr>
+          <a:xfrm>
+            <a:off x="4629152" y="2505075"/>
+            <a:ext cx="3887391" cy="3684588"/>
+          </a:xfrm>
+        </p:spPr>
+        <p:txBody>
+          <a:bodyPr/>
+          <a:lstStyle/>
+          <a:p>
+            <a:pPr lvl="0"/>
+            <a:r>
+              <a:rPr lang="en-US" smtClean="0"/>
+              <a:t>Edit Master text styles</a:t>
+            </a:r>
+          </a:p>
+          <a:p>
+            <a:pPr lvl="1"/>
+            <a:r>
+              <a:rPr lang="en-US" smtClean="0"/>
+              <a:t>Second level</a:t>
+            </a:r>
+          </a:p>
+          <a:p>
+            <a:pPr lvl="2"/>
+            <a:r>
+              <a:rPr lang="en-US" smtClean="0"/>
+              <a:t>Third level</a:t>
+            </a:r>
+          </a:p>
+          <a:p>
+            <a:pPr lvl="3"/>
+            <a:r>
+              <a:rPr lang="en-US" smtClean="0"/>
+              <a:t>Fourth level</a:t>
+            </a:r>
+          </a:p>
+          <a:p>
+            <a:pPr lvl="4"/>
+            <a:r>
+              <a:rPr lang="en-US" smtClean="0"/>
+              <a:t>Fifth level</a:t>
+            </a:r>
+            <a:endParaRPr lang="en-US" dirty="0"/>
+          </a:p>
+        </p:txBody>
+      </p:sp>
+      <p:sp>
+        <p:nvSpPr>
+          <p:cNvPr id="7" name="Date Placeholder 6"/>
+          <p:cNvSpPr>
+            <a:spLocks noGrp="1"/>
+          </p:cNvSpPr>
+          <p:nvPr>
+            <p:ph type="dt" sz="half" idx="10"/>
+          </p:nvPr>
+        </p:nvSpPr>
+        <p:spPr/>
+        <p:txBody>
+          <a:bodyPr/>
+          <a:lstStyle/>
+          <a:p>
+            <a:pPr>
+              <a:defRPr/>
+            </a:pPr>
+            <a:fld id="{9285AD09-59D5-478E-BFB4-5748C04604E9}" type="datetimeFigureOut">
+              <a:rPr lang="en-US" smtClean="0">
+                <a:solidFill>
+                  <a:prstClr val="black">
+                    <a:tint val="75000"/>
+                  </a:prstClr>
+                </a:solidFill>
+              </a:rPr>
+              <a:pPr>
+                <a:defRPr/>
+              </a:pPr>
+              <a:t>05/10/2025</a:t>
+            </a:fld>
+            <a:endParaRPr lang="en-US">
+              <a:solidFill>
+                <a:prstClr val="black">
+                  <a:tint val="75000"/>
+                </a:prstClr>
+              </a:solidFill>
+            </a:endParaRPr>
+          </a:p>
+        </p:txBody>
+      </p:sp>
+      <p:sp>
+        <p:nvSpPr>
+          <p:cNvPr id="8" name="Footer Placeholder 7"/>
+          <p:cNvSpPr>
+            <a:spLocks noGrp="1"/>
+          </p:cNvSpPr>
+          <p:nvPr>
+            <p:ph type="ftr" sz="quarter" idx="11"/>
+          </p:nvPr>
+        </p:nvSpPr>
+        <p:spPr/>
+        <p:txBody>
+          <a:bodyPr/>
+          <a:lstStyle/>
+          <a:p>
+            <a:pPr>
+              <a:defRPr/>
+            </a:pPr>
+            <a:endParaRPr lang="en-US">
+              <a:solidFill>
+                <a:prstClr val="black">
+                  <a:tint val="75000"/>
+                </a:prstClr>
+              </a:solidFill>
+            </a:endParaRPr>
+          </a:p>
+        </p:txBody>
+      </p:sp>
+      <p:sp>
+        <p:nvSpPr>
+          <p:cNvPr id="9" name="Slide Number Placeholder 8"/>
+          <p:cNvSpPr>
+            <a:spLocks noGrp="1"/>
+          </p:cNvSpPr>
+          <p:nvPr>
+            <p:ph type="sldNum" sz="quarter" idx="12"/>
+          </p:nvPr>
+        </p:nvSpPr>
+        <p:spPr/>
+        <p:txBody>
+          <a:bodyPr/>
+          <a:lstStyle/>
+          <a:p>
+            <a:pPr>
+              <a:defRPr/>
+            </a:pPr>
+            <a:fld id="{52669F0D-795E-449C-AD68-9797EE4A94EB}" type="slidenum">
+              <a:rPr lang="en-US" smtClean="0">
+                <a:solidFill>
+                  <a:prstClr val="black">
+                    <a:tint val="75000"/>
+                  </a:prstClr>
+                </a:solidFill>
+              </a:rPr>
+              <a:pPr>
+                <a:defRPr/>
+              </a:pPr>
+              <a:t>‹#›</a:t>
+            </a:fld>
+            <a:endParaRPr lang="en-US">
+              <a:solidFill>
+                <a:prstClr val="black">
+                  <a:tint val="75000"/>
+                </a:prstClr>
+              </a:solidFill>
+            </a:endParaRPr>
+          </a:p>
+        </p:txBody>
+      </p:sp>
+    </p:spTree>
+    <p:extLst>
+      <p:ext uri="{BB962C8B-B14F-4D97-AF65-F5344CB8AC3E}">
+        <p14:creationId xmlns:p14="http://schemas.microsoft.com/office/powerpoint/2010/main" val="1791483831"/>
+      </p:ext>
+    </p:extLst>
+  </p:cSld>
+  <p:clrMapOvr>
+    <a:masterClrMapping/>
+  </p:clrMapOvr>
+</p:sldLayout>
+</file>
+
+<file path=ppt/slideLayouts/slideLayout6.xml><?xml version="1.0" encoding="utf-8"?>
+<p:sldLayout xmlns:a="http://schemas.openxmlformats.org/drawingml/2006/main" xmlns:r="http://schemas.openxmlformats.org/officeDocument/2006/relationships" xmlns:p="http://schemas.openxmlformats.org/presentationml/2006/main" type="titleOnly" preserve="1">
+  <p:cSld name="Title Only">
+    <p:spTree>
+      <p:nvGrpSpPr>
+        <p:cNvPr id="1" name=""/>
+        <p:cNvGrpSpPr/>
+        <p:nvPr/>
+      </p:nvGrpSpPr>
+      <p:grpSpPr>
+        <a:xfrm>
+          <a:off x="0" y="0"/>
+          <a:ext cx="0" cy="0"/>
+          <a:chOff x="0" y="0"/>
+          <a:chExt cx="0" cy="0"/>
+        </a:xfrm>
+      </p:grpSpPr>
+      <p:sp>
+        <p:nvSpPr>
+          <p:cNvPr id="2" name="Title 1"/>
+          <p:cNvSpPr>
+            <a:spLocks noGrp="1"/>
+          </p:cNvSpPr>
+          <p:nvPr>
+            <p:ph type="title"/>
+          </p:nvPr>
+        </p:nvSpPr>
+        <p:spPr/>
+        <p:txBody>
+          <a:bodyPr/>
+          <a:lstStyle/>
+          <a:p>
+            <a:r>
+              <a:rPr lang="en-US" smtClean="0"/>
+              <a:t>Click to edit Master title style</a:t>
+            </a:r>
+            <a:endParaRPr lang="en-US" dirty="0"/>
+          </a:p>
+        </p:txBody>
+      </p:sp>
+      <p:sp>
+        <p:nvSpPr>
+          <p:cNvPr id="3" name="Date Placeholder 2"/>
+          <p:cNvSpPr>
+            <a:spLocks noGrp="1"/>
+          </p:cNvSpPr>
+          <p:nvPr>
+            <p:ph type="dt" sz="half" idx="10"/>
+          </p:nvPr>
+        </p:nvSpPr>
+        <p:spPr/>
+        <p:txBody>
+          <a:bodyPr/>
+          <a:lstStyle/>
+          <a:p>
+            <a:pPr>
+              <a:defRPr/>
+            </a:pPr>
+            <a:fld id="{9285AD09-59D5-478E-BFB4-5748C04604E9}" type="datetimeFigureOut">
+              <a:rPr lang="en-US" smtClean="0">
+                <a:solidFill>
+                  <a:prstClr val="black">
+                    <a:tint val="75000"/>
+                  </a:prstClr>
+                </a:solidFill>
+              </a:rPr>
+              <a:pPr>
+                <a:defRPr/>
+              </a:pPr>
+              <a:t>05/10/2025</a:t>
+            </a:fld>
+            <a:endParaRPr lang="en-US">
+              <a:solidFill>
+                <a:prstClr val="black">
+                  <a:tint val="75000"/>
+                </a:prstClr>
+              </a:solidFill>
+            </a:endParaRPr>
+          </a:p>
+        </p:txBody>
+      </p:sp>
+      <p:sp>
+        <p:nvSpPr>
+          <p:cNvPr id="4" name="Footer Placeholder 3"/>
+          <p:cNvSpPr>
+            <a:spLocks noGrp="1"/>
+          </p:cNvSpPr>
+          <p:nvPr>
+            <p:ph type="ftr" sz="quarter" idx="11"/>
+          </p:nvPr>
+        </p:nvSpPr>
+        <p:spPr/>
+        <p:txBody>
+          <a:bodyPr/>
+          <a:lstStyle/>
+          <a:p>
+            <a:pPr>
+              <a:defRPr/>
+            </a:pPr>
+            <a:endParaRPr lang="en-US">
+              <a:solidFill>
+                <a:prstClr val="black">
+                  <a:tint val="75000"/>
+                </a:prstClr>
+              </a:solidFill>
+            </a:endParaRPr>
+          </a:p>
+        </p:txBody>
+      </p:sp>
+      <p:sp>
+        <p:nvSpPr>
+          <p:cNvPr id="5" name="Slide Number Placeholder 4"/>
+          <p:cNvSpPr>
+            <a:spLocks noGrp="1"/>
+          </p:cNvSpPr>
+          <p:nvPr>
+            <p:ph type="sldNum" sz="quarter" idx="12"/>
+          </p:nvPr>
+        </p:nvSpPr>
+        <p:spPr/>
+        <p:txBody>
+          <a:bodyPr/>
+          <a:lstStyle/>
+          <a:p>
+            <a:pPr>
+              <a:defRPr/>
+            </a:pPr>
+            <a:fld id="{52669F0D-795E-449C-AD68-9797EE4A94EB}" type="slidenum">
+              <a:rPr lang="en-US" smtClean="0">
+                <a:solidFill>
+                  <a:prstClr val="black">
+                    <a:tint val="75000"/>
+                  </a:prstClr>
+                </a:solidFill>
+              </a:rPr>
+              <a:pPr>
+                <a:defRPr/>
+              </a:pPr>
+              <a:t>‹#›</a:t>
+            </a:fld>
+            <a:endParaRPr lang="en-US">
+              <a:solidFill>
+                <a:prstClr val="black">
+                  <a:tint val="75000"/>
+                </a:prstClr>
+              </a:solidFill>
+            </a:endParaRPr>
+          </a:p>
+        </p:txBody>
+      </p:sp>
+    </p:spTree>
+    <p:extLst>
+      <p:ext uri="{BB962C8B-B14F-4D97-AF65-F5344CB8AC3E}">
+        <p14:creationId xmlns:p14="http://schemas.microsoft.com/office/powerpoint/2010/main" val="1501869885"/>
+      </p:ext>
+    </p:extLst>
+  </p:cSld>
+  <p:clrMapOvr>
+    <a:masterClrMapping/>
+  </p:clrMapOvr>
+</p:sldLayout>
+</file>
+
+<file path=ppt/slideLayouts/slideLayout7.xml><?xml version="1.0" encoding="utf-8"?>
+<p:sldLayout xmlns:a="http://schemas.openxmlformats.org/drawingml/2006/main" xmlns:r="http://schemas.openxmlformats.org/officeDocument/2006/relationships" xmlns:p="http://schemas.openxmlformats.org/presentationml/2006/main" type="blank" preserve="1">
+  <p:cSld name="Blank">
+    <p:spTree>
+      <p:nvGrpSpPr>
+        <p:cNvPr id="1" name=""/>
+        <p:cNvGrpSpPr/>
+        <p:nvPr/>
+      </p:nvGrpSpPr>
+      <p:grpSpPr>
+        <a:xfrm>
+          <a:off x="0" y="0"/>
+          <a:ext cx="0" cy="0"/>
+          <a:chOff x="0" y="0"/>
+          <a:chExt cx="0" cy="0"/>
+        </a:xfrm>
+      </p:grpSpPr>
+      <p:sp>
+        <p:nvSpPr>
+          <p:cNvPr id="2" name="Date Placeholder 1"/>
+          <p:cNvSpPr>
+            <a:spLocks noGrp="1"/>
+          </p:cNvSpPr>
+          <p:nvPr>
+            <p:ph type="dt" sz="half" idx="10"/>
+          </p:nvPr>
+        </p:nvSpPr>
+        <p:spPr/>
+        <p:txBody>
+          <a:bodyPr/>
+          <a:lstStyle/>
+          <a:p>
+            <a:pPr>
+              <a:defRPr/>
+            </a:pPr>
+            <a:fld id="{9285AD09-59D5-478E-BFB4-5748C04604E9}" type="datetimeFigureOut">
+              <a:rPr lang="en-US" smtClean="0">
+                <a:solidFill>
+                  <a:prstClr val="black">
+                    <a:tint val="75000"/>
+                  </a:prstClr>
+                </a:solidFill>
+              </a:rPr>
+              <a:pPr>
+                <a:defRPr/>
+              </a:pPr>
+              <a:t>05/10/2025</a:t>
+            </a:fld>
+            <a:endParaRPr lang="en-US">
+              <a:solidFill>
+                <a:prstClr val="black">
+                  <a:tint val="75000"/>
+                </a:prstClr>
+              </a:solidFill>
+            </a:endParaRPr>
+          </a:p>
+        </p:txBody>
+      </p:sp>
+      <p:sp>
+        <p:nvSpPr>
+          <p:cNvPr id="3" name="Footer Placeholder 2"/>
+          <p:cNvSpPr>
+            <a:spLocks noGrp="1"/>
+          </p:cNvSpPr>
+          <p:nvPr>
+            <p:ph type="ftr" sz="quarter" idx="11"/>
+          </p:nvPr>
+        </p:nvSpPr>
+        <p:spPr/>
+        <p:txBody>
+          <a:bodyPr/>
+          <a:lstStyle/>
+          <a:p>
+            <a:pPr>
+              <a:defRPr/>
+            </a:pPr>
+            <a:endParaRPr lang="en-US">
+              <a:solidFill>
+                <a:prstClr val="black">
+                  <a:tint val="75000"/>
+                </a:prstClr>
+              </a:solidFill>
+            </a:endParaRPr>
+          </a:p>
+        </p:txBody>
+      </p:sp>
+      <p:sp>
+        <p:nvSpPr>
+          <p:cNvPr id="4" name="Slide Number Placeholder 3"/>
+          <p:cNvSpPr>
+            <a:spLocks noGrp="1"/>
+          </p:cNvSpPr>
+          <p:nvPr>
+            <p:ph type="sldNum" sz="quarter" idx="12"/>
+          </p:nvPr>
+        </p:nvSpPr>
+        <p:spPr/>
+        <p:txBody>
+          <a:bodyPr/>
+          <a:lstStyle/>
+          <a:p>
+            <a:pPr>
+              <a:defRPr/>
+            </a:pPr>
+            <a:fld id="{52669F0D-795E-449C-AD68-9797EE4A94EB}" type="slidenum">
+              <a:rPr lang="en-US" smtClean="0">
+                <a:solidFill>
+                  <a:prstClr val="black">
+                    <a:tint val="75000"/>
+                  </a:prstClr>
+                </a:solidFill>
+              </a:rPr>
+              <a:pPr>
+                <a:defRPr/>
+              </a:pPr>
+              <a:t>‹#›</a:t>
+            </a:fld>
+            <a:endParaRPr lang="en-US">
+              <a:solidFill>
+                <a:prstClr val="black">
+                  <a:tint val="75000"/>
+                </a:prstClr>
+              </a:solidFill>
+            </a:endParaRPr>
+          </a:p>
+        </p:txBody>
+      </p:sp>
+    </p:spTree>
+    <p:extLst>
+      <p:ext uri="{BB962C8B-B14F-4D97-AF65-F5344CB8AC3E}">
+        <p14:creationId xmlns:p14="http://schemas.microsoft.com/office/powerpoint/2010/main" val="3631438734"/>
+      </p:ext>
+    </p:extLst>
+  </p:cSld>
+  <p:clrMapOvr>
+    <a:masterClrMapping/>
+  </p:clrMapOvr>
+</p:sldLayout>
+</file>
+
+<file path=ppt/slideLayouts/slideLayout8.xml><?xml version="1.0" encoding="utf-8"?>
+<p:sldLayout xmlns:a="http://schemas.openxmlformats.org/drawingml/2006/main" xmlns:r="http://schemas.openxmlformats.org/officeDocument/2006/relationships" xmlns:p="http://schemas.openxmlformats.org/presentationml/2006/main" type="objTx" preserve="1">
+  <p:cSld name="Content with Caption">
+    <p:spTree>
+      <p:nvGrpSpPr>
+        <p:cNvPr id="1" name=""/>
+        <p:cNvGrpSpPr/>
+        <p:nvPr/>
+      </p:nvGrpSpPr>
+      <p:grpSpPr>
+        <a:xfrm>
+          <a:off x="0" y="0"/>
+          <a:ext cx="0" cy="0"/>
+          <a:chOff x="0" y="0"/>
+          <a:chExt cx="0" cy="0"/>
+        </a:xfrm>
+      </p:grpSpPr>
+      <p:sp>
+        <p:nvSpPr>
+          <p:cNvPr id="2" name="Title 1"/>
+          <p:cNvSpPr>
+            <a:spLocks noGrp="1"/>
+          </p:cNvSpPr>
+          <p:nvPr>
+            <p:ph type="title"/>
+          </p:nvPr>
+        </p:nvSpPr>
+        <p:spPr>
+          <a:xfrm>
+            <a:off x="629842" y="457200"/>
+            <a:ext cx="2949179" cy="1600200"/>
+          </a:xfrm>
+        </p:spPr>
+        <p:txBody>
+          <a:bodyPr anchor="b"/>
+          <a:lstStyle>
+            <a:lvl1pPr>
+              <a:defRPr sz="1800"/>
+            </a:lvl1pPr>
+          </a:lstStyle>
+          <a:p>
+            <a:r>
+              <a:rPr lang="en-US" smtClean="0"/>
+              <a:t>Click to edit Master title style</a:t>
+            </a:r>
+            <a:endParaRPr lang="en-US" dirty="0"/>
+          </a:p>
+        </p:txBody>
+      </p:sp>
+      <p:sp>
+        <p:nvSpPr>
+          <p:cNvPr id="3" name="Content Placeholder 2"/>
+          <p:cNvSpPr>
+            <a:spLocks noGrp="1"/>
+          </p:cNvSpPr>
+          <p:nvPr>
+            <p:ph idx="1"/>
+          </p:nvPr>
+        </p:nvSpPr>
+        <p:spPr>
+          <a:xfrm>
+            <a:off x="3887392" y="987429"/>
+            <a:ext cx="4629151" cy="4873625"/>
+          </a:xfrm>
+        </p:spPr>
+        <p:txBody>
+          <a:bodyPr/>
+          <a:lstStyle>
+            <a:lvl1pPr>
+              <a:defRPr sz="1800"/>
+            </a:lvl1pPr>
+            <a:lvl2pPr>
+              <a:defRPr sz="1575"/>
+            </a:lvl2pPr>
+            <a:lvl3pPr>
+              <a:defRPr sz="1350"/>
+            </a:lvl3pPr>
+            <a:lvl4pPr>
+              <a:defRPr sz="1125"/>
+            </a:lvl4pPr>
+            <a:lvl5pPr>
+              <a:defRPr sz="1125"/>
+            </a:lvl5pPr>
+            <a:lvl6pPr>
+              <a:defRPr sz="1125"/>
+            </a:lvl6pPr>
+            <a:lvl7pPr>
+              <a:defRPr sz="1125"/>
+            </a:lvl7pPr>
+            <a:lvl8pPr>
+              <a:defRPr sz="1125"/>
+            </a:lvl8pPr>
+            <a:lvl9pPr>
+              <a:defRPr sz="1125"/>
+            </a:lvl9pPr>
+          </a:lstStyle>
+          <a:p>
+            <a:pPr lvl="0"/>
+            <a:r>
+              <a:rPr lang="en-US" smtClean="0"/>
+              <a:t>Edit Master text styles</a:t>
+            </a:r>
+          </a:p>
+          <a:p>
+            <a:pPr lvl="1"/>
+            <a:r>
+              <a:rPr lang="en-US" smtClean="0"/>
+              <a:t>Second level</a:t>
+            </a:r>
+          </a:p>
+          <a:p>
+            <a:pPr lvl="2"/>
+            <a:r>
+              <a:rPr lang="en-US" smtClean="0"/>
+              <a:t>Third level</a:t>
+            </a:r>
+          </a:p>
+          <a:p>
+            <a:pPr lvl="3"/>
+            <a:r>
+              <a:rPr lang="en-US" smtClean="0"/>
+              <a:t>Fourth level</a:t>
+            </a:r>
+          </a:p>
+          <a:p>
+            <a:pPr lvl="4"/>
+            <a:r>
+              <a:rPr lang="en-US" smtClean="0"/>
+              <a:t>Fifth level</a:t>
+            </a:r>
+            <a:endParaRPr lang="en-US" dirty="0"/>
+          </a:p>
+        </p:txBody>
+      </p:sp>
+      <p:sp>
+        <p:nvSpPr>
+          <p:cNvPr id="4" name="Text Placeholder 3"/>
+          <p:cNvSpPr>
+            <a:spLocks noGrp="1"/>
+          </p:cNvSpPr>
+          <p:nvPr>
+            <p:ph type="body" sz="half" idx="2"/>
+          </p:nvPr>
+        </p:nvSpPr>
+        <p:spPr>
+          <a:xfrm>
+            <a:off x="629842" y="2057400"/>
+            <a:ext cx="2949179" cy="3811588"/>
+          </a:xfrm>
+        </p:spPr>
+        <p:txBody>
+          <a:bodyPr/>
+          <a:lstStyle>
+            <a:lvl1pPr marL="0" indent="0">
+              <a:buNone/>
+              <a:defRPr sz="900"/>
+            </a:lvl1pPr>
+            <a:lvl2pPr marL="257175" indent="0">
+              <a:buNone/>
+              <a:defRPr sz="788"/>
+            </a:lvl2pPr>
+            <a:lvl3pPr marL="514350" indent="0">
+              <a:buNone/>
+              <a:defRPr sz="675"/>
+            </a:lvl3pPr>
+            <a:lvl4pPr marL="771525" indent="0">
+              <a:buNone/>
+              <a:defRPr sz="563"/>
+            </a:lvl4pPr>
+            <a:lvl5pPr marL="1028700" indent="0">
+              <a:buNone/>
+              <a:defRPr sz="563"/>
+            </a:lvl5pPr>
+            <a:lvl6pPr marL="1285875" indent="0">
+              <a:buNone/>
+              <a:defRPr sz="563"/>
+            </a:lvl6pPr>
+            <a:lvl7pPr marL="1543050" indent="0">
+              <a:buNone/>
+              <a:defRPr sz="563"/>
+            </a:lvl7pPr>
+            <a:lvl8pPr marL="1800225" indent="0">
+              <a:buNone/>
+              <a:defRPr sz="563"/>
+            </a:lvl8pPr>
+            <a:lvl9pPr marL="2057400" indent="0">
+              <a:buNone/>
+              <a:defRPr sz="563"/>
+            </a:lvl9pPr>
+          </a:lstStyle>
+          <a:p>
+            <a:pPr lvl="0"/>
+            <a:r>
+              <a:rPr lang="en-US" smtClean="0"/>
+              <a:t>Edit Master text styles</a:t>
+            </a:r>
+          </a:p>
+        </p:txBody>
+      </p:sp>
+      <p:sp>
+        <p:nvSpPr>
+          <p:cNvPr id="5" name="Date Placeholder 4"/>
+          <p:cNvSpPr>
+            <a:spLocks noGrp="1"/>
+          </p:cNvSpPr>
+          <p:nvPr>
+            <p:ph type="dt" sz="half" idx="10"/>
+          </p:nvPr>
+        </p:nvSpPr>
+        <p:spPr/>
+        <p:txBody>
+          <a:bodyPr/>
+          <a:lstStyle/>
+          <a:p>
+            <a:pPr>
+              <a:defRPr/>
+            </a:pPr>
+            <a:fld id="{9285AD09-59D5-478E-BFB4-5748C04604E9}" type="datetimeFigureOut">
+              <a:rPr lang="en-US" smtClean="0">
+                <a:solidFill>
+                  <a:prstClr val="black">
+                    <a:tint val="75000"/>
+                  </a:prstClr>
+                </a:solidFill>
+              </a:rPr>
+              <a:pPr>
+                <a:defRPr/>
+              </a:pPr>
+              <a:t>05/10/2025</a:t>
+            </a:fld>
+            <a:endParaRPr lang="en-US">
+              <a:solidFill>
+                <a:prstClr val="black">
+                  <a:tint val="75000"/>
+                </a:prstClr>
+              </a:solidFill>
+            </a:endParaRPr>
+          </a:p>
+        </p:txBody>
+      </p:sp>
+      <p:sp>
+        <p:nvSpPr>
+          <p:cNvPr id="6" name="Footer Placeholder 5"/>
+          <p:cNvSpPr>
+            <a:spLocks noGrp="1"/>
+          </p:cNvSpPr>
+          <p:nvPr>
+            <p:ph type="ftr" sz="quarter" idx="11"/>
+          </p:nvPr>
+        </p:nvSpPr>
+        <p:spPr/>
+        <p:txBody>
+          <a:bodyPr/>
+          <a:lstStyle/>
+          <a:p>
+            <a:pPr>
+              <a:defRPr/>
+            </a:pPr>
+            <a:endParaRPr lang="en-US">
+              <a:solidFill>
+                <a:prstClr val="black">
+                  <a:tint val="75000"/>
+                </a:prstClr>
+              </a:solidFill>
+            </a:endParaRPr>
+          </a:p>
+        </p:txBody>
+      </p:sp>
+      <p:sp>
+        <p:nvSpPr>
+          <p:cNvPr id="7" name="Slide Number Placeholder 6"/>
+          <p:cNvSpPr>
+            <a:spLocks noGrp="1"/>
+          </p:cNvSpPr>
+          <p:nvPr>
+            <p:ph type="sldNum" sz="quarter" idx="12"/>
+          </p:nvPr>
+        </p:nvSpPr>
+        <p:spPr/>
+        <p:txBody>
+          <a:bodyPr/>
+          <a:lstStyle/>
+          <a:p>
+            <a:pPr>
+              <a:defRPr/>
+            </a:pPr>
+            <a:fld id="{52669F0D-795E-449C-AD68-9797EE4A94EB}" type="slidenum">
+              <a:rPr lang="en-US" smtClean="0">
+                <a:solidFill>
+                  <a:prstClr val="black">
+                    <a:tint val="75000"/>
+                  </a:prstClr>
+                </a:solidFill>
+              </a:rPr>
+              <a:pPr>
+                <a:defRPr/>
+              </a:pPr>
+              <a:t>‹#›</a:t>
+            </a:fld>
+            <a:endParaRPr lang="en-US">
+              <a:solidFill>
+                <a:prstClr val="black">
+                  <a:tint val="75000"/>
+                </a:prstClr>
+              </a:solidFill>
+            </a:endParaRPr>
+          </a:p>
+        </p:txBody>
+      </p:sp>
+    </p:spTree>
+    <p:extLst>
+      <p:ext uri="{BB962C8B-B14F-4D97-AF65-F5344CB8AC3E}">
+        <p14:creationId xmlns:p14="http://schemas.microsoft.com/office/powerpoint/2010/main" val="1203829534"/>
       </p:ext>
     </p:extLst>
   </p:cSld>
@@ -3531,13 +8075,7 @@
       </p:grpSpPr>
       <p:sp>
         <p:nvSpPr>
-          <p:cNvPr id="2" name="Title 1">
-            <a:extLst>
-              <a:ext uri="{FF2B5EF4-FFF2-40B4-BE49-F238E27FC236}">
-                <a16:creationId xmlns:a16="http://schemas.microsoft.com/office/drawing/2014/main" id="{4D13B8BD-CB71-4064-8317-18A73848517A}"/>
-              </a:ext>
-            </a:extLst>
-          </p:cNvPr>
+          <p:cNvPr id="2" name="Title 1"/>
           <p:cNvSpPr>
             <a:spLocks noGrp="1"/>
           </p:cNvSpPr>
@@ -3547,36 +8085,31 @@
         </p:nvSpPr>
         <p:spPr>
           <a:xfrm>
-            <a:off x="629841" y="457200"/>
-            <a:ext cx="2949178" cy="1600200"/>
+            <a:off x="629842" y="457200"/>
+            <a:ext cx="2949179" cy="1600200"/>
           </a:xfrm>
         </p:spPr>
         <p:txBody>
           <a:bodyPr anchor="b"/>
           <a:lstStyle>
             <a:lvl1pPr>
-              <a:defRPr sz="2400"/>
+              <a:defRPr sz="1800"/>
             </a:lvl1pPr>
           </a:lstStyle>
           <a:p>
             <a:r>
-              <a:rPr lang="en-US"/>
+              <a:rPr lang="en-US" smtClean="0"/>
               <a:t>Click to edit Master title style</a:t>
             </a:r>
-          </a:p>
-        </p:txBody>
-      </p:sp>
-      <p:sp>
-        <p:nvSpPr>
-          <p:cNvPr id="3" name="Picture Placeholder 2">
-            <a:extLst>
-              <a:ext uri="{FF2B5EF4-FFF2-40B4-BE49-F238E27FC236}">
-                <a16:creationId xmlns:a16="http://schemas.microsoft.com/office/drawing/2014/main" id="{11939EA6-C663-4398-BA37-245E170ABA84}"/>
-              </a:ext>
-            </a:extLst>
-          </p:cNvPr>
+            <a:endParaRPr lang="en-US" dirty="0"/>
+          </a:p>
+        </p:txBody>
+      </p:sp>
+      <p:sp>
+        <p:nvSpPr>
+          <p:cNvPr id="3" name="Picture Placeholder 2"/>
           <p:cNvSpPr>
-            <a:spLocks noGrp="1"/>
+            <a:spLocks noGrp="1" noChangeAspect="1"/>
           </p:cNvSpPr>
           <p:nvPr>
             <p:ph type="pic" idx="1"/>
@@ -3584,64 +8117,62 @@
         </p:nvSpPr>
         <p:spPr>
           <a:xfrm>
-            <a:off x="3887391" y="987428"/>
-            <a:ext cx="4629150" cy="4873625"/>
+            <a:off x="3887392" y="987429"/>
+            <a:ext cx="4629151" cy="4873625"/>
           </a:xfrm>
         </p:spPr>
         <p:txBody>
-          <a:bodyPr/>
+          <a:bodyPr anchor="t"/>
           <a:lstStyle>
             <a:lvl1pPr marL="0" indent="0">
               <a:buNone/>
-              <a:defRPr sz="2400"/>
+              <a:defRPr sz="1800"/>
             </a:lvl1pPr>
-            <a:lvl2pPr marL="342900" indent="0">
-              <a:buNone/>
-              <a:defRPr sz="2100"/>
+            <a:lvl2pPr marL="257175" indent="0">
+              <a:buNone/>
+              <a:defRPr sz="1575"/>
             </a:lvl2pPr>
-            <a:lvl3pPr marL="685800" indent="0">
-              <a:buNone/>
-              <a:defRPr sz="1800"/>
+            <a:lvl3pPr marL="514350" indent="0">
+              <a:buNone/>
+              <a:defRPr sz="1350"/>
             </a:lvl3pPr>
-            <a:lvl4pPr marL="1028700" indent="0">
-              <a:buNone/>
-              <a:defRPr sz="1500"/>
+            <a:lvl4pPr marL="771525" indent="0">
+              <a:buNone/>
+              <a:defRPr sz="1125"/>
             </a:lvl4pPr>
-            <a:lvl5pPr marL="1371600" indent="0">
-              <a:buNone/>
-              <a:defRPr sz="1500"/>
+            <a:lvl5pPr marL="1028700" indent="0">
+              <a:buNone/>
+              <a:defRPr sz="1125"/>
             </a:lvl5pPr>
-            <a:lvl6pPr marL="1714500" indent="0">
-              <a:buNone/>
-              <a:defRPr sz="1500"/>
+            <a:lvl6pPr marL="1285875" indent="0">
+              <a:buNone/>
+              <a:defRPr sz="1125"/>
             </a:lvl6pPr>
-            <a:lvl7pPr marL="2057400" indent="0">
-              <a:buNone/>
-              <a:defRPr sz="1500"/>
+            <a:lvl7pPr marL="1543050" indent="0">
+              <a:buNone/>
+              <a:defRPr sz="1125"/>
             </a:lvl7pPr>
-            <a:lvl8pPr marL="2400300" indent="0">
-              <a:buNone/>
-              <a:defRPr sz="1500"/>
+            <a:lvl8pPr marL="1800225" indent="0">
+              <a:buNone/>
+              <a:defRPr sz="1125"/>
             </a:lvl8pPr>
-            <a:lvl9pPr marL="2743200" indent="0">
-              <a:buNone/>
-              <a:defRPr sz="1500"/>
+            <a:lvl9pPr marL="2057400" indent="0">
+              <a:buNone/>
+              <a:defRPr sz="1125"/>
             </a:lvl9pPr>
           </a:lstStyle>
           <a:p>
-            <a:endParaRPr lang="en-US"/>
-          </a:p>
-        </p:txBody>
-      </p:sp>
-      <p:sp>
-        <p:nvSpPr>
-          <p:cNvPr id="4" name="Text Placeholder 3">
-            <a:extLst>
-              <a:ext uri="{FF2B5EF4-FFF2-40B4-BE49-F238E27FC236}">
-                <a16:creationId xmlns:a16="http://schemas.microsoft.com/office/drawing/2014/main" id="{AB73E8CA-4CEF-444A-88A4-6CB73729D6A5}"/>
-              </a:ext>
-            </a:extLst>
-          </p:cNvPr>
+            <a:r>
+              <a:rPr lang="en-US" smtClean="0"/>
+              <a:t>Click icon to add picture</a:t>
+            </a:r>
+            <a:endParaRPr lang="en-US" dirty="0"/>
+          </a:p>
+        </p:txBody>
+      </p:sp>
+      <p:sp>
+        <p:nvSpPr>
+          <p:cNvPr id="4" name="Text Placeholder 3"/>
           <p:cNvSpPr>
             <a:spLocks noGrp="1"/>
           </p:cNvSpPr>
@@ -3651,8 +8182,8 @@
         </p:nvSpPr>
         <p:spPr>
           <a:xfrm>
-            <a:off x="629841" y="2057400"/>
-            <a:ext cx="2949178" cy="3811588"/>
+            <a:off x="629842" y="2057400"/>
+            <a:ext cx="2949179" cy="3811588"/>
           </a:xfrm>
         </p:spPr>
         <p:txBody>
@@ -3660,45 +8191,45 @@
           <a:lstStyle>
             <a:lvl1pPr marL="0" indent="0">
               <a:buNone/>
-              <a:defRPr sz="1200"/>
+              <a:defRPr sz="900"/>
             </a:lvl1pPr>
-            <a:lvl2pPr marL="342900" indent="0">
-              <a:buNone/>
-              <a:defRPr sz="1050"/>
+            <a:lvl2pPr marL="257175" indent="0">
+              <a:buNone/>
+              <a:defRPr sz="788"/>
             </a:lvl2pPr>
-            <a:lvl3pPr marL="685800" indent="0">
-              <a:buNone/>
-              <a:defRPr sz="900"/>
+            <a:lvl3pPr marL="514350" indent="0">
+              <a:buNone/>
+              <a:defRPr sz="675"/>
             </a:lvl3pPr>
-            <a:lvl4pPr marL="1028700" indent="0">
-              <a:buNone/>
-              <a:defRPr sz="750"/>
+            <a:lvl4pPr marL="771525" indent="0">
+              <a:buNone/>
+              <a:defRPr sz="563"/>
             </a:lvl4pPr>
-            <a:lvl5pPr marL="1371600" indent="0">
-              <a:buNone/>
-              <a:defRPr sz="750"/>
+            <a:lvl5pPr marL="1028700" indent="0">
+              <a:buNone/>
+              <a:defRPr sz="563"/>
             </a:lvl5pPr>
-            <a:lvl6pPr marL="1714500" indent="0">
-              <a:buNone/>
-              <a:defRPr sz="750"/>
+            <a:lvl6pPr marL="1285875" indent="0">
+              <a:buNone/>
+              <a:defRPr sz="563"/>
             </a:lvl6pPr>
-            <a:lvl7pPr marL="2057400" indent="0">
-              <a:buNone/>
-              <a:defRPr sz="750"/>
+            <a:lvl7pPr marL="1543050" indent="0">
+              <a:buNone/>
+              <a:defRPr sz="563"/>
             </a:lvl7pPr>
-            <a:lvl8pPr marL="2400300" indent="0">
-              <a:buNone/>
-              <a:defRPr sz="750"/>
+            <a:lvl8pPr marL="1800225" indent="0">
+              <a:buNone/>
+              <a:defRPr sz="563"/>
             </a:lvl8pPr>
-            <a:lvl9pPr marL="2743200" indent="0">
-              <a:buNone/>
-              <a:defRPr sz="750"/>
+            <a:lvl9pPr marL="2057400" indent="0">
+              <a:buNone/>
+              <a:defRPr sz="563"/>
             </a:lvl9pPr>
           </a:lstStyle>
           <a:p>
             <a:pPr lvl="0"/>
             <a:r>
-              <a:rPr lang="en-US"/>
+              <a:rPr lang="en-US" smtClean="0"/>
               <a:t>Edit Master text styles</a:t>
             </a:r>
           </a:p>
@@ -3706,13 +8237,7 @@
       </p:sp>
       <p:sp>
         <p:nvSpPr>
-          <p:cNvPr id="5" name="Date Placeholder 4">
-            <a:extLst>
-              <a:ext uri="{FF2B5EF4-FFF2-40B4-BE49-F238E27FC236}">
-                <a16:creationId xmlns:a16="http://schemas.microsoft.com/office/drawing/2014/main" id="{38F389F6-D8A5-4F55-B4FA-15D60C2C6663}"/>
-              </a:ext>
-            </a:extLst>
-          </p:cNvPr>
+          <p:cNvPr id="5" name="Date Placeholder 4"/>
           <p:cNvSpPr>
             <a:spLocks noGrp="1"/>
           </p:cNvSpPr>
@@ -3725,23 +8250,35 @@
           <a:bodyPr/>
           <a:lstStyle/>
           <a:p>
-            <a:fld id="{0499211D-10D7-4F49-ADEF-55BEAD014249}" type="datetimeFigureOut">
-              <a:rPr lang="en-US" smtClean="0"/>
-              <a:t>14/09/2025</a:t>
+            <a:pPr>
+              <a:defRPr/>
+            </a:pPr>
+            <a:fld id="{9285AD09-59D5-478E-BFB4-5748C04604E9}" type="datetimeFigureOut">
+              <a:rPr lang="en-US" smtClean="0">
+                <a:solidFill>
+                  <a:prstClr val="black">
+                    <a:tint val="75000"/>
+                  </a:prstClr>
+                </a:solidFill>
+              </a:rPr>
+              <a:pPr>
+                <a:defRPr/>
+              </a:pPr>
+              <a:t>05/10/2025</a:t>
             </a:fld>
-            <a:endParaRPr lang="en-US"/>
-          </a:p>
-        </p:txBody>
-      </p:sp>
-      <p:sp>
-        <p:nvSpPr>
-          <p:cNvPr id="6" name="Footer Placeholder 5">
-            <a:extLst>
-              <a:ext uri="{FF2B5EF4-FFF2-40B4-BE49-F238E27FC236}">
-                <a16:creationId xmlns:a16="http://schemas.microsoft.com/office/drawing/2014/main" id="{3232A61A-F5EF-46A2-9BE4-934C5BF03745}"/>
-              </a:ext>
-            </a:extLst>
-          </p:cNvPr>
+            <a:endParaRPr lang="en-US">
+              <a:solidFill>
+                <a:prstClr val="black">
+                  <a:tint val="75000"/>
+                </a:prstClr>
+              </a:solidFill>
+            </a:endParaRPr>
+          </a:p>
+        </p:txBody>
+      </p:sp>
+      <p:sp>
+        <p:nvSpPr>
+          <p:cNvPr id="6" name="Footer Placeholder 5"/>
           <p:cNvSpPr>
             <a:spLocks noGrp="1"/>
           </p:cNvSpPr>
@@ -3754,19 +8291,22 @@
           <a:bodyPr/>
           <a:lstStyle/>
           <a:p>
-            <a:endParaRPr lang="en-US"/>
-          </a:p>
-        </p:txBody>
-      </p:sp>
-      <p:sp>
-        <p:nvSpPr>
-          <p:cNvPr id="7" name="Slide Number Placeholder 6">
-            <a:extLst>
-              <a:ext uri="{FF2B5EF4-FFF2-40B4-BE49-F238E27FC236}">
-                <a16:creationId xmlns:a16="http://schemas.microsoft.com/office/drawing/2014/main" id="{DA13FF44-C988-4C13-BCCB-C8B090905246}"/>
-              </a:ext>
-            </a:extLst>
-          </p:cNvPr>
+            <a:pPr>
+              <a:defRPr/>
+            </a:pPr>
+            <a:endParaRPr lang="en-US">
+              <a:solidFill>
+                <a:prstClr val="black">
+                  <a:tint val="75000"/>
+                </a:prstClr>
+              </a:solidFill>
+            </a:endParaRPr>
+          </a:p>
+        </p:txBody>
+      </p:sp>
+      <p:sp>
+        <p:nvSpPr>
+          <p:cNvPr id="7" name="Slide Number Placeholder 6"/>
           <p:cNvSpPr>
             <a:spLocks noGrp="1"/>
           </p:cNvSpPr>
@@ -3779,18 +8319,36 @@
           <a:bodyPr/>
           <a:lstStyle/>
           <a:p>
-            <a:fld id="{0198E33A-3E23-44AC-B0F1-7EE9715F20F1}" type="slidenum">
-              <a:rPr lang="en-US" smtClean="0"/>
+            <a:pPr>
+              <a:defRPr/>
+            </a:pPr>
+            <a:fld id="{52669F0D-795E-449C-AD68-9797EE4A94EB}" type="slidenum">
+              <a:rPr lang="en-US" smtClean="0">
+                <a:solidFill>
+                  <a:prstClr val="black">
+                    <a:tint val="75000"/>
+                  </a:prstClr>
+                </a:solidFill>
+              </a:rPr>
+              <a:pPr>
+                <a:defRPr/>
+              </a:pPr>
               <a:t>‹#›</a:t>
             </a:fld>
-            <a:endParaRPr lang="en-US"/>
+            <a:endParaRPr lang="en-US">
+              <a:solidFill>
+                <a:prstClr val="black">
+                  <a:tint val="75000"/>
+                </a:prstClr>
+              </a:solidFill>
+            </a:endParaRPr>
           </a:p>
         </p:txBody>
       </p:sp>
     </p:spTree>
     <p:extLst>
       <p:ext uri="{BB962C8B-B14F-4D97-AF65-F5344CB8AC3E}">
-        <p14:creationId xmlns:p14="http://schemas.microsoft.com/office/powerpoint/2010/main" val="1452244113"/>
+        <p14:creationId xmlns:p14="http://schemas.microsoft.com/office/powerpoint/2010/main" val="4145164808"/>
       </p:ext>
     </p:extLst>
   </p:cSld>
@@ -3824,6 +8382,546 @@
       </p:grpSpPr>
       <p:sp>
         <p:nvSpPr>
+          <p:cNvPr id="2" name="Title Placeholder 1"/>
+          <p:cNvSpPr>
+            <a:spLocks noGrp="1"/>
+          </p:cNvSpPr>
+          <p:nvPr>
+            <p:ph type="title"/>
+          </p:nvPr>
+        </p:nvSpPr>
+        <p:spPr>
+          <a:xfrm>
+            <a:off x="628651" y="365129"/>
+            <a:ext cx="7886700" cy="1325563"/>
+          </a:xfrm>
+          <a:prstGeom prst="rect">
+            <a:avLst/>
+          </a:prstGeom>
+        </p:spPr>
+        <p:txBody>
+          <a:bodyPr vert="horz" lIns="91440" tIns="45720" rIns="91440" bIns="45720" rtlCol="0" anchor="ctr">
+            <a:normAutofit/>
+          </a:bodyPr>
+          <a:lstStyle/>
+          <a:p>
+            <a:r>
+              <a:rPr lang="en-US" smtClean="0"/>
+              <a:t>Click to edit Master title style</a:t>
+            </a:r>
+            <a:endParaRPr lang="en-US" dirty="0"/>
+          </a:p>
+        </p:txBody>
+      </p:sp>
+      <p:sp>
+        <p:nvSpPr>
+          <p:cNvPr id="3" name="Text Placeholder 2"/>
+          <p:cNvSpPr>
+            <a:spLocks noGrp="1"/>
+          </p:cNvSpPr>
+          <p:nvPr>
+            <p:ph type="body" idx="1"/>
+          </p:nvPr>
+        </p:nvSpPr>
+        <p:spPr>
+          <a:xfrm>
+            <a:off x="628651" y="1825625"/>
+            <a:ext cx="7886700" cy="4351338"/>
+          </a:xfrm>
+          <a:prstGeom prst="rect">
+            <a:avLst/>
+          </a:prstGeom>
+        </p:spPr>
+        <p:txBody>
+          <a:bodyPr vert="horz" lIns="91440" tIns="45720" rIns="91440" bIns="45720" rtlCol="0">
+            <a:normAutofit/>
+          </a:bodyPr>
+          <a:lstStyle/>
+          <a:p>
+            <a:pPr lvl="0"/>
+            <a:r>
+              <a:rPr lang="en-US" smtClean="0"/>
+              <a:t>Edit Master text styles</a:t>
+            </a:r>
+          </a:p>
+          <a:p>
+            <a:pPr lvl="1"/>
+            <a:r>
+              <a:rPr lang="en-US" smtClean="0"/>
+              <a:t>Second level</a:t>
+            </a:r>
+          </a:p>
+          <a:p>
+            <a:pPr lvl="2"/>
+            <a:r>
+              <a:rPr lang="en-US" smtClean="0"/>
+              <a:t>Third level</a:t>
+            </a:r>
+          </a:p>
+          <a:p>
+            <a:pPr lvl="3"/>
+            <a:r>
+              <a:rPr lang="en-US" smtClean="0"/>
+              <a:t>Fourth level</a:t>
+            </a:r>
+          </a:p>
+          <a:p>
+            <a:pPr lvl="4"/>
+            <a:r>
+              <a:rPr lang="en-US" smtClean="0"/>
+              <a:t>Fifth level</a:t>
+            </a:r>
+            <a:endParaRPr lang="en-US" dirty="0"/>
+          </a:p>
+        </p:txBody>
+      </p:sp>
+      <p:sp>
+        <p:nvSpPr>
+          <p:cNvPr id="4" name="Date Placeholder 3"/>
+          <p:cNvSpPr>
+            <a:spLocks noGrp="1"/>
+          </p:cNvSpPr>
+          <p:nvPr>
+            <p:ph type="dt" sz="half" idx="2"/>
+          </p:nvPr>
+        </p:nvSpPr>
+        <p:spPr>
+          <a:xfrm>
+            <a:off x="628651" y="6356354"/>
+            <a:ext cx="2057400" cy="365125"/>
+          </a:xfrm>
+          <a:prstGeom prst="rect">
+            <a:avLst/>
+          </a:prstGeom>
+        </p:spPr>
+        <p:txBody>
+          <a:bodyPr vert="horz" lIns="91440" tIns="45720" rIns="91440" bIns="45720" rtlCol="0" anchor="ctr"/>
+          <a:lstStyle>
+            <a:lvl1pPr algn="l">
+              <a:defRPr sz="675">
+                <a:solidFill>
+                  <a:schemeClr val="tx1">
+                    <a:tint val="75000"/>
+                  </a:schemeClr>
+                </a:solidFill>
+              </a:defRPr>
+            </a:lvl1pPr>
+          </a:lstStyle>
+          <a:p>
+            <a:fld id="{625DED5C-A84D-480A-A1E4-45CC1BC2F9C5}" type="datetimeFigureOut">
+              <a:rPr lang="en-US" smtClean="0"/>
+              <a:t>05/10/2025</a:t>
+            </a:fld>
+            <a:endParaRPr lang="en-US"/>
+          </a:p>
+        </p:txBody>
+      </p:sp>
+      <p:sp>
+        <p:nvSpPr>
+          <p:cNvPr id="5" name="Footer Placeholder 4"/>
+          <p:cNvSpPr>
+            <a:spLocks noGrp="1"/>
+          </p:cNvSpPr>
+          <p:nvPr>
+            <p:ph type="ftr" sz="quarter" idx="3"/>
+          </p:nvPr>
+        </p:nvSpPr>
+        <p:spPr>
+          <a:xfrm>
+            <a:off x="3028951" y="6356354"/>
+            <a:ext cx="3086100" cy="365125"/>
+          </a:xfrm>
+          <a:prstGeom prst="rect">
+            <a:avLst/>
+          </a:prstGeom>
+        </p:spPr>
+        <p:txBody>
+          <a:bodyPr vert="horz" lIns="91440" tIns="45720" rIns="91440" bIns="45720" rtlCol="0" anchor="ctr"/>
+          <a:lstStyle>
+            <a:lvl1pPr algn="ctr">
+              <a:defRPr sz="675">
+                <a:solidFill>
+                  <a:schemeClr val="tx1">
+                    <a:tint val="75000"/>
+                  </a:schemeClr>
+                </a:solidFill>
+              </a:defRPr>
+            </a:lvl1pPr>
+          </a:lstStyle>
+          <a:p>
+            <a:endParaRPr lang="en-US"/>
+          </a:p>
+        </p:txBody>
+      </p:sp>
+      <p:sp>
+        <p:nvSpPr>
+          <p:cNvPr id="6" name="Slide Number Placeholder 5"/>
+          <p:cNvSpPr>
+            <a:spLocks noGrp="1"/>
+          </p:cNvSpPr>
+          <p:nvPr>
+            <p:ph type="sldNum" sz="quarter" idx="4"/>
+          </p:nvPr>
+        </p:nvSpPr>
+        <p:spPr>
+          <a:xfrm>
+            <a:off x="6457951" y="6356354"/>
+            <a:ext cx="2057400" cy="365125"/>
+          </a:xfrm>
+          <a:prstGeom prst="rect">
+            <a:avLst/>
+          </a:prstGeom>
+        </p:spPr>
+        <p:txBody>
+          <a:bodyPr vert="horz" lIns="91440" tIns="45720" rIns="91440" bIns="45720" rtlCol="0" anchor="ctr"/>
+          <a:lstStyle>
+            <a:lvl1pPr algn="r">
+              <a:defRPr sz="675">
+                <a:solidFill>
+                  <a:schemeClr val="tx1">
+                    <a:tint val="75000"/>
+                  </a:schemeClr>
+                </a:solidFill>
+              </a:defRPr>
+            </a:lvl1pPr>
+          </a:lstStyle>
+          <a:p>
+            <a:fld id="{252BA146-09C3-4A90-B3C0-05910C12EF09}" type="slidenum">
+              <a:rPr lang="en-US" smtClean="0"/>
+              <a:t>‹#›</a:t>
+            </a:fld>
+            <a:endParaRPr lang="en-US"/>
+          </a:p>
+        </p:txBody>
+      </p:sp>
+    </p:spTree>
+    <p:extLst>
+      <p:ext uri="{BB962C8B-B14F-4D97-AF65-F5344CB8AC3E}">
+        <p14:creationId xmlns:p14="http://schemas.microsoft.com/office/powerpoint/2010/main" val="2972805620"/>
+      </p:ext>
+    </p:extLst>
+  </p:cSld>
+  <p:clrMap bg1="lt1" tx1="dk1" bg2="lt2" tx2="dk2" accent1="accent1" accent2="accent2" accent3="accent3" accent4="accent4" accent5="accent5" accent6="accent6" hlink="hlink" folHlink="folHlink"/>
+  <p:sldLayoutIdLst>
+    <p:sldLayoutId id="2147483697" r:id="rId1"/>
+    <p:sldLayoutId id="2147483698" r:id="rId2"/>
+    <p:sldLayoutId id="2147483699" r:id="rId3"/>
+    <p:sldLayoutId id="2147483700" r:id="rId4"/>
+    <p:sldLayoutId id="2147483701" r:id="rId5"/>
+    <p:sldLayoutId id="2147483702" r:id="rId6"/>
+    <p:sldLayoutId id="2147483703" r:id="rId7"/>
+    <p:sldLayoutId id="2147483704" r:id="rId8"/>
+    <p:sldLayoutId id="2147483705" r:id="rId9"/>
+    <p:sldLayoutId id="2147483706" r:id="rId10"/>
+    <p:sldLayoutId id="2147483707" r:id="rId11"/>
+  </p:sldLayoutIdLst>
+  <p:txStyles>
+    <p:titleStyle>
+      <a:lvl1pPr algn="l" defTabSz="514350" rtl="0" eaLnBrk="1" latinLnBrk="0" hangingPunct="1">
+        <a:lnSpc>
+          <a:spcPct val="90000"/>
+        </a:lnSpc>
+        <a:spcBef>
+          <a:spcPct val="0"/>
+        </a:spcBef>
+        <a:buNone/>
+        <a:defRPr sz="2475" kern="1200">
+          <a:solidFill>
+            <a:schemeClr val="tx1"/>
+          </a:solidFill>
+          <a:latin typeface="+mj-lt"/>
+          <a:ea typeface="+mj-ea"/>
+          <a:cs typeface="+mj-cs"/>
+        </a:defRPr>
+      </a:lvl1pPr>
+    </p:titleStyle>
+    <p:bodyStyle>
+      <a:lvl1pPr marL="128588" indent="-128588" algn="l" defTabSz="514350" rtl="0" eaLnBrk="1" latinLnBrk="0" hangingPunct="1">
+        <a:lnSpc>
+          <a:spcPct val="90000"/>
+        </a:lnSpc>
+        <a:spcBef>
+          <a:spcPts val="563"/>
+        </a:spcBef>
+        <a:buFont typeface="Arial" panose="020B0604020202020204" pitchFamily="34" charset="0"/>
+        <a:buChar char="•"/>
+        <a:defRPr sz="1575" kern="1200">
+          <a:solidFill>
+            <a:schemeClr val="tx1"/>
+          </a:solidFill>
+          <a:latin typeface="+mn-lt"/>
+          <a:ea typeface="+mn-ea"/>
+          <a:cs typeface="+mn-cs"/>
+        </a:defRPr>
+      </a:lvl1pPr>
+      <a:lvl2pPr marL="385763" indent="-128588" algn="l" defTabSz="514350" rtl="0" eaLnBrk="1" latinLnBrk="0" hangingPunct="1">
+        <a:lnSpc>
+          <a:spcPct val="90000"/>
+        </a:lnSpc>
+        <a:spcBef>
+          <a:spcPts val="281"/>
+        </a:spcBef>
+        <a:buFont typeface="Arial" panose="020B0604020202020204" pitchFamily="34" charset="0"/>
+        <a:buChar char="•"/>
+        <a:defRPr sz="1350" kern="1200">
+          <a:solidFill>
+            <a:schemeClr val="tx1"/>
+          </a:solidFill>
+          <a:latin typeface="+mn-lt"/>
+          <a:ea typeface="+mn-ea"/>
+          <a:cs typeface="+mn-cs"/>
+        </a:defRPr>
+      </a:lvl2pPr>
+      <a:lvl3pPr marL="642938" indent="-128588" algn="l" defTabSz="514350" rtl="0" eaLnBrk="1" latinLnBrk="0" hangingPunct="1">
+        <a:lnSpc>
+          <a:spcPct val="90000"/>
+        </a:lnSpc>
+        <a:spcBef>
+          <a:spcPts val="281"/>
+        </a:spcBef>
+        <a:buFont typeface="Arial" panose="020B0604020202020204" pitchFamily="34" charset="0"/>
+        <a:buChar char="•"/>
+        <a:defRPr sz="1125" kern="1200">
+          <a:solidFill>
+            <a:schemeClr val="tx1"/>
+          </a:solidFill>
+          <a:latin typeface="+mn-lt"/>
+          <a:ea typeface="+mn-ea"/>
+          <a:cs typeface="+mn-cs"/>
+        </a:defRPr>
+      </a:lvl3pPr>
+      <a:lvl4pPr marL="900113" indent="-128588" algn="l" defTabSz="514350" rtl="0" eaLnBrk="1" latinLnBrk="0" hangingPunct="1">
+        <a:lnSpc>
+          <a:spcPct val="90000"/>
+        </a:lnSpc>
+        <a:spcBef>
+          <a:spcPts val="281"/>
+        </a:spcBef>
+        <a:buFont typeface="Arial" panose="020B0604020202020204" pitchFamily="34" charset="0"/>
+        <a:buChar char="•"/>
+        <a:defRPr sz="1013" kern="1200">
+          <a:solidFill>
+            <a:schemeClr val="tx1"/>
+          </a:solidFill>
+          <a:latin typeface="+mn-lt"/>
+          <a:ea typeface="+mn-ea"/>
+          <a:cs typeface="+mn-cs"/>
+        </a:defRPr>
+      </a:lvl4pPr>
+      <a:lvl5pPr marL="1157288" indent="-128588" algn="l" defTabSz="514350" rtl="0" eaLnBrk="1" latinLnBrk="0" hangingPunct="1">
+        <a:lnSpc>
+          <a:spcPct val="90000"/>
+        </a:lnSpc>
+        <a:spcBef>
+          <a:spcPts val="281"/>
+        </a:spcBef>
+        <a:buFont typeface="Arial" panose="020B0604020202020204" pitchFamily="34" charset="0"/>
+        <a:buChar char="•"/>
+        <a:defRPr sz="1013" kern="1200">
+          <a:solidFill>
+            <a:schemeClr val="tx1"/>
+          </a:solidFill>
+          <a:latin typeface="+mn-lt"/>
+          <a:ea typeface="+mn-ea"/>
+          <a:cs typeface="+mn-cs"/>
+        </a:defRPr>
+      </a:lvl5pPr>
+      <a:lvl6pPr marL="1414463" indent="-128588" algn="l" defTabSz="514350" rtl="0" eaLnBrk="1" latinLnBrk="0" hangingPunct="1">
+        <a:lnSpc>
+          <a:spcPct val="90000"/>
+        </a:lnSpc>
+        <a:spcBef>
+          <a:spcPts val="281"/>
+        </a:spcBef>
+        <a:buFont typeface="Arial" panose="020B0604020202020204" pitchFamily="34" charset="0"/>
+        <a:buChar char="•"/>
+        <a:defRPr sz="1013" kern="1200">
+          <a:solidFill>
+            <a:schemeClr val="tx1"/>
+          </a:solidFill>
+          <a:latin typeface="+mn-lt"/>
+          <a:ea typeface="+mn-ea"/>
+          <a:cs typeface="+mn-cs"/>
+        </a:defRPr>
+      </a:lvl6pPr>
+      <a:lvl7pPr marL="1671638" indent="-128588" algn="l" defTabSz="514350" rtl="0" eaLnBrk="1" latinLnBrk="0" hangingPunct="1">
+        <a:lnSpc>
+          <a:spcPct val="90000"/>
+        </a:lnSpc>
+        <a:spcBef>
+          <a:spcPts val="281"/>
+        </a:spcBef>
+        <a:buFont typeface="Arial" panose="020B0604020202020204" pitchFamily="34" charset="0"/>
+        <a:buChar char="•"/>
+        <a:defRPr sz="1013" kern="1200">
+          <a:solidFill>
+            <a:schemeClr val="tx1"/>
+          </a:solidFill>
+          <a:latin typeface="+mn-lt"/>
+          <a:ea typeface="+mn-ea"/>
+          <a:cs typeface="+mn-cs"/>
+        </a:defRPr>
+      </a:lvl7pPr>
+      <a:lvl8pPr marL="1928813" indent="-128588" algn="l" defTabSz="514350" rtl="0" eaLnBrk="1" latinLnBrk="0" hangingPunct="1">
+        <a:lnSpc>
+          <a:spcPct val="90000"/>
+        </a:lnSpc>
+        <a:spcBef>
+          <a:spcPts val="281"/>
+        </a:spcBef>
+        <a:buFont typeface="Arial" panose="020B0604020202020204" pitchFamily="34" charset="0"/>
+        <a:buChar char="•"/>
+        <a:defRPr sz="1013" kern="1200">
+          <a:solidFill>
+            <a:schemeClr val="tx1"/>
+          </a:solidFill>
+          <a:latin typeface="+mn-lt"/>
+          <a:ea typeface="+mn-ea"/>
+          <a:cs typeface="+mn-cs"/>
+        </a:defRPr>
+      </a:lvl8pPr>
+      <a:lvl9pPr marL="2185988" indent="-128588" algn="l" defTabSz="514350" rtl="0" eaLnBrk="1" latinLnBrk="0" hangingPunct="1">
+        <a:lnSpc>
+          <a:spcPct val="90000"/>
+        </a:lnSpc>
+        <a:spcBef>
+          <a:spcPts val="281"/>
+        </a:spcBef>
+        <a:buFont typeface="Arial" panose="020B0604020202020204" pitchFamily="34" charset="0"/>
+        <a:buChar char="•"/>
+        <a:defRPr sz="1013" kern="1200">
+          <a:solidFill>
+            <a:schemeClr val="tx1"/>
+          </a:solidFill>
+          <a:latin typeface="+mn-lt"/>
+          <a:ea typeface="+mn-ea"/>
+          <a:cs typeface="+mn-cs"/>
+        </a:defRPr>
+      </a:lvl9pPr>
+    </p:bodyStyle>
+    <p:otherStyle>
+      <a:defPPr>
+        <a:defRPr lang="en-US"/>
+      </a:defPPr>
+      <a:lvl1pPr marL="0" algn="l" defTabSz="514350" rtl="0" eaLnBrk="1" latinLnBrk="0" hangingPunct="1">
+        <a:defRPr sz="1013" kern="1200">
+          <a:solidFill>
+            <a:schemeClr val="tx1"/>
+          </a:solidFill>
+          <a:latin typeface="+mn-lt"/>
+          <a:ea typeface="+mn-ea"/>
+          <a:cs typeface="+mn-cs"/>
+        </a:defRPr>
+      </a:lvl1pPr>
+      <a:lvl2pPr marL="257175" algn="l" defTabSz="514350" rtl="0" eaLnBrk="1" latinLnBrk="0" hangingPunct="1">
+        <a:defRPr sz="1013" kern="1200">
+          <a:solidFill>
+            <a:schemeClr val="tx1"/>
+          </a:solidFill>
+          <a:latin typeface="+mn-lt"/>
+          <a:ea typeface="+mn-ea"/>
+          <a:cs typeface="+mn-cs"/>
+        </a:defRPr>
+      </a:lvl2pPr>
+      <a:lvl3pPr marL="514350" algn="l" defTabSz="514350" rtl="0" eaLnBrk="1" latinLnBrk="0" hangingPunct="1">
+        <a:defRPr sz="1013" kern="1200">
+          <a:solidFill>
+            <a:schemeClr val="tx1"/>
+          </a:solidFill>
+          <a:latin typeface="+mn-lt"/>
+          <a:ea typeface="+mn-ea"/>
+          <a:cs typeface="+mn-cs"/>
+        </a:defRPr>
+      </a:lvl3pPr>
+      <a:lvl4pPr marL="771525" algn="l" defTabSz="514350" rtl="0" eaLnBrk="1" latinLnBrk="0" hangingPunct="1">
+        <a:defRPr sz="1013" kern="1200">
+          <a:solidFill>
+            <a:schemeClr val="tx1"/>
+          </a:solidFill>
+          <a:latin typeface="+mn-lt"/>
+          <a:ea typeface="+mn-ea"/>
+          <a:cs typeface="+mn-cs"/>
+        </a:defRPr>
+      </a:lvl4pPr>
+      <a:lvl5pPr marL="1028700" algn="l" defTabSz="514350" rtl="0" eaLnBrk="1" latinLnBrk="0" hangingPunct="1">
+        <a:defRPr sz="1013" kern="1200">
+          <a:solidFill>
+            <a:schemeClr val="tx1"/>
+          </a:solidFill>
+          <a:latin typeface="+mn-lt"/>
+          <a:ea typeface="+mn-ea"/>
+          <a:cs typeface="+mn-cs"/>
+        </a:defRPr>
+      </a:lvl5pPr>
+      <a:lvl6pPr marL="1285875" algn="l" defTabSz="514350" rtl="0" eaLnBrk="1" latinLnBrk="0" hangingPunct="1">
+        <a:defRPr sz="1013" kern="1200">
+          <a:solidFill>
+            <a:schemeClr val="tx1"/>
+          </a:solidFill>
+          <a:latin typeface="+mn-lt"/>
+          <a:ea typeface="+mn-ea"/>
+          <a:cs typeface="+mn-cs"/>
+        </a:defRPr>
+      </a:lvl6pPr>
+      <a:lvl7pPr marL="1543050" algn="l" defTabSz="514350" rtl="0" eaLnBrk="1" latinLnBrk="0" hangingPunct="1">
+        <a:defRPr sz="1013" kern="1200">
+          <a:solidFill>
+            <a:schemeClr val="tx1"/>
+          </a:solidFill>
+          <a:latin typeface="+mn-lt"/>
+          <a:ea typeface="+mn-ea"/>
+          <a:cs typeface="+mn-cs"/>
+        </a:defRPr>
+      </a:lvl7pPr>
+      <a:lvl8pPr marL="1800225" algn="l" defTabSz="514350" rtl="0" eaLnBrk="1" latinLnBrk="0" hangingPunct="1">
+        <a:defRPr sz="1013" kern="1200">
+          <a:solidFill>
+            <a:schemeClr val="tx1"/>
+          </a:solidFill>
+          <a:latin typeface="+mn-lt"/>
+          <a:ea typeface="+mn-ea"/>
+          <a:cs typeface="+mn-cs"/>
+        </a:defRPr>
+      </a:lvl8pPr>
+      <a:lvl9pPr marL="2057400" algn="l" defTabSz="514350" rtl="0" eaLnBrk="1" latinLnBrk="0" hangingPunct="1">
+        <a:defRPr sz="1013" kern="1200">
+          <a:solidFill>
+            <a:schemeClr val="tx1"/>
+          </a:solidFill>
+          <a:latin typeface="+mn-lt"/>
+          <a:ea typeface="+mn-ea"/>
+          <a:cs typeface="+mn-cs"/>
+        </a:defRPr>
+      </a:lvl9pPr>
+    </p:otherStyle>
+  </p:txStyles>
+</p:sldMaster>
+</file>
+
+<file path=ppt/slideMasters/slideMaster2.xml><?xml version="1.0" encoding="utf-8"?>
+<p:sldMaster xmlns:a="http://schemas.openxmlformats.org/drawingml/2006/main" xmlns:r="http://schemas.openxmlformats.org/officeDocument/2006/relationships" xmlns:p="http://schemas.openxmlformats.org/presentationml/2006/main">
+  <p:cSld>
+    <p:bg>
+      <p:bgRef idx="1001">
+        <a:schemeClr val="bg1"/>
+      </p:bgRef>
+    </p:bg>
+    <p:spTree>
+      <p:nvGrpSpPr>
+        <p:cNvPr id="1" name=""/>
+        <p:cNvGrpSpPr/>
+        <p:nvPr/>
+      </p:nvGrpSpPr>
+      <p:grpSpPr>
+        <a:xfrm>
+          <a:off x="0" y="0"/>
+          <a:ext cx="0" cy="0"/>
+          <a:chOff x="0" y="0"/>
+          <a:chExt cx="0" cy="0"/>
+        </a:xfrm>
+      </p:grpSpPr>
+      <p:sp>
+        <p:nvSpPr>
           <p:cNvPr id="2" name="Title Placeholder 1">
             <a:extLst>
               <a:ext uri="{FF2B5EF4-FFF2-40B4-BE49-F238E27FC236}">
@@ -3966,11 +9064,75 @@
             </a:lvl1pPr>
           </a:lstStyle>
           <a:p>
-            <a:fld id="{0499211D-10D7-4F49-ADEF-55BEAD014249}" type="datetimeFigureOut">
-              <a:rPr lang="en-US" smtClean="0"/>
-              <a:t>14/09/2025</a:t>
+            <a:pPr marL="0" marR="0" lvl="0" indent="0" algn="l" defTabSz="914400" rtl="0" eaLnBrk="1" fontAlgn="auto" latinLnBrk="0" hangingPunct="1">
+              <a:lnSpc>
+                <a:spcPct val="100000"/>
+              </a:lnSpc>
+              <a:spcBef>
+                <a:spcPts val="0"/>
+              </a:spcBef>
+              <a:spcAft>
+                <a:spcPts val="0"/>
+              </a:spcAft>
+              <a:buClrTx/>
+              <a:buSzTx/>
+              <a:buFontTx/>
+              <a:buNone/>
+              <a:tabLst/>
+              <a:defRPr/>
+            </a:pPr>
+            <a:fld id="{9285AD09-59D5-478E-BFB4-5748C04604E9}" type="datetimeFigureOut">
+              <a:rPr kumimoji="0" lang="en-US" sz="900" b="0" i="0" u="none" strike="noStrike" kern="1200" cap="none" spc="0" normalizeH="0" baseline="0" noProof="0" smtClean="0">
+                <a:ln>
+                  <a:noFill/>
+                </a:ln>
+                <a:solidFill>
+                  <a:prstClr val="black">
+                    <a:tint val="75000"/>
+                  </a:prstClr>
+                </a:solidFill>
+                <a:effectLst/>
+                <a:uLnTx/>
+                <a:uFillTx/>
+                <a:latin typeface="Calibri" panose="020F0502020204030204"/>
+                <a:ea typeface="+mn-ea"/>
+                <a:cs typeface="+mn-cs"/>
+              </a:rPr>
+              <a:pPr marL="0" marR="0" lvl="0" indent="0" algn="l" defTabSz="914400" rtl="0" eaLnBrk="1" fontAlgn="auto" latinLnBrk="0" hangingPunct="1">
+                <a:lnSpc>
+                  <a:spcPct val="100000"/>
+                </a:lnSpc>
+                <a:spcBef>
+                  <a:spcPts val="0"/>
+                </a:spcBef>
+                <a:spcAft>
+                  <a:spcPts val="0"/>
+                </a:spcAft>
+                <a:buClrTx/>
+                <a:buSzTx/>
+                <a:buFontTx/>
+                <a:buNone/>
+                <a:tabLst/>
+                <a:defRPr/>
+              </a:pPr>
+              <a:t>05/10/2025</a:t>
             </a:fld>
-            <a:endParaRPr lang="en-US"/>
+            <a:endParaRPr kumimoji="0" lang="en-US" sz="900" b="0" i="0" u="none" strike="noStrike" kern="1200" cap="none" spc="0" normalizeH="0" baseline="0" noProof="0">
+              <a:ln>
+                <a:noFill/>
+              </a:ln>
+              <a:solidFill>
+                <a:prstClr val="black">
+                  <a:tint val="75000"/>
+                </a:prstClr>
+              </a:solidFill>
+              <a:effectLst/>
+              <a:uLnTx/>
+              <a:uFillTx/>
+              <a:latin typeface="Calibri" panose="020F0502020204030204"/>
+              <a:ea typeface="+mn-ea"/>
+              <a:cs typeface="+mn-cs"/>
+            </a:endParaRPr>
           </a:p>
         </p:txBody>
       </p:sp>
@@ -4013,7 +9175,39 @@
             </a:lvl1pPr>
           </a:lstStyle>
           <a:p>
-            <a:endParaRPr lang="en-US"/>
+            <a:pPr marL="0" marR="0" lvl="0" indent="0" algn="ctr" defTabSz="914400" rtl="0" eaLnBrk="1" fontAlgn="auto" latinLnBrk="0" hangingPunct="1">
+              <a:lnSpc>
+                <a:spcPct val="100000"/>
+              </a:lnSpc>
+              <a:spcBef>
+                <a:spcPts val="0"/>
+              </a:spcBef>
+              <a:spcAft>
+                <a:spcPts val="0"/>
+              </a:spcAft>
+              <a:buClrTx/>
+              <a:buSzTx/>
+              <a:buFontTx/>
+              <a:buNone/>
+              <a:tabLst/>
+              <a:defRPr/>
+            </a:pPr>
+            <a:endParaRPr kumimoji="0" lang="en-US" sz="900" b="0" i="0" u="none" strike="noStrike" kern="1200" cap="none" spc="0" normalizeH="0" baseline="0" noProof="0">
+              <a:ln>
+                <a:noFill/>
+              </a:ln>
+              <a:solidFill>
+                <a:prstClr val="black">
+                  <a:tint val="75000"/>
+                </a:prstClr>
+              </a:solidFill>
+              <a:effectLst/>
+              <a:uLnTx/>
+              <a:uFillTx/>
+              <a:latin typeface="Calibri" panose="020F0502020204030204"/>
+              <a:ea typeface="+mn-ea"/>
+              <a:cs typeface="+mn-cs"/>
+            </a:endParaRPr>
           </a:p>
         </p:txBody>
       </p:sp>
@@ -4056,34 +9250,98 @@
             </a:lvl1pPr>
           </a:lstStyle>
           <a:p>
-            <a:fld id="{0198E33A-3E23-44AC-B0F1-7EE9715F20F1}" type="slidenum">
-              <a:rPr lang="en-US" smtClean="0"/>
+            <a:pPr marL="0" marR="0" lvl="0" indent="0" algn="r" defTabSz="914400" rtl="0" eaLnBrk="1" fontAlgn="auto" latinLnBrk="0" hangingPunct="1">
+              <a:lnSpc>
+                <a:spcPct val="100000"/>
+              </a:lnSpc>
+              <a:spcBef>
+                <a:spcPts val="0"/>
+              </a:spcBef>
+              <a:spcAft>
+                <a:spcPts val="0"/>
+              </a:spcAft>
+              <a:buClrTx/>
+              <a:buSzTx/>
+              <a:buFontTx/>
+              <a:buNone/>
+              <a:tabLst/>
+              <a:defRPr/>
+            </a:pPr>
+            <a:fld id="{52669F0D-795E-449C-AD68-9797EE4A94EB}" type="slidenum">
+              <a:rPr kumimoji="0" lang="en-US" sz="900" b="0" i="0" u="none" strike="noStrike" kern="1200" cap="none" spc="0" normalizeH="0" baseline="0" noProof="0" smtClean="0">
+                <a:ln>
+                  <a:noFill/>
+                </a:ln>
+                <a:solidFill>
+                  <a:prstClr val="black">
+                    <a:tint val="75000"/>
+                  </a:prstClr>
+                </a:solidFill>
+                <a:effectLst/>
+                <a:uLnTx/>
+                <a:uFillTx/>
+                <a:latin typeface="Calibri" panose="020F0502020204030204"/>
+                <a:ea typeface="+mn-ea"/>
+                <a:cs typeface="+mn-cs"/>
+              </a:rPr>
+              <a:pPr marL="0" marR="0" lvl="0" indent="0" algn="r" defTabSz="914400" rtl="0" eaLnBrk="1" fontAlgn="auto" latinLnBrk="0" hangingPunct="1">
+                <a:lnSpc>
+                  <a:spcPct val="100000"/>
+                </a:lnSpc>
+                <a:spcBef>
+                  <a:spcPts val="0"/>
+                </a:spcBef>
+                <a:spcAft>
+                  <a:spcPts val="0"/>
+                </a:spcAft>
+                <a:buClrTx/>
+                <a:buSzTx/>
+                <a:buFontTx/>
+                <a:buNone/>
+                <a:tabLst/>
+                <a:defRPr/>
+              </a:pPr>
               <a:t>‹#›</a:t>
             </a:fld>
-            <a:endParaRPr lang="en-US"/>
+            <a:endParaRPr kumimoji="0" lang="en-US" sz="900" b="0" i="0" u="none" strike="noStrike" kern="1200" cap="none" spc="0" normalizeH="0" baseline="0" noProof="0">
+              <a:ln>
+                <a:noFill/>
+              </a:ln>
+              <a:solidFill>
+                <a:prstClr val="black">
+                  <a:tint val="75000"/>
+                </a:prstClr>
+              </a:solidFill>
+              <a:effectLst/>
+              <a:uLnTx/>
+              <a:uFillTx/>
+              <a:latin typeface="Calibri" panose="020F0502020204030204"/>
+              <a:ea typeface="+mn-ea"/>
+              <a:cs typeface="+mn-cs"/>
+            </a:endParaRPr>
           </a:p>
         </p:txBody>
       </p:sp>
     </p:spTree>
     <p:extLst>
       <p:ext uri="{BB962C8B-B14F-4D97-AF65-F5344CB8AC3E}">
-        <p14:creationId xmlns:p14="http://schemas.microsoft.com/office/powerpoint/2010/main" val="2486102826"/>
+        <p14:creationId xmlns:p14="http://schemas.microsoft.com/office/powerpoint/2010/main" val="1392605153"/>
       </p:ext>
     </p:extLst>
   </p:cSld>
   <p:clrMap bg1="lt1" tx1="dk1" bg2="lt2" tx2="dk2" accent1="accent1" accent2="accent2" accent3="accent3" accent4="accent4" accent5="accent5" accent6="accent6" hlink="hlink" folHlink="folHlink"/>
   <p:sldLayoutIdLst>
-    <p:sldLayoutId id="2147483709" r:id="rId1"/>
-    <p:sldLayoutId id="2147483710" r:id="rId2"/>
-    <p:sldLayoutId id="2147483711" r:id="rId3"/>
-    <p:sldLayoutId id="2147483712" r:id="rId4"/>
-    <p:sldLayoutId id="2147483713" r:id="rId5"/>
-    <p:sldLayoutId id="2147483714" r:id="rId6"/>
-    <p:sldLayoutId id="2147483715" r:id="rId7"/>
-    <p:sldLayoutId id="2147483716" r:id="rId8"/>
-    <p:sldLayoutId id="2147483717" r:id="rId9"/>
-    <p:sldLayoutId id="2147483718" r:id="rId10"/>
-    <p:sldLayoutId id="2147483719" r:id="rId11"/>
+    <p:sldLayoutId id="2147483733" r:id="rId1"/>
+    <p:sldLayoutId id="2147483734" r:id="rId2"/>
+    <p:sldLayoutId id="2147483735" r:id="rId3"/>
+    <p:sldLayoutId id="2147483736" r:id="rId4"/>
+    <p:sldLayoutId id="2147483737" r:id="rId5"/>
+    <p:sldLayoutId id="2147483738" r:id="rId6"/>
+    <p:sldLayoutId id="2147483739" r:id="rId7"/>
+    <p:sldLayoutId id="2147483740" r:id="rId8"/>
+    <p:sldLayoutId id="2147483741" r:id="rId9"/>
+    <p:sldLayoutId id="2147483742" r:id="rId10"/>
+    <p:sldLayoutId id="2147483743" r:id="rId11"/>
   </p:sldLayoutIdLst>
   <p:txStyles>
     <p:titleStyle>
@@ -4458,9 +9716,186 @@
           </a:p>
         </p:txBody>
       </p:sp>
+      <p:sp>
+        <p:nvSpPr>
+          <p:cNvPr id="2" name="Rectangle 1"/>
+          <p:cNvSpPr/>
+          <p:nvPr/>
+        </p:nvSpPr>
+        <p:spPr>
+          <a:xfrm>
+            <a:off x="1453636" y="598208"/>
+            <a:ext cx="6476706" cy="889770"/>
+          </a:xfrm>
+          <a:prstGeom prst="rect">
+            <a:avLst/>
+          </a:prstGeom>
+          <a:noFill/>
+        </p:spPr>
+        <p:txBody>
+          <a:bodyPr wrap="none" lIns="91440" tIns="45720" rIns="91440" bIns="45720" numCol="1">
+            <a:prstTxWarp prst="textInflateBottom">
+              <a:avLst/>
+            </a:prstTxWarp>
+            <a:spAutoFit/>
+          </a:bodyPr>
+          <a:lstStyle/>
+          <a:p>
+            <a:pPr marL="0" marR="0" lvl="0" indent="0" algn="ctr" defTabSz="914400" rtl="0" eaLnBrk="1" fontAlgn="auto" latinLnBrk="0" hangingPunct="1">
+              <a:lnSpc>
+                <a:spcPct val="100000"/>
+              </a:lnSpc>
+              <a:spcBef>
+                <a:spcPts val="0"/>
+              </a:spcBef>
+              <a:spcAft>
+                <a:spcPts val="0"/>
+              </a:spcAft>
+              <a:buClrTx/>
+              <a:buSzTx/>
+              <a:buFontTx/>
+              <a:buNone/>
+              <a:tabLst/>
+              <a:defRPr/>
+            </a:pPr>
+            <a:r>
+              <a:rPr kumimoji="0" lang="en-US" sz="5400" b="1" i="0" u="none" strike="noStrike" kern="1200" cap="none" spc="0" normalizeH="0" baseline="0" noProof="0" dirty="0">
+                <a:ln w="9525">
+                  <a:solidFill>
+                    <a:prstClr val="white"/>
+                  </a:solidFill>
+                  <a:prstDash val="solid"/>
+                </a:ln>
+                <a:solidFill>
+                  <a:srgbClr val="5B9BD5"/>
+                </a:solidFill>
+                <a:effectLst>
+                  <a:outerShdw blurRad="12700" dist="38100" dir="2700000" algn="tl" rotWithShape="0">
+                    <a:srgbClr val="5B9BD5">
+                      <a:lumMod val="60000"/>
+                      <a:lumOff val="40000"/>
+                    </a:srgbClr>
+                  </a:outerShdw>
+                </a:effectLst>
+                <a:uLnTx/>
+                <a:uFillTx/>
+                <a:latin typeface="Arial" panose="020B0604020202020204" pitchFamily="34" charset="0"/>
+                <a:ea typeface="+mn-ea"/>
+                <a:cs typeface="Arial" panose="020B0604020202020204" pitchFamily="34" charset="0"/>
+              </a:rPr>
+              <a:t>THỦ ĐÔ HÀ NỘI</a:t>
+            </a:r>
+          </a:p>
+        </p:txBody>
+      </p:sp>
+      <p:sp>
+        <p:nvSpPr>
+          <p:cNvPr id="5" name="Rectangle 4">
+            <a:extLst>
+              <a:ext uri="{FF2B5EF4-FFF2-40B4-BE49-F238E27FC236}">
+                <a16:creationId xmlns:a16="http://schemas.microsoft.com/office/drawing/2014/main" id="{3864C02D-6610-4BAC-8C05-4B691B58E4D1}"/>
+              </a:ext>
+            </a:extLst>
+          </p:cNvPr>
+          <p:cNvSpPr/>
+          <p:nvPr/>
+        </p:nvSpPr>
+        <p:spPr>
+          <a:xfrm>
+            <a:off x="7930694" y="6411670"/>
+            <a:ext cx="1175322" cy="461665"/>
+          </a:xfrm>
+          <a:prstGeom prst="rect">
+            <a:avLst/>
+          </a:prstGeom>
+          <a:noFill/>
+        </p:spPr>
+        <p:txBody>
+          <a:bodyPr wrap="none" lIns="91440" tIns="45720" rIns="91440" bIns="45720">
+            <a:spAutoFit/>
+          </a:bodyPr>
+          <a:lstStyle/>
+          <a:p>
+            <a:pPr marL="0" marR="0" lvl="0" indent="0" algn="ctr" defTabSz="914400" rtl="0" eaLnBrk="1" fontAlgn="auto" latinLnBrk="0" hangingPunct="1">
+              <a:lnSpc>
+                <a:spcPct val="100000"/>
+              </a:lnSpc>
+              <a:spcBef>
+                <a:spcPts val="0"/>
+              </a:spcBef>
+              <a:spcAft>
+                <a:spcPts val="0"/>
+              </a:spcAft>
+              <a:buClrTx/>
+              <a:buSzTx/>
+              <a:buFontTx/>
+              <a:buNone/>
+              <a:tabLst/>
+              <a:defRPr/>
+            </a:pPr>
+            <a:r>
+              <a:rPr kumimoji="0" lang="en-US" sz="2400" b="1" i="0" u="none" strike="noStrike" kern="1200" cap="none" spc="0" normalizeH="0" baseline="0" noProof="0" dirty="0">
+                <a:ln w="12700" cmpd="sng">
+                  <a:solidFill>
+                    <a:srgbClr val="FFC000"/>
+                  </a:solidFill>
+                  <a:prstDash val="solid"/>
+                </a:ln>
+                <a:solidFill>
+                  <a:srgbClr val="FFFF00"/>
+                </a:solidFill>
+                <a:effectLst/>
+                <a:uLnTx/>
+                <a:uFillTx/>
+                <a:latin typeface="Arial" panose="020B0604020202020204" pitchFamily="34" charset="0"/>
+                <a:ea typeface="+mn-ea"/>
+                <a:cs typeface="Arial" panose="020B0604020202020204" pitchFamily="34" charset="0"/>
+              </a:rPr>
+              <a:t>Slide </a:t>
+            </a:r>
+            <a:r>
+              <a:rPr kumimoji="0" lang="en-US" sz="2400" b="1" i="0" u="none" strike="noStrike" kern="1200" cap="none" spc="0" normalizeH="0" baseline="0" noProof="0" dirty="0" smtClean="0">
+                <a:ln w="12700" cmpd="sng">
+                  <a:solidFill>
+                    <a:srgbClr val="FFC000"/>
+                  </a:solidFill>
+                  <a:prstDash val="solid"/>
+                </a:ln>
+                <a:solidFill>
+                  <a:srgbClr val="FFFF00"/>
+                </a:solidFill>
+                <a:effectLst/>
+                <a:uLnTx/>
+                <a:uFillTx/>
+                <a:latin typeface="Arial" panose="020B0604020202020204" pitchFamily="34" charset="0"/>
+                <a:ea typeface="+mn-ea"/>
+                <a:cs typeface="Arial" panose="020B0604020202020204" pitchFamily="34" charset="0"/>
+              </a:rPr>
+              <a:t>1</a:t>
+            </a:r>
+            <a:endParaRPr kumimoji="0" lang="en-US" sz="2400" b="1" i="0" u="none" strike="noStrike" kern="1200" cap="none" spc="0" normalizeH="0" baseline="0" noProof="0" dirty="0">
+              <a:ln w="12700" cmpd="sng">
+                <a:solidFill>
+                  <a:srgbClr val="FFC000"/>
+                </a:solidFill>
+                <a:prstDash val="solid"/>
+              </a:ln>
+              <a:solidFill>
+                <a:srgbClr val="FFFF00"/>
+              </a:solidFill>
+              <a:effectLst/>
+              <a:uLnTx/>
+              <a:uFillTx/>
+              <a:latin typeface="Arial" panose="020B0604020202020204" pitchFamily="34" charset="0"/>
+              <a:ea typeface="+mn-ea"/>
+              <a:cs typeface="Arial" panose="020B0604020202020204" pitchFamily="34" charset="0"/>
+            </a:endParaRPr>
+          </a:p>
+        </p:txBody>
+      </p:sp>
       <p:pic>
         <p:nvPicPr>
-          <p:cNvPr id="3" name="Picture 2" descr="A building next to a body of water&#10;&#10;Description automatically generated">
+          <p:cNvPr id="6" name="Picture 5" descr="A building next to a body of water&#10;&#10;Description automatically generated">
             <a:hlinkClick r:id="rId2" action="ppaction://hlinksldjump"/>
             <a:extLst>
               <a:ext uri="{FF2B5EF4-FFF2-40B4-BE49-F238E27FC236}">
@@ -4487,7 +9922,7 @@
         </p:blipFill>
         <p:spPr>
           <a:xfrm>
-            <a:off x="1714500" y="1419251"/>
+            <a:off x="1776300" y="1630432"/>
             <a:ext cx="5715000" cy="3629025"/>
           </a:xfrm>
           <a:prstGeom prst="rect">
@@ -4495,187 +9930,10 @@
           </a:prstGeom>
         </p:spPr>
       </p:pic>
-      <p:sp>
-        <p:nvSpPr>
-          <p:cNvPr id="2" name="Rectangle 1"/>
-          <p:cNvSpPr/>
-          <p:nvPr/>
-        </p:nvSpPr>
-        <p:spPr>
-          <a:xfrm>
-            <a:off x="1453636" y="598208"/>
-            <a:ext cx="6476706" cy="889770"/>
-          </a:xfrm>
-          <a:prstGeom prst="rect">
-            <a:avLst/>
-          </a:prstGeom>
-          <a:noFill/>
-        </p:spPr>
-        <p:txBody>
-          <a:bodyPr wrap="none" lIns="91440" tIns="45720" rIns="91440" bIns="45720" numCol="1">
-            <a:prstTxWarp prst="textInflateBottom">
-              <a:avLst/>
-            </a:prstTxWarp>
-            <a:spAutoFit/>
-          </a:bodyPr>
-          <a:lstStyle/>
-          <a:p>
-            <a:pPr marL="0" marR="0" lvl="0" indent="0" algn="ctr" defTabSz="914400" rtl="0" eaLnBrk="1" fontAlgn="auto" latinLnBrk="0" hangingPunct="1">
-              <a:lnSpc>
-                <a:spcPct val="100000"/>
-              </a:lnSpc>
-              <a:spcBef>
-                <a:spcPts val="0"/>
-              </a:spcBef>
-              <a:spcAft>
-                <a:spcPts val="0"/>
-              </a:spcAft>
-              <a:buClrTx/>
-              <a:buSzTx/>
-              <a:buFontTx/>
-              <a:buNone/>
-              <a:tabLst/>
-              <a:defRPr/>
-            </a:pPr>
-            <a:r>
-              <a:rPr kumimoji="0" lang="en-US" sz="5400" b="1" i="0" u="none" strike="noStrike" kern="1200" cap="none" spc="0" normalizeH="0" baseline="0" noProof="0" dirty="0">
-                <a:ln w="9525">
-                  <a:solidFill>
-                    <a:prstClr val="white"/>
-                  </a:solidFill>
-                  <a:prstDash val="solid"/>
-                </a:ln>
-                <a:solidFill>
-                  <a:srgbClr val="5B9BD5"/>
-                </a:solidFill>
-                <a:effectLst>
-                  <a:outerShdw blurRad="12700" dist="38100" dir="2700000" algn="tl" rotWithShape="0">
-                    <a:srgbClr val="5B9BD5">
-                      <a:lumMod val="60000"/>
-                      <a:lumOff val="40000"/>
-                    </a:srgbClr>
-                  </a:outerShdw>
-                </a:effectLst>
-                <a:uLnTx/>
-                <a:uFillTx/>
-                <a:latin typeface="Arial" panose="020B0604020202020204" pitchFamily="34" charset="0"/>
-                <a:ea typeface="+mn-ea"/>
-                <a:cs typeface="Arial" panose="020B0604020202020204" pitchFamily="34" charset="0"/>
-              </a:rPr>
-              <a:t>THỦ ĐÔ HÀ NỘI</a:t>
-            </a:r>
-          </a:p>
-        </p:txBody>
-      </p:sp>
-      <p:sp>
-        <p:nvSpPr>
-          <p:cNvPr id="5" name="Rectangle 4">
-            <a:extLst>
-              <a:ext uri="{FF2B5EF4-FFF2-40B4-BE49-F238E27FC236}">
-                <a16:creationId xmlns:a16="http://schemas.microsoft.com/office/drawing/2014/main" id="{3864C02D-6610-4BAC-8C05-4B691B58E4D1}"/>
-              </a:ext>
-            </a:extLst>
-          </p:cNvPr>
-          <p:cNvSpPr/>
-          <p:nvPr/>
-        </p:nvSpPr>
-        <p:spPr>
-          <a:xfrm>
-            <a:off x="7930694" y="6411670"/>
-            <a:ext cx="1175322" cy="461665"/>
-          </a:xfrm>
-          <a:prstGeom prst="rect">
-            <a:avLst/>
-          </a:prstGeom>
-          <a:noFill/>
-        </p:spPr>
-        <p:txBody>
-          <a:bodyPr wrap="none" lIns="91440" tIns="45720" rIns="91440" bIns="45720">
-            <a:spAutoFit/>
-          </a:bodyPr>
-          <a:lstStyle/>
-          <a:p>
-            <a:pPr marL="0" marR="0" lvl="0" indent="0" algn="ctr" defTabSz="914400" rtl="0" eaLnBrk="1" fontAlgn="auto" latinLnBrk="0" hangingPunct="1">
-              <a:lnSpc>
-                <a:spcPct val="100000"/>
-              </a:lnSpc>
-              <a:spcBef>
-                <a:spcPts val="0"/>
-              </a:spcBef>
-              <a:spcAft>
-                <a:spcPts val="0"/>
-              </a:spcAft>
-              <a:buClrTx/>
-              <a:buSzTx/>
-              <a:buFontTx/>
-              <a:buNone/>
-              <a:tabLst/>
-              <a:defRPr/>
-            </a:pPr>
-            <a:r>
-              <a:rPr kumimoji="0" lang="en-US" sz="2400" b="1" i="0" u="none" strike="noStrike" kern="1200" cap="none" spc="0" normalizeH="0" baseline="0" noProof="0">
-                <a:ln w="12700" cmpd="sng">
-                  <a:solidFill>
-                    <a:srgbClr val="FFC000"/>
-                  </a:solidFill>
-                  <a:prstDash val="solid"/>
-                </a:ln>
-                <a:solidFill>
-                  <a:srgbClr val="FFFF00"/>
-                </a:solidFill>
-                <a:effectLst/>
-                <a:uLnTx/>
-                <a:uFillTx/>
-                <a:latin typeface="Arial" panose="020B0604020202020204" pitchFamily="34" charset="0"/>
-                <a:ea typeface="+mn-ea"/>
-                <a:cs typeface="Arial" panose="020B0604020202020204" pitchFamily="34" charset="0"/>
-              </a:rPr>
-              <a:t>Slide </a:t>
-            </a:r>
-            <a:r>
-              <a:rPr kumimoji="0" lang="en-US" sz="2400" b="1" i="0" u="none" strike="noStrike" kern="1200" cap="none" spc="0" normalizeH="0" baseline="0" noProof="0" smtClean="0">
-                <a:ln w="12700" cmpd="sng">
-                  <a:solidFill>
-                    <a:srgbClr val="FFC000"/>
-                  </a:solidFill>
-                  <a:prstDash val="solid"/>
-                </a:ln>
-                <a:solidFill>
-                  <a:srgbClr val="FFFF00"/>
-                </a:solidFill>
-                <a:effectLst/>
-                <a:uLnTx/>
-                <a:uFillTx/>
-                <a:latin typeface="Arial" panose="020B0604020202020204" pitchFamily="34" charset="0"/>
-                <a:ea typeface="+mn-ea"/>
-                <a:cs typeface="Arial" panose="020B0604020202020204" pitchFamily="34" charset="0"/>
-              </a:rPr>
-              <a:t>1</a:t>
-            </a:r>
-            <a:endParaRPr kumimoji="0" lang="en-US" sz="2400" b="1" i="0" u="none" strike="noStrike" kern="1200" cap="none" spc="0" normalizeH="0" baseline="0" noProof="0">
-              <a:ln w="12700" cmpd="sng">
-                <a:solidFill>
-                  <a:srgbClr val="FFC000"/>
-                </a:solidFill>
-                <a:prstDash val="solid"/>
-              </a:ln>
-              <a:solidFill>
-                <a:srgbClr val="FFFF00"/>
-              </a:solidFill>
-              <a:effectLst/>
-              <a:uLnTx/>
-              <a:uFillTx/>
-              <a:latin typeface="Arial" panose="020B0604020202020204" pitchFamily="34" charset="0"/>
-              <a:ea typeface="+mn-ea"/>
-              <a:cs typeface="Arial" panose="020B0604020202020204" pitchFamily="34" charset="0"/>
-            </a:endParaRPr>
-          </a:p>
-        </p:txBody>
-      </p:sp>
     </p:spTree>
     <p:extLst>
       <p:ext uri="{BB962C8B-B14F-4D97-AF65-F5344CB8AC3E}">
-        <p14:creationId xmlns:p14="http://schemas.microsoft.com/office/powerpoint/2010/main" val="1948849215"/>
+        <p14:creationId xmlns:p14="http://schemas.microsoft.com/office/powerpoint/2010/main" val="351471116"/>
       </p:ext>
     </p:extLst>
   </p:cSld>
@@ -5162,7 +10420,7 @@
               <a:defRPr/>
             </a:pPr>
             <a:r>
-              <a:rPr kumimoji="0" lang="en-US" sz="2400" b="1" i="0" u="none" strike="noStrike" kern="1200" cap="none" spc="0" normalizeH="0" baseline="0" noProof="0">
+              <a:rPr kumimoji="0" lang="en-US" sz="2400" b="1" i="0" u="none" strike="noStrike" kern="1200" cap="none" spc="0" normalizeH="0" baseline="0" noProof="0" dirty="0">
                 <a:ln w="12700" cmpd="sng">
                   <a:solidFill>
                     <a:srgbClr val="FFC000"/>
@@ -5184,376 +10442,10 @@
           </a:p>
         </p:txBody>
       </p:sp>
-      <p:sp>
-        <p:nvSpPr>
-          <p:cNvPr id="4" name="Rectangle 3"/>
-          <p:cNvSpPr/>
-          <p:nvPr/>
-        </p:nvSpPr>
-        <p:spPr>
-          <a:xfrm>
-            <a:off x="713187" y="4244754"/>
-            <a:ext cx="7717627" cy="923330"/>
-          </a:xfrm>
-          <a:prstGeom prst="rect">
-            <a:avLst/>
-          </a:prstGeom>
-          <a:noFill/>
-        </p:spPr>
-        <p:txBody>
-          <a:bodyPr wrap="none" lIns="91440" tIns="45720" rIns="91440" bIns="45720" numCol="1">
-            <a:prstTxWarp prst="textStop">
-              <a:avLst/>
-            </a:prstTxWarp>
-            <a:spAutoFit/>
-          </a:bodyPr>
-          <a:lstStyle/>
-          <a:p>
-            <a:pPr marL="0" marR="0" lvl="0" indent="0" algn="ctr" defTabSz="914400" rtl="0" eaLnBrk="1" fontAlgn="auto" latinLnBrk="0" hangingPunct="1">
-              <a:lnSpc>
-                <a:spcPct val="100000"/>
-              </a:lnSpc>
-              <a:spcBef>
-                <a:spcPts val="0"/>
-              </a:spcBef>
-              <a:spcAft>
-                <a:spcPts val="0"/>
-              </a:spcAft>
-              <a:buClrTx/>
-              <a:buSzTx/>
-              <a:buFontTx/>
-              <a:buNone/>
-              <a:tabLst/>
-              <a:defRPr/>
-            </a:pPr>
-            <a:r>
-              <a:rPr kumimoji="0" lang="en-US" sz="5400" b="1" i="0" u="none" strike="noStrike" kern="1200" cap="none" spc="0" normalizeH="0" baseline="0" noProof="0" dirty="0" err="1">
-                <a:ln w="9525">
-                  <a:solidFill>
-                    <a:prstClr val="white"/>
-                  </a:solidFill>
-                  <a:prstDash val="solid"/>
-                </a:ln>
-                <a:solidFill>
-                  <a:srgbClr val="5B9BD5"/>
-                </a:solidFill>
-                <a:effectLst>
-                  <a:outerShdw blurRad="12700" dist="38100" dir="2700000" algn="tl" rotWithShape="0">
-                    <a:srgbClr val="5B9BD5">
-                      <a:lumMod val="60000"/>
-                      <a:lumOff val="40000"/>
-                    </a:srgbClr>
-                  </a:outerShdw>
-                </a:effectLst>
-                <a:uLnTx/>
-                <a:uFillTx/>
-                <a:latin typeface="Calibri" panose="020F0502020204030204"/>
-                <a:ea typeface="+mn-ea"/>
-                <a:cs typeface="+mn-cs"/>
-              </a:rPr>
-              <a:t>Hà</a:t>
-            </a:r>
-            <a:r>
-              <a:rPr kumimoji="0" lang="en-US" sz="5400" b="1" i="0" u="none" strike="noStrike" kern="1200" cap="none" spc="0" normalizeH="0" baseline="0" noProof="0" dirty="0">
-                <a:ln w="9525">
-                  <a:solidFill>
-                    <a:prstClr val="white"/>
-                  </a:solidFill>
-                  <a:prstDash val="solid"/>
-                </a:ln>
-                <a:solidFill>
-                  <a:srgbClr val="5B9BD5"/>
-                </a:solidFill>
-                <a:effectLst>
-                  <a:outerShdw blurRad="12700" dist="38100" dir="2700000" algn="tl" rotWithShape="0">
-                    <a:srgbClr val="5B9BD5">
-                      <a:lumMod val="60000"/>
-                      <a:lumOff val="40000"/>
-                    </a:srgbClr>
-                  </a:outerShdw>
-                </a:effectLst>
-                <a:uLnTx/>
-                <a:uFillTx/>
-                <a:latin typeface="Calibri" panose="020F0502020204030204"/>
-                <a:ea typeface="+mn-ea"/>
-                <a:cs typeface="+mn-cs"/>
-              </a:rPr>
-              <a:t> </a:t>
-            </a:r>
-            <a:r>
-              <a:rPr kumimoji="0" lang="en-US" sz="5400" b="1" i="0" u="none" strike="noStrike" kern="1200" cap="none" spc="0" normalizeH="0" baseline="0" noProof="0" dirty="0" err="1">
-                <a:ln w="9525">
-                  <a:solidFill>
-                    <a:prstClr val="white"/>
-                  </a:solidFill>
-                  <a:prstDash val="solid"/>
-                </a:ln>
-                <a:solidFill>
-                  <a:srgbClr val="5B9BD5"/>
-                </a:solidFill>
-                <a:effectLst>
-                  <a:outerShdw blurRad="12700" dist="38100" dir="2700000" algn="tl" rotWithShape="0">
-                    <a:srgbClr val="5B9BD5">
-                      <a:lumMod val="60000"/>
-                      <a:lumOff val="40000"/>
-                    </a:srgbClr>
-                  </a:outerShdw>
-                </a:effectLst>
-                <a:uLnTx/>
-                <a:uFillTx/>
-                <a:latin typeface="Calibri" panose="020F0502020204030204"/>
-                <a:ea typeface="+mn-ea"/>
-                <a:cs typeface="+mn-cs"/>
-              </a:rPr>
-              <a:t>Nội</a:t>
-            </a:r>
-            <a:r>
-              <a:rPr kumimoji="0" lang="en-US" sz="5400" b="1" i="0" u="none" strike="noStrike" kern="1200" cap="none" spc="0" normalizeH="0" baseline="0" noProof="0" dirty="0">
-                <a:ln w="9525">
-                  <a:solidFill>
-                    <a:prstClr val="white"/>
-                  </a:solidFill>
-                  <a:prstDash val="solid"/>
-                </a:ln>
-                <a:solidFill>
-                  <a:srgbClr val="5B9BD5"/>
-                </a:solidFill>
-                <a:effectLst>
-                  <a:outerShdw blurRad="12700" dist="38100" dir="2700000" algn="tl" rotWithShape="0">
-                    <a:srgbClr val="5B9BD5">
-                      <a:lumMod val="60000"/>
-                      <a:lumOff val="40000"/>
-                    </a:srgbClr>
-                  </a:outerShdw>
-                </a:effectLst>
-                <a:uLnTx/>
-                <a:uFillTx/>
-                <a:latin typeface="Calibri" panose="020F0502020204030204"/>
-                <a:ea typeface="+mn-ea"/>
-                <a:cs typeface="+mn-cs"/>
-              </a:rPr>
-              <a:t> </a:t>
-            </a:r>
-            <a:r>
-              <a:rPr kumimoji="0" lang="en-US" sz="5400" b="1" i="0" u="none" strike="noStrike" kern="1200" cap="none" spc="0" normalizeH="0" baseline="0" noProof="0" dirty="0" err="1">
-                <a:ln w="9525">
-                  <a:solidFill>
-                    <a:prstClr val="white"/>
-                  </a:solidFill>
-                  <a:prstDash val="solid"/>
-                </a:ln>
-                <a:solidFill>
-                  <a:srgbClr val="5B9BD5"/>
-                </a:solidFill>
-                <a:effectLst>
-                  <a:outerShdw blurRad="12700" dist="38100" dir="2700000" algn="tl" rotWithShape="0">
-                    <a:srgbClr val="5B9BD5">
-                      <a:lumMod val="60000"/>
-                      <a:lumOff val="40000"/>
-                    </a:srgbClr>
-                  </a:outerShdw>
-                </a:effectLst>
-                <a:uLnTx/>
-                <a:uFillTx/>
-                <a:latin typeface="Calibri" panose="020F0502020204030204"/>
-                <a:ea typeface="+mn-ea"/>
-                <a:cs typeface="+mn-cs"/>
-              </a:rPr>
-              <a:t>ngàn</a:t>
-            </a:r>
-            <a:r>
-              <a:rPr kumimoji="0" lang="en-US" sz="5400" b="1" i="0" u="none" strike="noStrike" kern="1200" cap="none" spc="0" normalizeH="0" baseline="0" noProof="0" dirty="0">
-                <a:ln w="9525">
-                  <a:solidFill>
-                    <a:prstClr val="white"/>
-                  </a:solidFill>
-                  <a:prstDash val="solid"/>
-                </a:ln>
-                <a:solidFill>
-                  <a:srgbClr val="5B9BD5"/>
-                </a:solidFill>
-                <a:effectLst>
-                  <a:outerShdw blurRad="12700" dist="38100" dir="2700000" algn="tl" rotWithShape="0">
-                    <a:srgbClr val="5B9BD5">
-                      <a:lumMod val="60000"/>
-                      <a:lumOff val="40000"/>
-                    </a:srgbClr>
-                  </a:outerShdw>
-                </a:effectLst>
-                <a:uLnTx/>
-                <a:uFillTx/>
-                <a:latin typeface="Calibri" panose="020F0502020204030204"/>
-                <a:ea typeface="+mn-ea"/>
-                <a:cs typeface="+mn-cs"/>
-              </a:rPr>
-              <a:t> </a:t>
-            </a:r>
-            <a:r>
-              <a:rPr kumimoji="0" lang="en-US" sz="5400" b="1" i="0" u="none" strike="noStrike" kern="1200" cap="none" spc="0" normalizeH="0" baseline="0" noProof="0" dirty="0" err="1">
-                <a:ln w="9525">
-                  <a:solidFill>
-                    <a:prstClr val="white"/>
-                  </a:solidFill>
-                  <a:prstDash val="solid"/>
-                </a:ln>
-                <a:solidFill>
-                  <a:srgbClr val="5B9BD5"/>
-                </a:solidFill>
-                <a:effectLst>
-                  <a:outerShdw blurRad="12700" dist="38100" dir="2700000" algn="tl" rotWithShape="0">
-                    <a:srgbClr val="5B9BD5">
-                      <a:lumMod val="60000"/>
-                      <a:lumOff val="40000"/>
-                    </a:srgbClr>
-                  </a:outerShdw>
-                </a:effectLst>
-                <a:uLnTx/>
-                <a:uFillTx/>
-                <a:latin typeface="Calibri" panose="020F0502020204030204"/>
-                <a:ea typeface="+mn-ea"/>
-                <a:cs typeface="+mn-cs"/>
-              </a:rPr>
-              <a:t>năm</a:t>
-            </a:r>
-            <a:r>
-              <a:rPr kumimoji="0" lang="en-US" sz="5400" b="1" i="0" u="none" strike="noStrike" kern="1200" cap="none" spc="0" normalizeH="0" baseline="0" noProof="0" dirty="0">
-                <a:ln w="9525">
-                  <a:solidFill>
-                    <a:prstClr val="white"/>
-                  </a:solidFill>
-                  <a:prstDash val="solid"/>
-                </a:ln>
-                <a:solidFill>
-                  <a:srgbClr val="5B9BD5"/>
-                </a:solidFill>
-                <a:effectLst>
-                  <a:outerShdw blurRad="12700" dist="38100" dir="2700000" algn="tl" rotWithShape="0">
-                    <a:srgbClr val="5B9BD5">
-                      <a:lumMod val="60000"/>
-                      <a:lumOff val="40000"/>
-                    </a:srgbClr>
-                  </a:outerShdw>
-                </a:effectLst>
-                <a:uLnTx/>
-                <a:uFillTx/>
-                <a:latin typeface="Calibri" panose="020F0502020204030204"/>
-                <a:ea typeface="+mn-ea"/>
-                <a:cs typeface="+mn-cs"/>
-              </a:rPr>
-              <a:t> </a:t>
-            </a:r>
-            <a:r>
-              <a:rPr kumimoji="0" lang="en-US" sz="5400" b="1" i="0" u="none" strike="noStrike" kern="1200" cap="none" spc="0" normalizeH="0" baseline="0" noProof="0" dirty="0" err="1">
-                <a:ln w="9525">
-                  <a:solidFill>
-                    <a:prstClr val="white"/>
-                  </a:solidFill>
-                  <a:prstDash val="solid"/>
-                </a:ln>
-                <a:solidFill>
-                  <a:srgbClr val="5B9BD5"/>
-                </a:solidFill>
-                <a:effectLst>
-                  <a:outerShdw blurRad="12700" dist="38100" dir="2700000" algn="tl" rotWithShape="0">
-                    <a:srgbClr val="5B9BD5">
-                      <a:lumMod val="60000"/>
-                      <a:lumOff val="40000"/>
-                    </a:srgbClr>
-                  </a:outerShdw>
-                </a:effectLst>
-                <a:uLnTx/>
-                <a:uFillTx/>
-                <a:latin typeface="Calibri" panose="020F0502020204030204"/>
-                <a:ea typeface="+mn-ea"/>
-                <a:cs typeface="+mn-cs"/>
-              </a:rPr>
-              <a:t>văn</a:t>
-            </a:r>
-            <a:r>
-              <a:rPr kumimoji="0" lang="en-US" sz="5400" b="1" i="0" u="none" strike="noStrike" kern="1200" cap="none" spc="0" normalizeH="0" baseline="0" noProof="0" dirty="0">
-                <a:ln w="9525">
-                  <a:solidFill>
-                    <a:prstClr val="white"/>
-                  </a:solidFill>
-                  <a:prstDash val="solid"/>
-                </a:ln>
-                <a:solidFill>
-                  <a:srgbClr val="5B9BD5"/>
-                </a:solidFill>
-                <a:effectLst>
-                  <a:outerShdw blurRad="12700" dist="38100" dir="2700000" algn="tl" rotWithShape="0">
-                    <a:srgbClr val="5B9BD5">
-                      <a:lumMod val="60000"/>
-                      <a:lumOff val="40000"/>
-                    </a:srgbClr>
-                  </a:outerShdw>
-                </a:effectLst>
-                <a:uLnTx/>
-                <a:uFillTx/>
-                <a:latin typeface="Calibri" panose="020F0502020204030204"/>
-                <a:ea typeface="+mn-ea"/>
-                <a:cs typeface="+mn-cs"/>
-              </a:rPr>
-              <a:t> </a:t>
-            </a:r>
-            <a:r>
-              <a:rPr kumimoji="0" lang="en-US" sz="5400" b="1" i="0" u="none" strike="noStrike" kern="1200" cap="none" spc="0" normalizeH="0" baseline="0" noProof="0" dirty="0" err="1">
-                <a:ln w="9525">
-                  <a:solidFill>
-                    <a:prstClr val="white"/>
-                  </a:solidFill>
-                  <a:prstDash val="solid"/>
-                </a:ln>
-                <a:solidFill>
-                  <a:srgbClr val="5B9BD5"/>
-                </a:solidFill>
-                <a:effectLst>
-                  <a:outerShdw blurRad="12700" dist="38100" dir="2700000" algn="tl" rotWithShape="0">
-                    <a:srgbClr val="5B9BD5">
-                      <a:lumMod val="60000"/>
-                      <a:lumOff val="40000"/>
-                    </a:srgbClr>
-                  </a:outerShdw>
-                </a:effectLst>
-                <a:uLnTx/>
-                <a:uFillTx/>
-                <a:latin typeface="Calibri" panose="020F0502020204030204"/>
-                <a:ea typeface="+mn-ea"/>
-                <a:cs typeface="+mn-cs"/>
-              </a:rPr>
-              <a:t>hiến</a:t>
-            </a:r>
-            <a:endParaRPr kumimoji="0" lang="en-US" sz="5400" b="1" i="0" u="none" strike="noStrike" kern="1200" cap="none" spc="0" normalizeH="0" baseline="0" noProof="0" dirty="0">
-              <a:ln w="9525">
-                <a:solidFill>
-                  <a:prstClr val="white"/>
-                </a:solidFill>
-                <a:prstDash val="solid"/>
-              </a:ln>
-              <a:solidFill>
-                <a:srgbClr val="5B9BD5"/>
-              </a:solidFill>
-              <a:effectLst>
-                <a:outerShdw blurRad="12700" dist="38100" dir="2700000" algn="tl" rotWithShape="0">
-                  <a:srgbClr val="5B9BD5">
-                    <a:lumMod val="60000"/>
-                    <a:lumOff val="40000"/>
-                  </a:srgbClr>
-                </a:outerShdw>
-              </a:effectLst>
-              <a:uLnTx/>
-              <a:uFillTx/>
-              <a:latin typeface="Calibri" panose="020F0502020204030204"/>
-              <a:ea typeface="+mn-ea"/>
-              <a:cs typeface="+mn-cs"/>
-            </a:endParaRPr>
-          </a:p>
-        </p:txBody>
-      </p:sp>
     </p:spTree>
     <p:extLst>
       <p:ext uri="{BB962C8B-B14F-4D97-AF65-F5344CB8AC3E}">
-        <p14:creationId xmlns:p14="http://schemas.microsoft.com/office/powerpoint/2010/main" val="3788172573"/>
+        <p14:creationId xmlns:p14="http://schemas.microsoft.com/office/powerpoint/2010/main" val="4061754706"/>
       </p:ext>
     </p:extLst>
   </p:cSld>
@@ -7760,7 +12652,7 @@
     </p:spTree>
     <p:extLst>
       <p:ext uri="{BB962C8B-B14F-4D97-AF65-F5344CB8AC3E}">
-        <p14:creationId xmlns:p14="http://schemas.microsoft.com/office/powerpoint/2010/main" val="1598833986"/>
+        <p14:creationId xmlns:p14="http://schemas.microsoft.com/office/powerpoint/2010/main" val="2099895659"/>
       </p:ext>
     </p:extLst>
   </p:cSld>
@@ -8413,49 +13305,7 @@
                 <a:latin typeface="Arial" panose="020B0604020202020204" pitchFamily="34" charset="0"/>
                 <a:cs typeface="Arial" panose="020B0604020202020204" pitchFamily="34" charset="0"/>
               </a:rPr>
-              <a:t>KINH </a:t>
-            </a:r>
-            <a:r>
-              <a:rPr lang="en-US" sz="3600" b="1" dirty="0">
-                <a:ln w="6600">
-                  <a:solidFill>
-                    <a:schemeClr val="accent2"/>
-                  </a:solidFill>
-                  <a:prstDash val="solid"/>
-                </a:ln>
-                <a:solidFill>
-                  <a:srgbClr val="0070C0"/>
-                </a:solidFill>
-                <a:effectLst>
-                  <a:outerShdw dist="38100" dir="2700000" algn="tl" rotWithShape="0">
-                    <a:schemeClr val="accent2"/>
-                  </a:outerShdw>
-                </a:effectLst>
-                <a:latin typeface="Arial" panose="020B0604020202020204" pitchFamily="34" charset="0"/>
-                <a:cs typeface="Arial" panose="020B0604020202020204" pitchFamily="34" charset="0"/>
-              </a:rPr>
-              <a:t>TẾ </a:t>
-            </a:r>
-            <a:r>
-              <a:rPr lang="en-US" sz="3600" b="1" dirty="0" smtClean="0">
-                <a:ln w="6600">
-                  <a:solidFill>
-                    <a:schemeClr val="accent2"/>
-                  </a:solidFill>
-                  <a:prstDash val="solid"/>
-                </a:ln>
-                <a:solidFill>
-                  <a:srgbClr val="0070C0"/>
-                </a:solidFill>
-                <a:effectLst>
-                  <a:outerShdw dist="38100" dir="2700000" algn="tl" rotWithShape="0">
-                    <a:schemeClr val="accent2"/>
-                  </a:outerShdw>
-                </a:effectLst>
-                <a:latin typeface="Arial" panose="020B0604020202020204" pitchFamily="34" charset="0"/>
-                <a:cs typeface="Arial" panose="020B0604020202020204" pitchFamily="34" charset="0"/>
-              </a:rPr>
-              <a:t>CÁC NĂM GẦN ĐÂY</a:t>
+              <a:t>TÌNH HÌNH KINH TẾ NĂM 2024</a:t>
             </a:r>
             <a:endParaRPr lang="en-US" sz="3600" b="1" dirty="0">
               <a:ln w="6600">
@@ -8705,11 +13555,15 @@
           </p:cNvPr>
           <p:cNvGraphicFramePr/>
           <p:nvPr>
-            <p:extLst/>
+            <p:extLst>
+              <p:ext uri="{D42A27DB-BD31-4B8C-83A1-F6EECF244321}">
+                <p14:modId xmlns:p14="http://schemas.microsoft.com/office/powerpoint/2010/main" val="4107016457"/>
+              </p:ext>
+            </p:extLst>
           </p:nvPr>
         </p:nvGraphicFramePr>
         <p:xfrm>
-          <a:off x="1383038" y="822961"/>
+          <a:off x="1349787" y="1346179"/>
           <a:ext cx="6713913" cy="4438535"/>
         </p:xfrm>
         <a:graphic>
@@ -8721,7 +13575,7 @@
     </p:spTree>
     <p:extLst>
       <p:ext uri="{BB962C8B-B14F-4D97-AF65-F5344CB8AC3E}">
-        <p14:creationId xmlns:p14="http://schemas.microsoft.com/office/powerpoint/2010/main" val="2558992287"/>
+        <p14:creationId xmlns:p14="http://schemas.microsoft.com/office/powerpoint/2010/main" val="3506916084"/>
       </p:ext>
     </p:extLst>
   </p:cSld>
@@ -9020,8 +13874,8 @@
         </p:nvSpPr>
         <p:spPr>
           <a:xfrm>
-            <a:off x="294107" y="1341540"/>
-            <a:ext cx="8643485" cy="4215865"/>
+            <a:off x="601677" y="1399729"/>
+            <a:ext cx="7844053" cy="3839943"/>
           </a:xfrm>
           <a:prstGeom prst="rect">
             <a:avLst/>
@@ -9052,13 +13906,22 @@
               <a:defRPr/>
             </a:pPr>
             <a:r>
-              <a:rPr kumimoji="0" lang="en-US" sz="1600" i="0" u="none" strike="noStrike" kern="1200" normalizeH="0" baseline="0" noProof="0" dirty="0">
-                <a:ln w="0"/>
+              <a:rPr kumimoji="0" lang="en-US" sz="1600" b="1" i="0" u="none" strike="noStrike" kern="1200" cap="none" spc="0" normalizeH="0" baseline="0" noProof="0" dirty="0">
+                <a:ln w="9525">
+                  <a:solidFill>
+                    <a:prstClr val="white"/>
+                  </a:solidFill>
+                  <a:prstDash val="solid"/>
+                </a:ln>
+                <a:solidFill>
+                  <a:srgbClr val="5B9BD5"/>
+                </a:solidFill>
                 <a:effectLst>
-                  <a:outerShdw blurRad="38100" dist="19050" dir="2700000" algn="tl" rotWithShape="0">
-                    <a:schemeClr val="dk1">
-                      <a:alpha val="40000"/>
-                    </a:schemeClr>
+                  <a:outerShdw blurRad="12700" dist="38100" dir="2700000" algn="tl" rotWithShape="0">
+                    <a:srgbClr val="5B9BD5">
+                      <a:lumMod val="60000"/>
+                      <a:lumOff val="40000"/>
+                    </a:srgbClr>
                   </a:outerShdw>
                 </a:effectLst>
                 <a:uLnTx/>
@@ -9143,7 +14006,7 @@
     </p:spTree>
     <p:extLst>
       <p:ext uri="{BB962C8B-B14F-4D97-AF65-F5344CB8AC3E}">
-        <p14:creationId xmlns:p14="http://schemas.microsoft.com/office/powerpoint/2010/main" val="3109932876"/>
+        <p14:creationId xmlns:p14="http://schemas.microsoft.com/office/powerpoint/2010/main" val="2155762837"/>
       </p:ext>
     </p:extLst>
   </p:cSld>
@@ -9298,6 +14161,267 @@
 </file>
 
 <file path=ppt/theme/theme1.xml><?xml version="1.0" encoding="utf-8"?>
+<a:theme xmlns:a="http://schemas.openxmlformats.org/drawingml/2006/main" name="1_Office Theme">
+  <a:themeElements>
+    <a:clrScheme name="Office Theme">
+      <a:dk1>
+        <a:sysClr val="windowText" lastClr="000000"/>
+      </a:dk1>
+      <a:lt1>
+        <a:sysClr val="window" lastClr="FFFFFF"/>
+      </a:lt1>
+      <a:dk2>
+        <a:srgbClr val="44546A"/>
+      </a:dk2>
+      <a:lt2>
+        <a:srgbClr val="E7E6E6"/>
+      </a:lt2>
+      <a:accent1>
+        <a:srgbClr val="5B9BD5"/>
+      </a:accent1>
+      <a:accent2>
+        <a:srgbClr val="ED7D31"/>
+      </a:accent2>
+      <a:accent3>
+        <a:srgbClr val="A5A5A5"/>
+      </a:accent3>
+      <a:accent4>
+        <a:srgbClr val="FFC000"/>
+      </a:accent4>
+      <a:accent5>
+        <a:srgbClr val="4472C4"/>
+      </a:accent5>
+      <a:accent6>
+        <a:srgbClr val="70AD47"/>
+      </a:accent6>
+      <a:hlink>
+        <a:srgbClr val="0563C1"/>
+      </a:hlink>
+      <a:folHlink>
+        <a:srgbClr val="954F72"/>
+      </a:folHlink>
+    </a:clrScheme>
+    <a:fontScheme name="Office Theme">
+      <a:majorFont>
+        <a:latin typeface="Calibri Light" panose="020F0302020204030204"/>
+        <a:ea typeface=""/>
+        <a:cs typeface=""/>
+        <a:font script="Jpan" typeface="游ゴシック Light"/>
+        <a:font script="Hang" typeface="맑은 고딕"/>
+        <a:font script="Hans" typeface="等线 Light"/>
+        <a:font script="Hant" typeface="新細明體"/>
+        <a:font script="Arab" typeface="Times New Roman"/>
+        <a:font script="Hebr" typeface="Times New Roman"/>
+        <a:font script="Thai" typeface="Angsana New"/>
+        <a:font script="Ethi" typeface="Nyala"/>
+        <a:font script="Beng" typeface="Vrinda"/>
+        <a:font script="Gujr" typeface="Shruti"/>
+        <a:font script="Khmr" typeface="MoolBoran"/>
+        <a:font script="Knda" typeface="Tunga"/>
+        <a:font script="Guru" typeface="Raavi"/>
+        <a:font script="Cans" typeface="Euphemia"/>
+        <a:font script="Cher" typeface="Plantagenet Cherokee"/>
+        <a:font script="Yiii" typeface="Microsoft Yi Baiti"/>
+        <a:font script="Tibt" typeface="Microsoft Himalaya"/>
+        <a:font script="Thaa" typeface="MV Boli"/>
+        <a:font script="Deva" typeface="Mangal"/>
+        <a:font script="Telu" typeface="Gautami"/>
+        <a:font script="Taml" typeface="Latha"/>
+        <a:font script="Syrc" typeface="Estrangelo Edessa"/>
+        <a:font script="Orya" typeface="Kalinga"/>
+        <a:font script="Mlym" typeface="Kartika"/>
+        <a:font script="Laoo" typeface="DokChampa"/>
+        <a:font script="Sinh" typeface="Iskoola Pota"/>
+        <a:font script="Mong" typeface="Mongolian Baiti"/>
+        <a:font script="Viet" typeface="Times New Roman"/>
+        <a:font script="Uigh" typeface="Microsoft Uighur"/>
+        <a:font script="Geor" typeface="Sylfaen"/>
+      </a:majorFont>
+      <a:minorFont>
+        <a:latin typeface="Calibri" panose="020F0502020204030204"/>
+        <a:ea typeface=""/>
+        <a:cs typeface=""/>
+        <a:font script="Jpan" typeface="游ゴシック"/>
+        <a:font script="Hang" typeface="맑은 고딕"/>
+        <a:font script="Hans" typeface="等线"/>
+        <a:font script="Hant" typeface="新細明體"/>
+        <a:font script="Arab" typeface="Arial"/>
+        <a:font script="Hebr" typeface="Arial"/>
+        <a:font script="Thai" typeface="Cordia New"/>
+        <a:font script="Ethi" typeface="Nyala"/>
+        <a:font script="Beng" typeface="Vrinda"/>
+        <a:font script="Gujr" typeface="Shruti"/>
+        <a:font script="Khmr" typeface="DaunPenh"/>
+        <a:font script="Knda" typeface="Tunga"/>
+        <a:font script="Guru" typeface="Raavi"/>
+        <a:font script="Cans" typeface="Euphemia"/>
+        <a:font script="Cher" typeface="Plantagenet Cherokee"/>
+        <a:font script="Yiii" typeface="Microsoft Yi Baiti"/>
+        <a:font script="Tibt" typeface="Microsoft Himalaya"/>
+        <a:font script="Thaa" typeface="MV Boli"/>
+        <a:font script="Deva" typeface="Mangal"/>
+        <a:font script="Telu" typeface="Gautami"/>
+        <a:font script="Taml" typeface="Latha"/>
+        <a:font script="Syrc" typeface="Estrangelo Edessa"/>
+        <a:font script="Orya" typeface="Kalinga"/>
+        <a:font script="Mlym" typeface="Kartika"/>
+        <a:font script="Laoo" typeface="DokChampa"/>
+        <a:font script="Sinh" typeface="Iskoola Pota"/>
+        <a:font script="Mong" typeface="Mongolian Baiti"/>
+        <a:font script="Viet" typeface="Arial"/>
+        <a:font script="Uigh" typeface="Microsoft Uighur"/>
+        <a:font script="Geor" typeface="Sylfaen"/>
+      </a:minorFont>
+    </a:fontScheme>
+    <a:fmtScheme name="Office Theme">
+      <a:fillStyleLst>
+        <a:solidFill>
+          <a:schemeClr val="phClr"/>
+        </a:solidFill>
+        <a:gradFill rotWithShape="1">
+          <a:gsLst>
+            <a:gs pos="0">
+              <a:schemeClr val="phClr">
+                <a:lumMod val="110000"/>
+                <a:satMod val="105000"/>
+                <a:tint val="67000"/>
+              </a:schemeClr>
+            </a:gs>
+            <a:gs pos="50000">
+              <a:schemeClr val="phClr">
+                <a:lumMod val="105000"/>
+                <a:satMod val="103000"/>
+                <a:tint val="73000"/>
+              </a:schemeClr>
+            </a:gs>
+            <a:gs pos="100000">
+              <a:schemeClr val="phClr">
+                <a:lumMod val="105000"/>
+                <a:satMod val="109000"/>
+                <a:tint val="81000"/>
+              </a:schemeClr>
+            </a:gs>
+          </a:gsLst>
+          <a:lin ang="5400000" scaled="0"/>
+        </a:gradFill>
+        <a:gradFill rotWithShape="1">
+          <a:gsLst>
+            <a:gs pos="0">
+              <a:schemeClr val="phClr">
+                <a:satMod val="103000"/>
+                <a:lumMod val="102000"/>
+                <a:tint val="94000"/>
+              </a:schemeClr>
+            </a:gs>
+            <a:gs pos="50000">
+              <a:schemeClr val="phClr">
+                <a:satMod val="110000"/>
+                <a:lumMod val="100000"/>
+                <a:shade val="100000"/>
+              </a:schemeClr>
+            </a:gs>
+            <a:gs pos="100000">
+              <a:schemeClr val="phClr">
+                <a:lumMod val="99000"/>
+                <a:satMod val="120000"/>
+                <a:shade val="78000"/>
+              </a:schemeClr>
+            </a:gs>
+          </a:gsLst>
+          <a:lin ang="5400000" scaled="0"/>
+        </a:gradFill>
+      </a:fillStyleLst>
+      <a:lnStyleLst>
+        <a:ln w="6350" cap="flat" cmpd="sng" algn="ctr">
+          <a:solidFill>
+            <a:schemeClr val="phClr"/>
+          </a:solidFill>
+          <a:prstDash val="solid"/>
+          <a:miter lim="800000"/>
+        </a:ln>
+        <a:ln w="12700" cap="flat" cmpd="sng" algn="ctr">
+          <a:solidFill>
+            <a:schemeClr val="phClr"/>
+          </a:solidFill>
+          <a:prstDash val="solid"/>
+          <a:miter lim="800000"/>
+        </a:ln>
+        <a:ln w="19050" cap="flat" cmpd="sng" algn="ctr">
+          <a:solidFill>
+            <a:schemeClr val="phClr"/>
+          </a:solidFill>
+          <a:prstDash val="solid"/>
+          <a:miter lim="800000"/>
+        </a:ln>
+      </a:lnStyleLst>
+      <a:effectStyleLst>
+        <a:effectStyle>
+          <a:effectLst/>
+        </a:effectStyle>
+        <a:effectStyle>
+          <a:effectLst/>
+        </a:effectStyle>
+        <a:effectStyle>
+          <a:effectLst>
+            <a:outerShdw blurRad="57150" dist="19050" dir="5400000" algn="ctr" rotWithShape="0">
+              <a:srgbClr val="000000">
+                <a:alpha val="63000"/>
+              </a:srgbClr>
+            </a:outerShdw>
+          </a:effectLst>
+        </a:effectStyle>
+      </a:effectStyleLst>
+      <a:bgFillStyleLst>
+        <a:solidFill>
+          <a:schemeClr val="phClr"/>
+        </a:solidFill>
+        <a:solidFill>
+          <a:schemeClr val="phClr">
+            <a:tint val="95000"/>
+            <a:satMod val="170000"/>
+          </a:schemeClr>
+        </a:solidFill>
+        <a:gradFill rotWithShape="1">
+          <a:gsLst>
+            <a:gs pos="0">
+              <a:schemeClr val="phClr">
+                <a:tint val="93000"/>
+                <a:satMod val="150000"/>
+                <a:shade val="98000"/>
+                <a:lumMod val="102000"/>
+              </a:schemeClr>
+            </a:gs>
+            <a:gs pos="50000">
+              <a:schemeClr val="phClr">
+                <a:tint val="98000"/>
+                <a:satMod val="130000"/>
+                <a:shade val="90000"/>
+                <a:lumMod val="103000"/>
+              </a:schemeClr>
+            </a:gs>
+            <a:gs pos="100000">
+              <a:schemeClr val="phClr">
+                <a:shade val="63000"/>
+                <a:satMod val="120000"/>
+              </a:schemeClr>
+            </a:gs>
+          </a:gsLst>
+          <a:lin ang="5400000" scaled="0"/>
+        </a:gradFill>
+      </a:bgFillStyleLst>
+    </a:fmtScheme>
+  </a:themeElements>
+  <a:objectDefaults/>
+  <a:extraClrSchemeLst/>
+  <a:extLst>
+    <a:ext uri="{05A4C25C-085E-4340-85A3-A5531E510DB2}">
+      <thm15:themeFamily xmlns:thm15="http://schemas.microsoft.com/office/thememl/2012/main" name="Office Theme" id="{62F939B6-93AF-4DB8-9C6B-D6C7DFDC589F}" vid="{4A3C46E8-61CC-4603-A589-7422A47A8E4A}"/>
+    </a:ext>
+  </a:extLst>
+</a:theme>
+</file>
+
+<file path=ppt/theme/theme2.xml><?xml version="1.0" encoding="utf-8"?>
 <a:theme xmlns:a="http://schemas.openxmlformats.org/drawingml/2006/main" name="3_Office Theme">
   <a:themeElements>
     <a:clrScheme name="Office">

--- a/dapan/cau 3.pptx
+++ b/dapan/cau 3.pptx
@@ -1315,7 +1315,7 @@
               <a:pPr>
                 <a:defRPr/>
               </a:pPr>
-              <a:t>05/10/2025</a:t>
+              <a:t>11/16/2025</a:t>
             </a:fld>
             <a:endParaRPr lang="en-US">
               <a:solidFill>
@@ -1530,7 +1530,7 @@
               <a:pPr>
                 <a:defRPr/>
               </a:pPr>
-              <a:t>05/10/2025</a:t>
+              <a:t>11/16/2025</a:t>
             </a:fld>
             <a:endParaRPr lang="en-US">
               <a:solidFill>
@@ -1755,7 +1755,7 @@
               <a:pPr>
                 <a:defRPr/>
               </a:pPr>
-              <a:t>05/10/2025</a:t>
+              <a:t>11/16/2025</a:t>
             </a:fld>
             <a:endParaRPr lang="en-US">
               <a:solidFill>
@@ -2045,7 +2045,7 @@
                 <a:tabLst/>
                 <a:defRPr/>
               </a:pPr>
-              <a:t>05/10/2025</a:t>
+              <a:t>11/16/2025</a:t>
             </a:fld>
             <a:endParaRPr kumimoji="0" lang="en-US" sz="900" b="0" i="0" u="none" strike="noStrike" kern="1200" cap="none" spc="0" normalizeH="0" baseline="0" noProof="0">
               <a:ln>
@@ -2403,7 +2403,7 @@
                 <a:tabLst/>
                 <a:defRPr/>
               </a:pPr>
-              <a:t>05/10/2025</a:t>
+              <a:t>11/16/2025</a:t>
             </a:fld>
             <a:endParaRPr kumimoji="0" lang="en-US" sz="900" b="0" i="0" u="none" strike="noStrike" kern="1200" cap="none" spc="0" normalizeH="0" baseline="0" noProof="0">
               <a:ln>
@@ -2838,7 +2838,7 @@
                 <a:tabLst/>
                 <a:defRPr/>
               </a:pPr>
-              <a:t>05/10/2025</a:t>
+              <a:t>11/16/2025</a:t>
             </a:fld>
             <a:endParaRPr kumimoji="0" lang="en-US" sz="900" b="0" i="0" u="none" strike="noStrike" kern="1200" cap="none" spc="0" normalizeH="0" baseline="0" noProof="0">
               <a:ln>
@@ -3263,7 +3263,7 @@
                 <a:tabLst/>
                 <a:defRPr/>
               </a:pPr>
-              <a:t>05/10/2025</a:t>
+              <a:t>11/16/2025</a:t>
             </a:fld>
             <a:endParaRPr kumimoji="0" lang="en-US" sz="900" b="0" i="0" u="none" strike="noStrike" kern="1200" cap="none" spc="0" normalizeH="0" baseline="0" noProof="0">
               <a:ln>
@@ -3835,7 +3835,7 @@
                 <a:tabLst/>
                 <a:defRPr/>
               </a:pPr>
-              <a:t>05/10/2025</a:t>
+              <a:t>11/16/2025</a:t>
             </a:fld>
             <a:endParaRPr kumimoji="0" lang="en-US" sz="900" b="0" i="0" u="none" strike="noStrike" kern="1200" cap="none" spc="0" normalizeH="0" baseline="0" noProof="0">
               <a:ln>
@@ -4136,7 +4136,7 @@
                 <a:tabLst/>
                 <a:defRPr/>
               </a:pPr>
-              <a:t>05/10/2025</a:t>
+              <a:t>11/16/2025</a:t>
             </a:fld>
             <a:endParaRPr kumimoji="0" lang="en-US" sz="900" b="0" i="0" u="none" strike="noStrike" kern="1200" cap="none" spc="0" normalizeH="0" baseline="0" noProof="0">
               <a:ln>
@@ -4409,7 +4409,7 @@
                 <a:tabLst/>
                 <a:defRPr/>
               </a:pPr>
-              <a:t>05/10/2025</a:t>
+              <a:t>11/16/2025</a:t>
             </a:fld>
             <a:endParaRPr kumimoji="0" lang="en-US" sz="900" b="0" i="0" u="none" strike="noStrike" kern="1200" cap="none" spc="0" normalizeH="0" baseline="0" noProof="0">
               <a:ln>
@@ -4880,7 +4880,7 @@
                 <a:tabLst/>
                 <a:defRPr/>
               </a:pPr>
-              <a:t>05/10/2025</a:t>
+              <a:t>11/16/2025</a:t>
             </a:fld>
             <a:endParaRPr kumimoji="0" lang="en-US" sz="900" b="0" i="0" u="none" strike="noStrike" kern="1200" cap="none" spc="0" normalizeH="0" baseline="0" noProof="0">
               <a:ln>
@@ -5185,7 +5185,7 @@
               <a:pPr>
                 <a:defRPr/>
               </a:pPr>
-              <a:t>05/10/2025</a:t>
+              <a:t>11/16/2025</a:t>
             </a:fld>
             <a:endParaRPr lang="en-US">
               <a:solidFill>
@@ -5543,7 +5543,7 @@
                 <a:tabLst/>
                 <a:defRPr/>
               </a:pPr>
-              <a:t>05/10/2025</a:t>
+              <a:t>11/16/2025</a:t>
             </a:fld>
             <a:endParaRPr kumimoji="0" lang="en-US" sz="900" b="0" i="0" u="none" strike="noStrike" kern="1200" cap="none" spc="0" normalizeH="0" baseline="0" noProof="0">
               <a:ln>
@@ -5901,7 +5901,7 @@
                 <a:tabLst/>
                 <a:defRPr/>
               </a:pPr>
-              <a:t>05/10/2025</a:t>
+              <a:t>11/16/2025</a:t>
             </a:fld>
             <a:endParaRPr kumimoji="0" lang="en-US" sz="900" b="0" i="0" u="none" strike="noStrike" kern="1200" cap="none" spc="0" normalizeH="0" baseline="0" noProof="0">
               <a:ln>
@@ -6269,7 +6269,7 @@
                 <a:tabLst/>
                 <a:defRPr/>
               </a:pPr>
-              <a:t>05/10/2025</a:t>
+              <a:t>11/16/2025</a:t>
             </a:fld>
             <a:endParaRPr kumimoji="0" lang="en-US" sz="900" b="0" i="0" u="none" strike="noStrike" kern="1200" cap="none" spc="0" normalizeH="0" baseline="0" noProof="0">
               <a:ln>
@@ -6648,7 +6648,7 @@
               <a:pPr>
                 <a:defRPr/>
               </a:pPr>
-              <a:t>05/10/2025</a:t>
+              <a:t>11/16/2025</a:t>
             </a:fld>
             <a:endParaRPr lang="en-US">
               <a:solidFill>
@@ -6925,7 +6925,7 @@
               <a:pPr>
                 <a:defRPr/>
               </a:pPr>
-              <a:t>05/10/2025</a:t>
+              <a:t>11/16/2025</a:t>
             </a:fld>
             <a:endParaRPr lang="en-US">
               <a:solidFill>
@@ -7337,7 +7337,7 @@
               <a:pPr>
                 <a:defRPr/>
               </a:pPr>
-              <a:t>05/10/2025</a:t>
+              <a:t>11/16/2025</a:t>
             </a:fld>
             <a:endParaRPr lang="en-US">
               <a:solidFill>
@@ -7500,7 +7500,7 @@
               <a:pPr>
                 <a:defRPr/>
               </a:pPr>
-              <a:t>05/10/2025</a:t>
+              <a:t>11/16/2025</a:t>
             </a:fld>
             <a:endParaRPr lang="en-US">
               <a:solidFill>
@@ -7640,7 +7640,7 @@
               <a:pPr>
                 <a:defRPr/>
               </a:pPr>
-              <a:t>05/10/2025</a:t>
+              <a:t>11/16/2025</a:t>
             </a:fld>
             <a:endParaRPr lang="en-US">
               <a:solidFill>
@@ -7962,7 +7962,7 @@
               <a:pPr>
                 <a:defRPr/>
               </a:pPr>
-              <a:t>05/10/2025</a:t>
+              <a:t>11/16/2025</a:t>
             </a:fld>
             <a:endParaRPr lang="en-US">
               <a:solidFill>
@@ -8264,7 +8264,7 @@
               <a:pPr>
                 <a:defRPr/>
               </a:pPr>
-              <a:t>05/10/2025</a:t>
+              <a:t>11/16/2025</a:t>
             </a:fld>
             <a:endParaRPr lang="en-US">
               <a:solidFill>
@@ -8510,7 +8510,7 @@
           <a:p>
             <a:fld id="{625DED5C-A84D-480A-A1E4-45CC1BC2F9C5}" type="datetimeFigureOut">
               <a:rPr lang="en-US" smtClean="0"/>
-              <a:t>05/10/2025</a:t>
+              <a:t>11/16/2025</a:t>
             </a:fld>
             <a:endParaRPr lang="en-US"/>
           </a:p>
@@ -9115,7 +9115,7 @@
                 <a:tabLst/>
                 <a:defRPr/>
               </a:pPr>
-              <a:t>05/10/2025</a:t>
+              <a:t>11/16/2025</a:t>
             </a:fld>
             <a:endParaRPr kumimoji="0" lang="en-US" sz="900" b="0" i="0" u="none" strike="noStrike" kern="1200" cap="none" spc="0" normalizeH="0" baseline="0" noProof="0">
               <a:ln>
@@ -9925,9 +9925,33 @@
             <a:off x="1776300" y="1630432"/>
             <a:ext cx="5715000" cy="3629025"/>
           </a:xfrm>
-          <a:prstGeom prst="rect">
-            <a:avLst/>
+          <a:prstGeom prst="roundRect">
+            <a:avLst>
+              <a:gd name="adj" fmla="val 16667"/>
+            </a:avLst>
           </a:prstGeom>
+          <a:ln>
+            <a:noFill/>
+          </a:ln>
+          <a:effectLst>
+            <a:outerShdw blurRad="152400" dist="12000" dir="900000" sy="98000" kx="110000" ky="200000" algn="tl" rotWithShape="0">
+              <a:srgbClr val="000000">
+                <a:alpha val="30000"/>
+              </a:srgbClr>
+            </a:outerShdw>
+          </a:effectLst>
+          <a:scene3d>
+            <a:camera prst="perspectiveRelaxed">
+              <a:rot lat="19800000" lon="1200000" rev="20820000"/>
+            </a:camera>
+            <a:lightRig rig="threePt" dir="t"/>
+          </a:scene3d>
+          <a:sp3d contourW="6350" prstMaterial="matte">
+            <a:bevelT w="101600" h="101600"/>
+            <a:contourClr>
+              <a:srgbClr val="969696"/>
+            </a:contourClr>
+          </a:sp3d>
         </p:spPr>
       </p:pic>
     </p:spTree>
@@ -13874,8 +13898,8 @@
         </p:nvSpPr>
         <p:spPr>
           <a:xfrm>
-            <a:off x="601677" y="1399729"/>
-            <a:ext cx="7844053" cy="3839943"/>
+            <a:off x="64655" y="1344101"/>
+            <a:ext cx="9014690" cy="4169798"/>
           </a:xfrm>
           <a:prstGeom prst="rect">
             <a:avLst/>
@@ -13884,6 +13908,9 @@
         </p:spPr>
         <p:txBody>
           <a:bodyPr wrap="none" lIns="91440" tIns="45720" rIns="91440" bIns="45720" numCol="1">
+            <a:prstTxWarp prst="textWave1">
+              <a:avLst/>
+            </a:prstTxWarp>
             <a:spAutoFit/>
           </a:bodyPr>
           <a:lstStyle/>
@@ -13906,21 +13933,15 @@
               <a:defRPr/>
             </a:pPr>
             <a:r>
-              <a:rPr kumimoji="0" lang="en-US" sz="1600" b="1" i="0" u="none" strike="noStrike" kern="1200" cap="none" spc="0" normalizeH="0" baseline="0" noProof="0" dirty="0">
-                <a:ln w="9525">
-                  <a:solidFill>
-                    <a:prstClr val="white"/>
-                  </a:solidFill>
-                  <a:prstDash val="solid"/>
-                </a:ln>
+              <a:rPr kumimoji="0" lang="en-US" sz="1600" b="1" i="0" u="none" strike="noStrike" kern="1200" normalizeH="0" baseline="0" noProof="0" dirty="0">
+                <a:ln w="0"/>
                 <a:solidFill>
-                  <a:srgbClr val="5B9BD5"/>
+                  <a:schemeClr val="accent1"/>
                 </a:solidFill>
                 <a:effectLst>
-                  <a:outerShdw blurRad="12700" dist="38100" dir="2700000" algn="tl" rotWithShape="0">
-                    <a:srgbClr val="5B9BD5">
-                      <a:lumMod val="60000"/>
-                      <a:lumOff val="40000"/>
+                  <a:outerShdw blurRad="38100" dist="25400" dir="5400000" algn="ctr" rotWithShape="0">
+                    <a:srgbClr val="6E747A">
+                      <a:alpha val="43000"/>
                     </a:srgbClr>
                   </a:outerShdw>
                 </a:effectLst>

--- a/dapan/cau 3.pptx
+++ b/dapan/cau 3.pptx
@@ -148,11 +148,11 @@
               </a:defRPr>
             </a:pPr>
             <a:r>
-              <a:rPr lang="en-US" dirty="0" smtClean="0"/>
+              <a:rPr lang="en-US" dirty="0"/>
               <a:t>ĐVT:</a:t>
             </a:r>
             <a:r>
-              <a:rPr lang="en-US" baseline="0" dirty="0" smtClean="0"/>
+              <a:rPr lang="en-US" baseline="0" dirty="0"/>
               <a:t> USD</a:t>
             </a:r>
             <a:endParaRPr lang="en-US" dirty="0"/>
@@ -634,7 +634,6 @@
     </c:legend>
     <c:plotVisOnly val="1"/>
     <c:dispBlanksAs val="gap"/>
-    <c:showDLblsOverMax val="0"/>
     <c:extLst>
       <c:ext xmlns:c16r3="http://schemas.microsoft.com/office/drawing/2017/03/chart" uri="{56B9EC1D-385E-4148-901F-78D8002777C0}">
         <c16r3:dataDisplayOptions16>
@@ -642,6 +641,7 @@
         </c16r3:dataDisplayOptions16>
       </c:ext>
     </c:extLst>
+    <c:showDLblsOverMax val="0"/>
   </c:chart>
   <c:spPr>
     <a:noFill/>
@@ -1214,7 +1214,7 @@
           </a:lstStyle>
           <a:p>
             <a:r>
-              <a:rPr lang="en-US" smtClean="0"/>
+              <a:rPr lang="en-US"/>
               <a:t>Click to edit Master title style</a:t>
             </a:r>
             <a:endParaRPr lang="en-US" dirty="0"/>
@@ -1279,7 +1279,7 @@
           </a:lstStyle>
           <a:p>
             <a:r>
-              <a:rPr lang="en-US" smtClean="0"/>
+              <a:rPr lang="en-US"/>
               <a:t>Click to edit Master subtitle style</a:t>
             </a:r>
             <a:endParaRPr lang="en-US" dirty="0"/>
@@ -1315,7 +1315,7 @@
               <a:pPr>
                 <a:defRPr/>
               </a:pPr>
-              <a:t>11/16/2025</a:t>
+              <a:t>12/21/2025</a:t>
             </a:fld>
             <a:endParaRPr lang="en-US">
               <a:solidFill>
@@ -1442,7 +1442,7 @@
           <a:lstStyle/>
           <a:p>
             <a:r>
-              <a:rPr lang="en-US" smtClean="0"/>
+              <a:rPr lang="en-US"/>
               <a:t>Click to edit Master title style</a:t>
             </a:r>
             <a:endParaRPr lang="en-US" dirty="0"/>
@@ -1466,35 +1466,35 @@
           <a:p>
             <a:pPr lvl="0"/>
             <a:r>
-              <a:rPr lang="en-US" smtClean="0"/>
+              <a:rPr lang="en-US"/>
               <a:t>Edit Master text styles</a:t>
             </a:r>
           </a:p>
           <a:p>
             <a:pPr lvl="1"/>
             <a:r>
-              <a:rPr lang="en-US" smtClean="0"/>
+              <a:rPr lang="en-US"/>
               <a:t>Second level</a:t>
             </a:r>
           </a:p>
           <a:p>
             <a:pPr lvl="2"/>
             <a:r>
-              <a:rPr lang="en-US" smtClean="0"/>
+              <a:rPr lang="en-US"/>
               <a:t>Third level</a:t>
             </a:r>
           </a:p>
           <a:p>
             <a:pPr lvl="3"/>
             <a:r>
-              <a:rPr lang="en-US" smtClean="0"/>
+              <a:rPr lang="en-US"/>
               <a:t>Fourth level</a:t>
             </a:r>
           </a:p>
           <a:p>
             <a:pPr lvl="4"/>
             <a:r>
-              <a:rPr lang="en-US" smtClean="0"/>
+              <a:rPr lang="en-US"/>
               <a:t>Fifth level</a:t>
             </a:r>
             <a:endParaRPr lang="en-US" dirty="0"/>
@@ -1530,7 +1530,7 @@
               <a:pPr>
                 <a:defRPr/>
               </a:pPr>
-              <a:t>11/16/2025</a:t>
+              <a:t>12/21/2025</a:t>
             </a:fld>
             <a:endParaRPr lang="en-US">
               <a:solidFill>
@@ -1662,7 +1662,7 @@
           <a:lstStyle/>
           <a:p>
             <a:r>
-              <a:rPr lang="en-US" smtClean="0"/>
+              <a:rPr lang="en-US"/>
               <a:t>Click to edit Master title style</a:t>
             </a:r>
             <a:endParaRPr lang="en-US" dirty="0"/>
@@ -1691,35 +1691,35 @@
           <a:p>
             <a:pPr lvl="0"/>
             <a:r>
-              <a:rPr lang="en-US" smtClean="0"/>
+              <a:rPr lang="en-US"/>
               <a:t>Edit Master text styles</a:t>
             </a:r>
           </a:p>
           <a:p>
             <a:pPr lvl="1"/>
             <a:r>
-              <a:rPr lang="en-US" smtClean="0"/>
+              <a:rPr lang="en-US"/>
               <a:t>Second level</a:t>
             </a:r>
           </a:p>
           <a:p>
             <a:pPr lvl="2"/>
             <a:r>
-              <a:rPr lang="en-US" smtClean="0"/>
+              <a:rPr lang="en-US"/>
               <a:t>Third level</a:t>
             </a:r>
           </a:p>
           <a:p>
             <a:pPr lvl="3"/>
             <a:r>
-              <a:rPr lang="en-US" smtClean="0"/>
+              <a:rPr lang="en-US"/>
               <a:t>Fourth level</a:t>
             </a:r>
           </a:p>
           <a:p>
             <a:pPr lvl="4"/>
             <a:r>
-              <a:rPr lang="en-US" smtClean="0"/>
+              <a:rPr lang="en-US"/>
               <a:t>Fifth level</a:t>
             </a:r>
             <a:endParaRPr lang="en-US" dirty="0"/>
@@ -1755,7 +1755,7 @@
               <a:pPr>
                 <a:defRPr/>
               </a:pPr>
-              <a:t>11/16/2025</a:t>
+              <a:t>12/21/2025</a:t>
             </a:fld>
             <a:endParaRPr lang="en-US">
               <a:solidFill>
@@ -2045,7 +2045,7 @@
                 <a:tabLst/>
                 <a:defRPr/>
               </a:pPr>
-              <a:t>11/16/2025</a:t>
+              <a:t>12/21/2025</a:t>
             </a:fld>
             <a:endParaRPr kumimoji="0" lang="en-US" sz="900" b="0" i="0" u="none" strike="noStrike" kern="1200" cap="none" spc="0" normalizeH="0" baseline="0" noProof="0">
               <a:ln>
@@ -2403,7 +2403,7 @@
                 <a:tabLst/>
                 <a:defRPr/>
               </a:pPr>
-              <a:t>11/16/2025</a:t>
+              <a:t>12/21/2025</a:t>
             </a:fld>
             <a:endParaRPr kumimoji="0" lang="en-US" sz="900" b="0" i="0" u="none" strike="noStrike" kern="1200" cap="none" spc="0" normalizeH="0" baseline="0" noProof="0">
               <a:ln>
@@ -2838,7 +2838,7 @@
                 <a:tabLst/>
                 <a:defRPr/>
               </a:pPr>
-              <a:t>11/16/2025</a:t>
+              <a:t>12/21/2025</a:t>
             </a:fld>
             <a:endParaRPr kumimoji="0" lang="en-US" sz="900" b="0" i="0" u="none" strike="noStrike" kern="1200" cap="none" spc="0" normalizeH="0" baseline="0" noProof="0">
               <a:ln>
@@ -3263,7 +3263,7 @@
                 <a:tabLst/>
                 <a:defRPr/>
               </a:pPr>
-              <a:t>11/16/2025</a:t>
+              <a:t>12/21/2025</a:t>
             </a:fld>
             <a:endParaRPr kumimoji="0" lang="en-US" sz="900" b="0" i="0" u="none" strike="noStrike" kern="1200" cap="none" spc="0" normalizeH="0" baseline="0" noProof="0">
               <a:ln>
@@ -3835,7 +3835,7 @@
                 <a:tabLst/>
                 <a:defRPr/>
               </a:pPr>
-              <a:t>11/16/2025</a:t>
+              <a:t>12/21/2025</a:t>
             </a:fld>
             <a:endParaRPr kumimoji="0" lang="en-US" sz="900" b="0" i="0" u="none" strike="noStrike" kern="1200" cap="none" spc="0" normalizeH="0" baseline="0" noProof="0">
               <a:ln>
@@ -4136,7 +4136,7 @@
                 <a:tabLst/>
                 <a:defRPr/>
               </a:pPr>
-              <a:t>11/16/2025</a:t>
+              <a:t>12/21/2025</a:t>
             </a:fld>
             <a:endParaRPr kumimoji="0" lang="en-US" sz="900" b="0" i="0" u="none" strike="noStrike" kern="1200" cap="none" spc="0" normalizeH="0" baseline="0" noProof="0">
               <a:ln>
@@ -4409,7 +4409,7 @@
                 <a:tabLst/>
                 <a:defRPr/>
               </a:pPr>
-              <a:t>11/16/2025</a:t>
+              <a:t>12/21/2025</a:t>
             </a:fld>
             <a:endParaRPr kumimoji="0" lang="en-US" sz="900" b="0" i="0" u="none" strike="noStrike" kern="1200" cap="none" spc="0" normalizeH="0" baseline="0" noProof="0">
               <a:ln>
@@ -4880,7 +4880,7 @@
                 <a:tabLst/>
                 <a:defRPr/>
               </a:pPr>
-              <a:t>11/16/2025</a:t>
+              <a:t>12/21/2025</a:t>
             </a:fld>
             <a:endParaRPr kumimoji="0" lang="en-US" sz="900" b="0" i="0" u="none" strike="noStrike" kern="1200" cap="none" spc="0" normalizeH="0" baseline="0" noProof="0">
               <a:ln>
@@ -5097,7 +5097,7 @@
           <a:lstStyle/>
           <a:p>
             <a:r>
-              <a:rPr lang="en-US" smtClean="0"/>
+              <a:rPr lang="en-US"/>
               <a:t>Click to edit Master title style</a:t>
             </a:r>
             <a:endParaRPr lang="en-US" dirty="0"/>
@@ -5121,35 +5121,35 @@
           <a:p>
             <a:pPr lvl="0"/>
             <a:r>
-              <a:rPr lang="en-US" smtClean="0"/>
+              <a:rPr lang="en-US"/>
               <a:t>Edit Master text styles</a:t>
             </a:r>
           </a:p>
           <a:p>
             <a:pPr lvl="1"/>
             <a:r>
-              <a:rPr lang="en-US" smtClean="0"/>
+              <a:rPr lang="en-US"/>
               <a:t>Second level</a:t>
             </a:r>
           </a:p>
           <a:p>
             <a:pPr lvl="2"/>
             <a:r>
-              <a:rPr lang="en-US" smtClean="0"/>
+              <a:rPr lang="en-US"/>
               <a:t>Third level</a:t>
             </a:r>
           </a:p>
           <a:p>
             <a:pPr lvl="3"/>
             <a:r>
-              <a:rPr lang="en-US" smtClean="0"/>
+              <a:rPr lang="en-US"/>
               <a:t>Fourth level</a:t>
             </a:r>
           </a:p>
           <a:p>
             <a:pPr lvl="4"/>
             <a:r>
-              <a:rPr lang="en-US" smtClean="0"/>
+              <a:rPr lang="en-US"/>
               <a:t>Fifth level</a:t>
             </a:r>
             <a:endParaRPr lang="en-US" dirty="0"/>
@@ -5185,7 +5185,7 @@
               <a:pPr>
                 <a:defRPr/>
               </a:pPr>
-              <a:t>11/16/2025</a:t>
+              <a:t>12/21/2025</a:t>
             </a:fld>
             <a:endParaRPr lang="en-US">
               <a:solidFill>
@@ -5543,7 +5543,7 @@
                 <a:tabLst/>
                 <a:defRPr/>
               </a:pPr>
-              <a:t>11/16/2025</a:t>
+              <a:t>12/21/2025</a:t>
             </a:fld>
             <a:endParaRPr kumimoji="0" lang="en-US" sz="900" b="0" i="0" u="none" strike="noStrike" kern="1200" cap="none" spc="0" normalizeH="0" baseline="0" noProof="0">
               <a:ln>
@@ -5901,7 +5901,7 @@
                 <a:tabLst/>
                 <a:defRPr/>
               </a:pPr>
-              <a:t>11/16/2025</a:t>
+              <a:t>12/21/2025</a:t>
             </a:fld>
             <a:endParaRPr kumimoji="0" lang="en-US" sz="900" b="0" i="0" u="none" strike="noStrike" kern="1200" cap="none" spc="0" normalizeH="0" baseline="0" noProof="0">
               <a:ln>
@@ -6269,7 +6269,7 @@
                 <a:tabLst/>
                 <a:defRPr/>
               </a:pPr>
-              <a:t>11/16/2025</a:t>
+              <a:t>12/21/2025</a:t>
             </a:fld>
             <a:endParaRPr kumimoji="0" lang="en-US" sz="900" b="0" i="0" u="none" strike="noStrike" kern="1200" cap="none" spc="0" normalizeH="0" baseline="0" noProof="0">
               <a:ln>
@@ -6495,7 +6495,7 @@
           </a:lstStyle>
           <a:p>
             <a:r>
-              <a:rPr lang="en-US" smtClean="0"/>
+              <a:rPr lang="en-US"/>
               <a:t>Click to edit Master title style</a:t>
             </a:r>
             <a:endParaRPr lang="en-US" dirty="0"/>
@@ -6613,7 +6613,7 @@
           <a:p>
             <a:pPr lvl="0"/>
             <a:r>
-              <a:rPr lang="en-US" smtClean="0"/>
+              <a:rPr lang="en-US"/>
               <a:t>Edit Master text styles</a:t>
             </a:r>
           </a:p>
@@ -6648,7 +6648,7 @@
               <a:pPr>
                 <a:defRPr/>
               </a:pPr>
-              <a:t>11/16/2025</a:t>
+              <a:t>12/21/2025</a:t>
             </a:fld>
             <a:endParaRPr lang="en-US">
               <a:solidFill>
@@ -6775,7 +6775,7 @@
           <a:lstStyle/>
           <a:p>
             <a:r>
-              <a:rPr lang="en-US" smtClean="0"/>
+              <a:rPr lang="en-US"/>
               <a:t>Click to edit Master title style</a:t>
             </a:r>
             <a:endParaRPr lang="en-US" dirty="0"/>
@@ -6804,35 +6804,35 @@
           <a:p>
             <a:pPr lvl="0"/>
             <a:r>
-              <a:rPr lang="en-US" smtClean="0"/>
+              <a:rPr lang="en-US"/>
               <a:t>Edit Master text styles</a:t>
             </a:r>
           </a:p>
           <a:p>
             <a:pPr lvl="1"/>
             <a:r>
-              <a:rPr lang="en-US" smtClean="0"/>
+              <a:rPr lang="en-US"/>
               <a:t>Second level</a:t>
             </a:r>
           </a:p>
           <a:p>
             <a:pPr lvl="2"/>
             <a:r>
-              <a:rPr lang="en-US" smtClean="0"/>
+              <a:rPr lang="en-US"/>
               <a:t>Third level</a:t>
             </a:r>
           </a:p>
           <a:p>
             <a:pPr lvl="3"/>
             <a:r>
-              <a:rPr lang="en-US" smtClean="0"/>
+              <a:rPr lang="en-US"/>
               <a:t>Fourth level</a:t>
             </a:r>
           </a:p>
           <a:p>
             <a:pPr lvl="4"/>
             <a:r>
-              <a:rPr lang="en-US" smtClean="0"/>
+              <a:rPr lang="en-US"/>
               <a:t>Fifth level</a:t>
             </a:r>
             <a:endParaRPr lang="en-US" dirty="0"/>
@@ -6861,35 +6861,35 @@
           <a:p>
             <a:pPr lvl="0"/>
             <a:r>
-              <a:rPr lang="en-US" smtClean="0"/>
+              <a:rPr lang="en-US"/>
               <a:t>Edit Master text styles</a:t>
             </a:r>
           </a:p>
           <a:p>
             <a:pPr lvl="1"/>
             <a:r>
-              <a:rPr lang="en-US" smtClean="0"/>
+              <a:rPr lang="en-US"/>
               <a:t>Second level</a:t>
             </a:r>
           </a:p>
           <a:p>
             <a:pPr lvl="2"/>
             <a:r>
-              <a:rPr lang="en-US" smtClean="0"/>
+              <a:rPr lang="en-US"/>
               <a:t>Third level</a:t>
             </a:r>
           </a:p>
           <a:p>
             <a:pPr lvl="3"/>
             <a:r>
-              <a:rPr lang="en-US" smtClean="0"/>
+              <a:rPr lang="en-US"/>
               <a:t>Fourth level</a:t>
             </a:r>
           </a:p>
           <a:p>
             <a:pPr lvl="4"/>
             <a:r>
-              <a:rPr lang="en-US" smtClean="0"/>
+              <a:rPr lang="en-US"/>
               <a:t>Fifth level</a:t>
             </a:r>
             <a:endParaRPr lang="en-US" dirty="0"/>
@@ -6925,7 +6925,7 @@
               <a:pPr>
                 <a:defRPr/>
               </a:pPr>
-              <a:t>11/16/2025</a:t>
+              <a:t>12/21/2025</a:t>
             </a:fld>
             <a:endParaRPr lang="en-US">
               <a:solidFill>
@@ -7057,7 +7057,7 @@
           <a:lstStyle/>
           <a:p>
             <a:r>
-              <a:rPr lang="en-US" smtClean="0"/>
+              <a:rPr lang="en-US"/>
               <a:t>Click to edit Master title style</a:t>
             </a:r>
             <a:endParaRPr lang="en-US" dirty="0"/>
@@ -7123,7 +7123,7 @@
           <a:p>
             <a:pPr lvl="0"/>
             <a:r>
-              <a:rPr lang="en-US" smtClean="0"/>
+              <a:rPr lang="en-US"/>
               <a:t>Edit Master text styles</a:t>
             </a:r>
           </a:p>
@@ -7151,35 +7151,35 @@
           <a:p>
             <a:pPr lvl="0"/>
             <a:r>
-              <a:rPr lang="en-US" smtClean="0"/>
+              <a:rPr lang="en-US"/>
               <a:t>Edit Master text styles</a:t>
             </a:r>
           </a:p>
           <a:p>
             <a:pPr lvl="1"/>
             <a:r>
-              <a:rPr lang="en-US" smtClean="0"/>
+              <a:rPr lang="en-US"/>
               <a:t>Second level</a:t>
             </a:r>
           </a:p>
           <a:p>
             <a:pPr lvl="2"/>
             <a:r>
-              <a:rPr lang="en-US" smtClean="0"/>
+              <a:rPr lang="en-US"/>
               <a:t>Third level</a:t>
             </a:r>
           </a:p>
           <a:p>
             <a:pPr lvl="3"/>
             <a:r>
-              <a:rPr lang="en-US" smtClean="0"/>
+              <a:rPr lang="en-US"/>
               <a:t>Fourth level</a:t>
             </a:r>
           </a:p>
           <a:p>
             <a:pPr lvl="4"/>
             <a:r>
-              <a:rPr lang="en-US" smtClean="0"/>
+              <a:rPr lang="en-US"/>
               <a:t>Fifth level</a:t>
             </a:r>
             <a:endParaRPr lang="en-US" dirty="0"/>
@@ -7245,7 +7245,7 @@
           <a:p>
             <a:pPr lvl="0"/>
             <a:r>
-              <a:rPr lang="en-US" smtClean="0"/>
+              <a:rPr lang="en-US"/>
               <a:t>Edit Master text styles</a:t>
             </a:r>
           </a:p>
@@ -7273,35 +7273,35 @@
           <a:p>
             <a:pPr lvl="0"/>
             <a:r>
-              <a:rPr lang="en-US" smtClean="0"/>
+              <a:rPr lang="en-US"/>
               <a:t>Edit Master text styles</a:t>
             </a:r>
           </a:p>
           <a:p>
             <a:pPr lvl="1"/>
             <a:r>
-              <a:rPr lang="en-US" smtClean="0"/>
+              <a:rPr lang="en-US"/>
               <a:t>Second level</a:t>
             </a:r>
           </a:p>
           <a:p>
             <a:pPr lvl="2"/>
             <a:r>
-              <a:rPr lang="en-US" smtClean="0"/>
+              <a:rPr lang="en-US"/>
               <a:t>Third level</a:t>
             </a:r>
           </a:p>
           <a:p>
             <a:pPr lvl="3"/>
             <a:r>
-              <a:rPr lang="en-US" smtClean="0"/>
+              <a:rPr lang="en-US"/>
               <a:t>Fourth level</a:t>
             </a:r>
           </a:p>
           <a:p>
             <a:pPr lvl="4"/>
             <a:r>
-              <a:rPr lang="en-US" smtClean="0"/>
+              <a:rPr lang="en-US"/>
               <a:t>Fifth level</a:t>
             </a:r>
             <a:endParaRPr lang="en-US" dirty="0"/>
@@ -7337,7 +7337,7 @@
               <a:pPr>
                 <a:defRPr/>
               </a:pPr>
-              <a:t>11/16/2025</a:t>
+              <a:t>12/21/2025</a:t>
             </a:fld>
             <a:endParaRPr lang="en-US">
               <a:solidFill>
@@ -7464,7 +7464,7 @@
           <a:lstStyle/>
           <a:p>
             <a:r>
-              <a:rPr lang="en-US" smtClean="0"/>
+              <a:rPr lang="en-US"/>
               <a:t>Click to edit Master title style</a:t>
             </a:r>
             <a:endParaRPr lang="en-US" dirty="0"/>
@@ -7500,7 +7500,7 @@
               <a:pPr>
                 <a:defRPr/>
               </a:pPr>
-              <a:t>11/16/2025</a:t>
+              <a:t>12/21/2025</a:t>
             </a:fld>
             <a:endParaRPr lang="en-US">
               <a:solidFill>
@@ -7640,7 +7640,7 @@
               <a:pPr>
                 <a:defRPr/>
               </a:pPr>
-              <a:t>11/16/2025</a:t>
+              <a:t>12/21/2025</a:t>
             </a:fld>
             <a:endParaRPr lang="en-US">
               <a:solidFill>
@@ -7776,7 +7776,7 @@
           </a:lstStyle>
           <a:p>
             <a:r>
-              <a:rPr lang="en-US" smtClean="0"/>
+              <a:rPr lang="en-US"/>
               <a:t>Click to edit Master title style</a:t>
             </a:r>
             <a:endParaRPr lang="en-US" dirty="0"/>
@@ -7833,35 +7833,35 @@
           <a:p>
             <a:pPr lvl="0"/>
             <a:r>
-              <a:rPr lang="en-US" smtClean="0"/>
+              <a:rPr lang="en-US"/>
               <a:t>Edit Master text styles</a:t>
             </a:r>
           </a:p>
           <a:p>
             <a:pPr lvl="1"/>
             <a:r>
-              <a:rPr lang="en-US" smtClean="0"/>
+              <a:rPr lang="en-US"/>
               <a:t>Second level</a:t>
             </a:r>
           </a:p>
           <a:p>
             <a:pPr lvl="2"/>
             <a:r>
-              <a:rPr lang="en-US" smtClean="0"/>
+              <a:rPr lang="en-US"/>
               <a:t>Third level</a:t>
             </a:r>
           </a:p>
           <a:p>
             <a:pPr lvl="3"/>
             <a:r>
-              <a:rPr lang="en-US" smtClean="0"/>
+              <a:rPr lang="en-US"/>
               <a:t>Fourth level</a:t>
             </a:r>
           </a:p>
           <a:p>
             <a:pPr lvl="4"/>
             <a:r>
-              <a:rPr lang="en-US" smtClean="0"/>
+              <a:rPr lang="en-US"/>
               <a:t>Fifth level</a:t>
             </a:r>
             <a:endParaRPr lang="en-US" dirty="0"/>
@@ -7927,7 +7927,7 @@
           <a:p>
             <a:pPr lvl="0"/>
             <a:r>
-              <a:rPr lang="en-US" smtClean="0"/>
+              <a:rPr lang="en-US"/>
               <a:t>Edit Master text styles</a:t>
             </a:r>
           </a:p>
@@ -7962,7 +7962,7 @@
               <a:pPr>
                 <a:defRPr/>
               </a:pPr>
-              <a:t>11/16/2025</a:t>
+              <a:t>12/21/2025</a:t>
             </a:fld>
             <a:endParaRPr lang="en-US">
               <a:solidFill>
@@ -8098,7 +8098,7 @@
           </a:lstStyle>
           <a:p>
             <a:r>
-              <a:rPr lang="en-US" smtClean="0"/>
+              <a:rPr lang="en-US"/>
               <a:t>Click to edit Master title style</a:t>
             </a:r>
             <a:endParaRPr lang="en-US" dirty="0"/>
@@ -8163,7 +8163,7 @@
           </a:lstStyle>
           <a:p>
             <a:r>
-              <a:rPr lang="en-US" smtClean="0"/>
+              <a:rPr lang="en-US"/>
               <a:t>Click icon to add picture</a:t>
             </a:r>
             <a:endParaRPr lang="en-US" dirty="0"/>
@@ -8229,7 +8229,7 @@
           <a:p>
             <a:pPr lvl="0"/>
             <a:r>
-              <a:rPr lang="en-US" smtClean="0"/>
+              <a:rPr lang="en-US"/>
               <a:t>Edit Master text styles</a:t>
             </a:r>
           </a:p>
@@ -8264,7 +8264,7 @@
               <a:pPr>
                 <a:defRPr/>
               </a:pPr>
-              <a:t>11/16/2025</a:t>
+              <a:t>12/21/2025</a:t>
             </a:fld>
             <a:endParaRPr lang="en-US">
               <a:solidFill>
@@ -8406,7 +8406,7 @@
           <a:lstStyle/>
           <a:p>
             <a:r>
-              <a:rPr lang="en-US" smtClean="0"/>
+              <a:rPr lang="en-US"/>
               <a:t>Click to edit Master title style</a:t>
             </a:r>
             <a:endParaRPr lang="en-US" dirty="0"/>
@@ -8440,35 +8440,35 @@
           <a:p>
             <a:pPr lvl="0"/>
             <a:r>
-              <a:rPr lang="en-US" smtClean="0"/>
+              <a:rPr lang="en-US"/>
               <a:t>Edit Master text styles</a:t>
             </a:r>
           </a:p>
           <a:p>
             <a:pPr lvl="1"/>
             <a:r>
-              <a:rPr lang="en-US" smtClean="0"/>
+              <a:rPr lang="en-US"/>
               <a:t>Second level</a:t>
             </a:r>
           </a:p>
           <a:p>
             <a:pPr lvl="2"/>
             <a:r>
-              <a:rPr lang="en-US" smtClean="0"/>
+              <a:rPr lang="en-US"/>
               <a:t>Third level</a:t>
             </a:r>
           </a:p>
           <a:p>
             <a:pPr lvl="3"/>
             <a:r>
-              <a:rPr lang="en-US" smtClean="0"/>
+              <a:rPr lang="en-US"/>
               <a:t>Fourth level</a:t>
             </a:r>
           </a:p>
           <a:p>
             <a:pPr lvl="4"/>
             <a:r>
-              <a:rPr lang="en-US" smtClean="0"/>
+              <a:rPr lang="en-US"/>
               <a:t>Fifth level</a:t>
             </a:r>
             <a:endParaRPr lang="en-US" dirty="0"/>
@@ -8510,7 +8510,7 @@
           <a:p>
             <a:fld id="{625DED5C-A84D-480A-A1E4-45CC1BC2F9C5}" type="datetimeFigureOut">
               <a:rPr lang="en-US" smtClean="0"/>
-              <a:t>11/16/2025</a:t>
+              <a:t>12/21/2025</a:t>
             </a:fld>
             <a:endParaRPr lang="en-US"/>
           </a:p>
@@ -9115,7 +9115,7 @@
                 <a:tabLst/>
                 <a:defRPr/>
               </a:pPr>
-              <a:t>11/16/2025</a:t>
+              <a:t>12/21/2025</a:t>
             </a:fld>
             <a:endParaRPr kumimoji="0" lang="en-US" sz="900" b="0" i="0" u="none" strike="noStrike" kern="1200" cap="none" spc="0" normalizeH="0" baseline="0" noProof="0">
               <a:ln>
@@ -9851,45 +9851,8 @@
                 <a:ea typeface="+mn-ea"/>
                 <a:cs typeface="Arial" panose="020B0604020202020204" pitchFamily="34" charset="0"/>
               </a:rPr>
-              <a:t>Slide </a:t>
-            </a:r>
-            <a:r>
-              <a:rPr kumimoji="0" lang="en-US" sz="2400" b="1" i="0" u="none" strike="noStrike" kern="1200" cap="none" spc="0" normalizeH="0" baseline="0" noProof="0" dirty="0" smtClean="0">
-                <a:ln w="12700" cmpd="sng">
-                  <a:solidFill>
-                    <a:srgbClr val="FFC000"/>
-                  </a:solidFill>
-                  <a:prstDash val="solid"/>
-                </a:ln>
-                <a:solidFill>
-                  <a:srgbClr val="FFFF00"/>
-                </a:solidFill>
-                <a:effectLst/>
-                <a:uLnTx/>
-                <a:uFillTx/>
-                <a:latin typeface="Arial" panose="020B0604020202020204" pitchFamily="34" charset="0"/>
-                <a:ea typeface="+mn-ea"/>
-                <a:cs typeface="Arial" panose="020B0604020202020204" pitchFamily="34" charset="0"/>
-              </a:rPr>
-              <a:t>1</a:t>
-            </a:r>
-            <a:endParaRPr kumimoji="0" lang="en-US" sz="2400" b="1" i="0" u="none" strike="noStrike" kern="1200" cap="none" spc="0" normalizeH="0" baseline="0" noProof="0" dirty="0">
-              <a:ln w="12700" cmpd="sng">
-                <a:solidFill>
-                  <a:srgbClr val="FFC000"/>
-                </a:solidFill>
-                <a:prstDash val="solid"/>
-              </a:ln>
-              <a:solidFill>
-                <a:srgbClr val="FFFF00"/>
-              </a:solidFill>
-              <a:effectLst/>
-              <a:uLnTx/>
-              <a:uFillTx/>
-              <a:latin typeface="Arial" panose="020B0604020202020204" pitchFamily="34" charset="0"/>
-              <a:ea typeface="+mn-ea"/>
-              <a:cs typeface="Arial" panose="020B0604020202020204" pitchFamily="34" charset="0"/>
-            </a:endParaRPr>
+              <a:t>Slide 1</a:t>
+            </a:r>
           </a:p>
         </p:txBody>
       </p:sp>
@@ -9967,13 +9930,6 @@
   <p:transition spd="slow">
     <p:randomBar dir="vert"/>
   </p:transition>
-  <p:timing>
-    <p:tnLst>
-      <p:par>
-        <p:cTn id="1" dur="indefinite" restart="never" nodeType="tmRoot"/>
-      </p:par>
-    </p:tnLst>
-  </p:timing>
 </p:sld>
 </file>
 
@@ -11627,7 +11583,7 @@
         <p:spPr>
           <a:xfrm>
             <a:off x="5823032" y="3536373"/>
-            <a:ext cx="1383776" cy="1383776"/>
+            <a:ext cx="1449036" cy="1383776"/>
           </a:xfrm>
           <a:custGeom>
             <a:avLst/>
@@ -13311,7 +13267,7 @@
           <a:lstStyle/>
           <a:p>
             <a:r>
-              <a:rPr lang="en-US" sz="3600" b="1" dirty="0" smtClean="0">
+              <a:rPr lang="en-US" sz="3600" b="1" dirty="0">
                 <a:ln w="6600">
                   <a:solidFill>
                     <a:schemeClr val="accent2"/>
@@ -13331,24 +13287,6 @@
               </a:rPr>
               <a:t>TÌNH HÌNH KINH TẾ NĂM 2024</a:t>
             </a:r>
-            <a:endParaRPr lang="en-US" sz="3600" b="1" dirty="0">
-              <a:ln w="6600">
-                <a:solidFill>
-                  <a:schemeClr val="accent2"/>
-                </a:solidFill>
-                <a:prstDash val="solid"/>
-              </a:ln>
-              <a:solidFill>
-                <a:srgbClr val="0070C0"/>
-              </a:solidFill>
-              <a:effectLst>
-                <a:outerShdw dist="38100" dir="2700000" algn="tl" rotWithShape="0">
-                  <a:schemeClr val="accent2"/>
-                </a:outerShdw>
-              </a:effectLst>
-              <a:latin typeface="Arial" panose="020B0604020202020204" pitchFamily="34" charset="0"/>
-              <a:cs typeface="Arial" panose="020B0604020202020204" pitchFamily="34" charset="0"/>
-            </a:endParaRPr>
           </a:p>
         </p:txBody>
       </p:sp>

--- a/dapan/cau 3.pptx
+++ b/dapan/cau 3.pptx
@@ -1315,7 +1315,7 @@
               <a:pPr>
                 <a:defRPr/>
               </a:pPr>
-              <a:t>1/31/2026</a:t>
+              <a:t>2/1/2026</a:t>
             </a:fld>
             <a:endParaRPr lang="en-US">
               <a:solidFill>
@@ -1530,7 +1530,7 @@
               <a:pPr>
                 <a:defRPr/>
               </a:pPr>
-              <a:t>1/31/2026</a:t>
+              <a:t>2/1/2026</a:t>
             </a:fld>
             <a:endParaRPr lang="en-US">
               <a:solidFill>
@@ -1755,7 +1755,7 @@
               <a:pPr>
                 <a:defRPr/>
               </a:pPr>
-              <a:t>1/31/2026</a:t>
+              <a:t>2/1/2026</a:t>
             </a:fld>
             <a:endParaRPr lang="en-US">
               <a:solidFill>
@@ -2045,7 +2045,7 @@
                 <a:tabLst/>
                 <a:defRPr/>
               </a:pPr>
-              <a:t>1/31/2026</a:t>
+              <a:t>2/1/2026</a:t>
             </a:fld>
             <a:endParaRPr kumimoji="0" lang="en-US" sz="900" b="0" i="0" u="none" strike="noStrike" kern="1200" cap="none" spc="0" normalizeH="0" baseline="0" noProof="0">
               <a:ln>
@@ -2403,7 +2403,7 @@
                 <a:tabLst/>
                 <a:defRPr/>
               </a:pPr>
-              <a:t>1/31/2026</a:t>
+              <a:t>2/1/2026</a:t>
             </a:fld>
             <a:endParaRPr kumimoji="0" lang="en-US" sz="900" b="0" i="0" u="none" strike="noStrike" kern="1200" cap="none" spc="0" normalizeH="0" baseline="0" noProof="0">
               <a:ln>
@@ -2838,7 +2838,7 @@
                 <a:tabLst/>
                 <a:defRPr/>
               </a:pPr>
-              <a:t>1/31/2026</a:t>
+              <a:t>2/1/2026</a:t>
             </a:fld>
             <a:endParaRPr kumimoji="0" lang="en-US" sz="900" b="0" i="0" u="none" strike="noStrike" kern="1200" cap="none" spc="0" normalizeH="0" baseline="0" noProof="0">
               <a:ln>
@@ -3263,7 +3263,7 @@
                 <a:tabLst/>
                 <a:defRPr/>
               </a:pPr>
-              <a:t>1/31/2026</a:t>
+              <a:t>2/1/2026</a:t>
             </a:fld>
             <a:endParaRPr kumimoji="0" lang="en-US" sz="900" b="0" i="0" u="none" strike="noStrike" kern="1200" cap="none" spc="0" normalizeH="0" baseline="0" noProof="0">
               <a:ln>
@@ -3835,7 +3835,7 @@
                 <a:tabLst/>
                 <a:defRPr/>
               </a:pPr>
-              <a:t>1/31/2026</a:t>
+              <a:t>2/1/2026</a:t>
             </a:fld>
             <a:endParaRPr kumimoji="0" lang="en-US" sz="900" b="0" i="0" u="none" strike="noStrike" kern="1200" cap="none" spc="0" normalizeH="0" baseline="0" noProof="0">
               <a:ln>
@@ -4136,7 +4136,7 @@
                 <a:tabLst/>
                 <a:defRPr/>
               </a:pPr>
-              <a:t>1/31/2026</a:t>
+              <a:t>2/1/2026</a:t>
             </a:fld>
             <a:endParaRPr kumimoji="0" lang="en-US" sz="900" b="0" i="0" u="none" strike="noStrike" kern="1200" cap="none" spc="0" normalizeH="0" baseline="0" noProof="0">
               <a:ln>
@@ -4409,7 +4409,7 @@
                 <a:tabLst/>
                 <a:defRPr/>
               </a:pPr>
-              <a:t>1/31/2026</a:t>
+              <a:t>2/1/2026</a:t>
             </a:fld>
             <a:endParaRPr kumimoji="0" lang="en-US" sz="900" b="0" i="0" u="none" strike="noStrike" kern="1200" cap="none" spc="0" normalizeH="0" baseline="0" noProof="0">
               <a:ln>
@@ -4880,7 +4880,7 @@
                 <a:tabLst/>
                 <a:defRPr/>
               </a:pPr>
-              <a:t>1/31/2026</a:t>
+              <a:t>2/1/2026</a:t>
             </a:fld>
             <a:endParaRPr kumimoji="0" lang="en-US" sz="900" b="0" i="0" u="none" strike="noStrike" kern="1200" cap="none" spc="0" normalizeH="0" baseline="0" noProof="0">
               <a:ln>
@@ -5185,7 +5185,7 @@
               <a:pPr>
                 <a:defRPr/>
               </a:pPr>
-              <a:t>1/31/2026</a:t>
+              <a:t>2/1/2026</a:t>
             </a:fld>
             <a:endParaRPr lang="en-US">
               <a:solidFill>
@@ -5543,7 +5543,7 @@
                 <a:tabLst/>
                 <a:defRPr/>
               </a:pPr>
-              <a:t>1/31/2026</a:t>
+              <a:t>2/1/2026</a:t>
             </a:fld>
             <a:endParaRPr kumimoji="0" lang="en-US" sz="900" b="0" i="0" u="none" strike="noStrike" kern="1200" cap="none" spc="0" normalizeH="0" baseline="0" noProof="0">
               <a:ln>
@@ -5901,7 +5901,7 @@
                 <a:tabLst/>
                 <a:defRPr/>
               </a:pPr>
-              <a:t>1/31/2026</a:t>
+              <a:t>2/1/2026</a:t>
             </a:fld>
             <a:endParaRPr kumimoji="0" lang="en-US" sz="900" b="0" i="0" u="none" strike="noStrike" kern="1200" cap="none" spc="0" normalizeH="0" baseline="0" noProof="0">
               <a:ln>
@@ -6269,7 +6269,7 @@
                 <a:tabLst/>
                 <a:defRPr/>
               </a:pPr>
-              <a:t>1/31/2026</a:t>
+              <a:t>2/1/2026</a:t>
             </a:fld>
             <a:endParaRPr kumimoji="0" lang="en-US" sz="900" b="0" i="0" u="none" strike="noStrike" kern="1200" cap="none" spc="0" normalizeH="0" baseline="0" noProof="0">
               <a:ln>
@@ -6648,7 +6648,7 @@
               <a:pPr>
                 <a:defRPr/>
               </a:pPr>
-              <a:t>1/31/2026</a:t>
+              <a:t>2/1/2026</a:t>
             </a:fld>
             <a:endParaRPr lang="en-US">
               <a:solidFill>
@@ -6925,7 +6925,7 @@
               <a:pPr>
                 <a:defRPr/>
               </a:pPr>
-              <a:t>1/31/2026</a:t>
+              <a:t>2/1/2026</a:t>
             </a:fld>
             <a:endParaRPr lang="en-US">
               <a:solidFill>
@@ -7337,7 +7337,7 @@
               <a:pPr>
                 <a:defRPr/>
               </a:pPr>
-              <a:t>1/31/2026</a:t>
+              <a:t>2/1/2026</a:t>
             </a:fld>
             <a:endParaRPr lang="en-US">
               <a:solidFill>
@@ -7500,7 +7500,7 @@
               <a:pPr>
                 <a:defRPr/>
               </a:pPr>
-              <a:t>1/31/2026</a:t>
+              <a:t>2/1/2026</a:t>
             </a:fld>
             <a:endParaRPr lang="en-US">
               <a:solidFill>
@@ -7640,7 +7640,7 @@
               <a:pPr>
                 <a:defRPr/>
               </a:pPr>
-              <a:t>1/31/2026</a:t>
+              <a:t>2/1/2026</a:t>
             </a:fld>
             <a:endParaRPr lang="en-US">
               <a:solidFill>
@@ -7962,7 +7962,7 @@
               <a:pPr>
                 <a:defRPr/>
               </a:pPr>
-              <a:t>1/31/2026</a:t>
+              <a:t>2/1/2026</a:t>
             </a:fld>
             <a:endParaRPr lang="en-US">
               <a:solidFill>
@@ -8264,7 +8264,7 @@
               <a:pPr>
                 <a:defRPr/>
               </a:pPr>
-              <a:t>1/31/2026</a:t>
+              <a:t>2/1/2026</a:t>
             </a:fld>
             <a:endParaRPr lang="en-US">
               <a:solidFill>
@@ -8510,7 +8510,7 @@
           <a:p>
             <a:fld id="{625DED5C-A84D-480A-A1E4-45CC1BC2F9C5}" type="datetimeFigureOut">
               <a:rPr lang="en-US" smtClean="0"/>
-              <a:t>1/31/2026</a:t>
+              <a:t>2/1/2026</a:t>
             </a:fld>
             <a:endParaRPr lang="en-US"/>
           </a:p>
@@ -9115,7 +9115,7 @@
                 <a:tabLst/>
                 <a:defRPr/>
               </a:pPr>
-              <a:t>1/31/2026</a:t>
+              <a:t>2/1/2026</a:t>
             </a:fld>
             <a:endParaRPr kumimoji="0" lang="en-US" sz="900" b="0" i="0" u="none" strike="noStrike" kern="1200" cap="none" spc="0" normalizeH="0" baseline="0" noProof="0">
               <a:ln>
@@ -9885,8 +9885,8 @@
         </p:blipFill>
         <p:spPr>
           <a:xfrm>
-            <a:off x="1776300" y="1630432"/>
-            <a:ext cx="5715000" cy="3629025"/>
+            <a:off x="1776299" y="1630432"/>
+            <a:ext cx="5868617" cy="3726572"/>
           </a:xfrm>
           <a:prstGeom prst="roundRect">
             <a:avLst>
